--- a/ai_automotive_motor_ecu_v_cycle.pptx
+++ b/ai_automotive_motor_ecu_v_cycle.pptx
@@ -10,8 +10,6 @@
     <p:sldId id="258" r:id="rId9"/>
     <p:sldId id="259" r:id="rId10"/>
     <p:sldId id="260" r:id="rId11"/>
-    <p:sldId id="261" r:id="rId12"/>
-    <p:sldId id="262" r:id="rId13"/>
   </p:sldIdLst>
   <p:sldSz cx="12191695" cy="6858000" type="screen4x3"/>
   <p:notesSz cx="6858000" cy="9144000"/>
@@ -3110,18 +3108,20 @@
         </p:nvSpPr>
         <p:spPr>
           <a:xfrm>
-            <a:off x="822960" y="1828800"/>
-            <a:ext cx="3271418" cy="2057400"/>
+            <a:off x="548640" y="1783334"/>
+            <a:ext cx="2650159" cy="1530806"/>
           </a:xfrm>
           <a:prstGeom prst="roundRect">
             <a:avLst>
-              <a:gd name="adj" fmla="val 2000"/>
+              <a:gd name="adj" fmla="val 4000"/>
             </a:avLst>
           </a:prstGeom>
-          <a:noFill/>
-          <a:ln w="6350">
+          <a:solidFill>
+            <a:srgbClr val="222A3B"/>
+          </a:solidFill>
+          <a:ln w="12700">
             <a:solidFill>
-              <a:srgbClr val="3F4555"/>
+              <a:srgbClr val="3A4150"/>
             </a:solidFill>
           </a:ln>
         </p:spPr>
@@ -3155,8 +3155,8 @@
         </p:nvSpPr>
         <p:spPr>
           <a:xfrm>
-            <a:off x="1005840" y="2011680"/>
-            <a:ext cx="2905658" cy="1691640"/>
+            <a:off x="694944" y="1929638"/>
+            <a:ext cx="2357551" cy="1238198"/>
           </a:xfrm>
           <a:prstGeom prst="rect">
             <a:avLst/>
@@ -3164,21 +3164,21 @@
           <a:noFill/>
         </p:spPr>
         <p:txBody>
-          <a:bodyPr wrap="square" lIns="0" tIns="0" rIns="0" bIns="0">
+          <a:bodyPr wrap="square" anchor="ctr" lIns="0" tIns="0" rIns="0" bIns="0">
             <a:spAutoFit/>
           </a:bodyPr>
           <a:lstStyle/>
           <a:p>
             <a:pPr algn="l">
               <a:spcAft>
-                <a:spcPts val="400"/>
+                <a:spcPts val="190"/>
               </a:spcAft>
               <a:buNone/>
             </a:pPr>
             <a:r>
-              <a:rPr sz="4000" b="1" i="0" u="none">
-                <a:solidFill>
-                  <a:srgbClr val="1D4ED8"/>
+              <a:rPr sz="2820" b="1" i="0" u="none">
+                <a:solidFill>
+                  <a:srgbClr val="38BDF8"/>
                 </a:solidFill>
                 <a:latin typeface="Calibri"/>
               </a:rPr>
@@ -3188,18 +3188,18 @@
           <a:p>
             <a:pPr algn="l">
               <a:spcAft>
-                <a:spcPts val="600"/>
+                <a:spcPts val="190"/>
               </a:spcAft>
               <a:buNone/>
             </a:pPr>
             <a:r>
-              <a:rPr sz="1600" b="0" i="0" u="none">
-                <a:solidFill>
-                  <a:srgbClr val="9CA3AF"/>
-                </a:solidFill>
-                <a:latin typeface="Calibri"/>
-              </a:rPr>
-              <a:t>Test Authoring Automation Automates CAPL, Python, and fault-injection scripts</a:t>
+              <a:rPr sz="1130" b="1" i="0" u="none">
+                <a:solidFill>
+                  <a:srgbClr val="F9FAFB"/>
+                </a:solidFill>
+                <a:latin typeface="Calibri"/>
+              </a:rPr>
+              <a:t>Test Authoring Automation</a:t>
             </a:r>
           </a:p>
           <a:p>
@@ -3207,13 +3207,13 @@
               <a:buNone/>
             </a:pPr>
             <a:r>
-              <a:rPr sz="1210" b="1" i="0" u="none">
+              <a:rPr sz="940" b="1" i="0" u="none">
                 <a:solidFill>
                   <a:srgbClr val="0D9488"/>
                 </a:solidFill>
                 <a:latin typeface="Calibri"/>
               </a:rPr>
-              <a:t>▲ 3.5x SIL/HIL Coverage</a:t>
+              <a:t>▲ 3.5x SIL/HIL Coverage · Automates CAPL, Python, and fault-injection scripts</a:t>
             </a:r>
           </a:p>
         </p:txBody>
@@ -3226,18 +3226,20 @@
         </p:nvSpPr>
         <p:spPr>
           <a:xfrm>
-            <a:off x="4460138" y="1828800"/>
-            <a:ext cx="3271418" cy="2057400"/>
+            <a:off x="3363391" y="1783334"/>
+            <a:ext cx="2650159" cy="1530806"/>
           </a:xfrm>
           <a:prstGeom prst="roundRect">
             <a:avLst>
-              <a:gd name="adj" fmla="val 2000"/>
+              <a:gd name="adj" fmla="val 4000"/>
             </a:avLst>
           </a:prstGeom>
-          <a:noFill/>
-          <a:ln w="6350">
+          <a:solidFill>
+            <a:srgbClr val="222A3B"/>
+          </a:solidFill>
+          <a:ln w="12700">
             <a:solidFill>
-              <a:srgbClr val="3F4555"/>
+              <a:srgbClr val="3A4150"/>
             </a:solidFill>
           </a:ln>
         </p:spPr>
@@ -3271,8 +3273,8 @@
         </p:nvSpPr>
         <p:spPr>
           <a:xfrm>
-            <a:off x="4643018" y="2011680"/>
-            <a:ext cx="2905658" cy="1691640"/>
+            <a:off x="3509695" y="1929638"/>
+            <a:ext cx="2357551" cy="1238198"/>
           </a:xfrm>
           <a:prstGeom prst="rect">
             <a:avLst/>
@@ -3280,21 +3282,21 @@
           <a:noFill/>
         </p:spPr>
         <p:txBody>
-          <a:bodyPr wrap="square" lIns="0" tIns="0" rIns="0" bIns="0">
+          <a:bodyPr wrap="square" anchor="ctr" lIns="0" tIns="0" rIns="0" bIns="0">
             <a:spAutoFit/>
           </a:bodyPr>
           <a:lstStyle/>
           <a:p>
             <a:pPr algn="l">
               <a:spcAft>
-                <a:spcPts val="400"/>
+                <a:spcPts val="190"/>
               </a:spcAft>
               <a:buNone/>
             </a:pPr>
             <a:r>
-              <a:rPr sz="4000" b="1" i="0" u="none">
-                <a:solidFill>
-                  <a:srgbClr val="1D4ED8"/>
+              <a:rPr sz="2820" b="1" i="0" u="none">
+                <a:solidFill>
+                  <a:srgbClr val="38BDF8"/>
                 </a:solidFill>
                 <a:latin typeface="Calibri"/>
               </a:rPr>
@@ -3304,18 +3306,18 @@
           <a:p>
             <a:pPr algn="l">
               <a:spcAft>
-                <a:spcPts val="600"/>
+                <a:spcPts val="190"/>
               </a:spcAft>
               <a:buNone/>
             </a:pPr>
             <a:r>
-              <a:rPr sz="1600" b="0" i="0" u="none">
-                <a:solidFill>
-                  <a:srgbClr val="9CA3AF"/>
-                </a:solidFill>
-                <a:latin typeface="Calibri"/>
-              </a:rPr>
-              <a:t>Dyno Calibration Reduction Active-learning Bayesian MTPA/MTPV curve synthesis</a:t>
+              <a:rPr sz="1130" b="1" i="0" u="none">
+                <a:solidFill>
+                  <a:srgbClr val="F9FAFB"/>
+                </a:solidFill>
+                <a:latin typeface="Calibri"/>
+              </a:rPr>
+              <a:t>Dyno Calibration Reduction</a:t>
             </a:r>
           </a:p>
           <a:p>
@@ -3323,13 +3325,13 @@
               <a:buNone/>
             </a:pPr>
             <a:r>
-              <a:rPr sz="1210" b="1" i="0" u="none">
+              <a:rPr sz="940" b="1" i="0" u="none">
                 <a:solidFill>
                   <a:srgbClr val="0D9488"/>
                 </a:solidFill>
                 <a:latin typeface="Calibri"/>
               </a:rPr>
-              <a:t>▲ €450k+ Saved / Program</a:t>
+              <a:t>▲ €450k+ Saved / Program · Active-learning Bayesian MTPA/MTPV curve synthesis</a:t>
             </a:r>
           </a:p>
         </p:txBody>
@@ -3342,18 +3344,20 @@
         </p:nvSpPr>
         <p:spPr>
           <a:xfrm>
-            <a:off x="8097316" y="1828800"/>
-            <a:ext cx="3271418" cy="2057400"/>
+            <a:off x="6178142" y="1783334"/>
+            <a:ext cx="2650159" cy="1530806"/>
           </a:xfrm>
           <a:prstGeom prst="roundRect">
             <a:avLst>
-              <a:gd name="adj" fmla="val 2000"/>
+              <a:gd name="adj" fmla="val 4000"/>
             </a:avLst>
           </a:prstGeom>
-          <a:noFill/>
-          <a:ln w="6350">
+          <a:solidFill>
+            <a:srgbClr val="222A3B"/>
+          </a:solidFill>
+          <a:ln w="12700">
             <a:solidFill>
-              <a:srgbClr val="3F4555"/>
+              <a:srgbClr val="3A4150"/>
             </a:solidFill>
           </a:ln>
         </p:spPr>
@@ -3387,8 +3391,8 @@
         </p:nvSpPr>
         <p:spPr>
           <a:xfrm>
-            <a:off x="8280196" y="2011680"/>
-            <a:ext cx="2905658" cy="1691640"/>
+            <a:off x="6324446" y="1929638"/>
+            <a:ext cx="2357551" cy="1238198"/>
           </a:xfrm>
           <a:prstGeom prst="rect">
             <a:avLst/>
@@ -3396,21 +3400,21 @@
           <a:noFill/>
         </p:spPr>
         <p:txBody>
-          <a:bodyPr wrap="square" lIns="0" tIns="0" rIns="0" bIns="0">
+          <a:bodyPr wrap="square" anchor="ctr" lIns="0" tIns="0" rIns="0" bIns="0">
             <a:spAutoFit/>
           </a:bodyPr>
           <a:lstStyle/>
           <a:p>
             <a:pPr algn="l">
               <a:spcAft>
-                <a:spcPts val="400"/>
+                <a:spcPts val="190"/>
               </a:spcAft>
               <a:buNone/>
             </a:pPr>
             <a:r>
-              <a:rPr sz="4000" b="1" i="0" u="none">
-                <a:solidFill>
-                  <a:srgbClr val="1D4ED8"/>
+              <a:rPr sz="2820" b="1" i="0" u="none">
+                <a:solidFill>
+                  <a:srgbClr val="38BDF8"/>
                 </a:solidFill>
                 <a:latin typeface="Calibri"/>
               </a:rPr>
@@ -3420,208 +3424,59 @@
           <a:p>
             <a:pPr algn="l">
               <a:spcAft>
-                <a:spcPts val="600"/>
+                <a:spcPts val="190"/>
               </a:spcAft>
               <a:buNone/>
             </a:pPr>
             <a:r>
-              <a:rPr sz="1600" b="0" i="0" u="none">
-                <a:solidFill>
-                  <a:srgbClr val="9CA3AF"/>
-                </a:solidFill>
-                <a:latin typeface="Calibri"/>
-              </a:rPr>
-              <a:t>Zero Data Exposure 🔒 100% On-Prem / Air-Gapped No cloud egress; proprietary plant models stay sovereign</a:t>
-            </a:r>
-          </a:p>
-        </p:txBody>
-      </p:sp>
-      <p:sp>
-        <p:nvSpPr>
-          <p:cNvPr id="8" name="TextBox 7"/>
-          <p:cNvSpPr txBox="1"/>
-          <p:nvPr/>
-        </p:nvSpPr>
-        <p:spPr>
-          <a:xfrm>
-            <a:off x="822960" y="4251960"/>
-            <a:ext cx="10545775" cy="949960"/>
-          </a:xfrm>
-          <a:prstGeom prst="rect">
-            <a:avLst/>
-          </a:prstGeom>
-          <a:noFill/>
-        </p:spPr>
-        <p:txBody>
-          <a:bodyPr wrap="square" lIns="0" tIns="0" rIns="0" bIns="0">
-            <a:spAutoFit/>
-          </a:bodyPr>
-          <a:lstStyle/>
+              <a:rPr sz="1130" b="1" i="0" u="none">
+                <a:solidFill>
+                  <a:srgbClr val="F9FAFB"/>
+                </a:solidFill>
+                <a:latin typeface="Calibri"/>
+              </a:rPr>
+              <a:t>Zero Data Exposure</a:t>
+            </a:r>
+          </a:p>
           <a:p>
             <a:pPr algn="l">
-              <a:spcAft>
-                <a:spcPts val="400"/>
-              </a:spcAft>
-              <a:buNone/>
-            </a:pPr>
-            <a:r>
-              <a:rPr sz="2000" b="1" i="0" u="none">
-                <a:solidFill>
-                  <a:srgbClr val="1D4ED8"/>
-                </a:solidFill>
-                <a:latin typeface="Calibri"/>
-              </a:rPr>
-              <a:t>EXECUTIVE VISION · AUTOMOTIVE E-DRIVE SOFTWARE</a:t>
-            </a:r>
-          </a:p>
-          <a:p>
-            <a:pPr algn="l">
-              <a:spcBef>
-                <a:spcPts val="400"/>
-              </a:spcBef>
-              <a:spcAft>
-                <a:spcPts val="400"/>
-              </a:spcAft>
-              <a:buNone/>
-            </a:pPr>
-            <a:r>
-              <a:rPr sz="1600" b="0" i="0" u="none">
-                <a:solidFill>
-                  <a:srgbClr val="F9FAFB"/>
-                </a:solidFill>
-                <a:latin typeface="Calibri"/>
-              </a:rPr>
-              <a:t>Eliminating redundant manual engineering across the ASPICE V-Cycle for PMSM &amp; Inverter control software—cutting time-to-market by 50% without compromising ASIL-D safety or exposing proprietary motor IP.</a:t>
-            </a:r>
-          </a:p>
-          <a:p>
-            <a:pPr algn="l">
-              <a:spcBef>
-                <a:spcPts val="400"/>
-              </a:spcBef>
-              <a:spcAft>
-                <a:spcPts val="400"/>
-              </a:spcAft>
-              <a:buNone/>
-            </a:pPr>
-            <a:r>
-              <a:rPr sz="1600" b="0" i="0" u="none">
-                <a:solidFill>
-                  <a:srgbClr val="F9FAFB"/>
-                </a:solidFill>
-                <a:latin typeface="Calibri"/>
-              </a:rPr>
-              <a:t>
-</a:t>
-            </a:r>
-            <a:r>
-              <a:rPr sz="1600" b="0" i="0" u="none">
-                <a:solidFill>
-                  <a:srgbClr val="F9FAFB"/>
-                </a:solidFill>
-                <a:latin typeface="Calibri"/>
-              </a:rPr>
-              <a:t>Proprietary &amp; Confidential · E-Mobility Powertrain AI Solution</a:t>
-            </a:r>
-            <a:r>
-              <a:rPr sz="1600" b="0" i="0" u="none">
-                <a:solidFill>
-                  <a:srgbClr val="F9FAFB"/>
-                </a:solidFill>
-                <a:latin typeface="Calibri"/>
-              </a:rPr>
-              <a:t>
-</a:t>
-            </a:r>
-            <a:r>
-              <a:rPr sz="1600" b="0" i="0" u="none">
-                <a:solidFill>
-                  <a:srgbClr val="F9FAFB"/>
-                </a:solidFill>
-                <a:latin typeface="Calibri"/>
-              </a:rPr>
-              <a:t>
-</a:t>
-            </a:r>
-            <a:r>
-              <a:rPr sz="1600" b="1" i="0" u="none">
-                <a:solidFill>
-                  <a:srgbClr val="1D4ED8"/>
-                </a:solidFill>
-                <a:latin typeface="Calibri"/>
-              </a:rPr>
-              <a:t>EXECUTIVE BRIEFING · SLIDE 1 OF 5</a:t>
-            </a:r>
-            <a:r>
-              <a:rPr sz="1600" b="0" i="0" u="none">
-                <a:solidFill>
-                  <a:srgbClr val="F9FAFB"/>
-                </a:solidFill>
-                <a:latin typeface="Calibri"/>
-              </a:rPr>
-              <a:t>
-</a:t>
-            </a:r>
-          </a:p>
-        </p:txBody>
-      </p:sp>
-      <p:sp>
-        <p:nvSpPr>
-          <p:cNvPr id="9" name="TextBox 8"/>
-          <p:cNvSpPr txBox="1"/>
-          <p:nvPr/>
-        </p:nvSpPr>
-        <p:spPr>
-          <a:xfrm>
-            <a:off x="822960" y="548640"/>
-            <a:ext cx="10545775" cy="1097280"/>
-          </a:xfrm>
-          <a:prstGeom prst="rect">
-            <a:avLst/>
-          </a:prstGeom>
-          <a:noFill/>
-        </p:spPr>
-        <p:txBody>
-          <a:bodyPr wrap="square" lIns="0" tIns="0" rIns="0" bIns="0">
-            <a:spAutoFit/>
-          </a:bodyPr>
-          <a:lstStyle/>
-          <a:p>
-            <a:pPr algn="ctr">
-              <a:buNone/>
-            </a:pPr>
-            <a:r>
-              <a:rPr sz="3000" b="1" i="0" u="none">
-                <a:solidFill>
-                  <a:srgbClr val="F9FAFB"/>
-                </a:solidFill>
-                <a:latin typeface="Calibri"/>
-              </a:rPr>
-              <a:t>Accelerating Motor ECU Engineering
-with Secure, Sovereign AI</a:t>
-            </a:r>
-          </a:p>
-        </p:txBody>
-      </p:sp>
-      <p:sp>
-        <p:nvSpPr>
-          <p:cNvPr id="10" name="Rectangle 9"/>
+              <a:buNone/>
+            </a:pPr>
+            <a:r>
+              <a:rPr sz="940" b="1" i="0" u="none">
+                <a:solidFill>
+                  <a:srgbClr val="0D9488"/>
+                </a:solidFill>
+                <a:latin typeface="Calibri"/>
+              </a:rPr>
+              <a:t>🔒 100% On-Prem / Air-Gapped · No cloud egress; proprietary plant models stay sovereign</a:t>
+            </a:r>
+          </a:p>
+        </p:txBody>
+      </p:sp>
+      <p:sp>
+        <p:nvSpPr>
+          <p:cNvPr id="8" name="Rounded Rectangle 7"/>
           <p:cNvSpPr/>
           <p:nvPr/>
         </p:nvSpPr>
         <p:spPr>
           <a:xfrm>
-            <a:off x="822960" y="1645920"/>
-            <a:ext cx="10545775" cy="12700"/>
-          </a:xfrm>
-          <a:prstGeom prst="rect">
-            <a:avLst/>
+            <a:off x="8992893" y="1783334"/>
+            <a:ext cx="2650159" cy="1530806"/>
+          </a:xfrm>
+          <a:prstGeom prst="roundRect">
+            <a:avLst>
+              <a:gd name="adj" fmla="val 4000"/>
+            </a:avLst>
           </a:prstGeom>
           <a:solidFill>
-            <a:srgbClr val="3F4555"/>
+            <a:srgbClr val="222A3B"/>
           </a:solidFill>
-          <a:ln>
-            <a:noFill/>
+          <a:ln w="12700">
+            <a:solidFill>
+              <a:srgbClr val="3A4150"/>
+            </a:solidFill>
           </a:ln>
         </p:spPr>
         <p:style>
@@ -3648,14 +3503,132 @@
       </p:sp>
       <p:sp>
         <p:nvSpPr>
+          <p:cNvPr id="9" name="TextBox 8"/>
+          <p:cNvSpPr txBox="1"/>
+          <p:nvPr/>
+        </p:nvSpPr>
+        <p:spPr>
+          <a:xfrm>
+            <a:off x="9139197" y="1929638"/>
+            <a:ext cx="2357551" cy="1238198"/>
+          </a:xfrm>
+          <a:prstGeom prst="rect">
+            <a:avLst/>
+          </a:prstGeom>
+          <a:noFill/>
+        </p:spPr>
+        <p:txBody>
+          <a:bodyPr wrap="square" anchor="ctr" lIns="0" tIns="0" rIns="0" bIns="0">
+            <a:spAutoFit/>
+          </a:bodyPr>
+          <a:lstStyle/>
+          <a:p>
+            <a:pPr algn="l">
+              <a:spcAft>
+                <a:spcPts val="190"/>
+              </a:spcAft>
+              <a:buNone/>
+            </a:pPr>
+            <a:r>
+              <a:rPr sz="2820" b="1" i="0" u="none">
+                <a:solidFill>
+                  <a:srgbClr val="38BDF8"/>
+                </a:solidFill>
+                <a:latin typeface="Calibri"/>
+              </a:rPr>
+              <a:t>8 wks</a:t>
+            </a:r>
+          </a:p>
+          <a:p>
+            <a:pPr algn="l">
+              <a:spcAft>
+                <a:spcPts val="190"/>
+              </a:spcAft>
+              <a:buNone/>
+            </a:pPr>
+            <a:r>
+              <a:rPr sz="1130" b="1" i="0" u="none">
+                <a:solidFill>
+                  <a:srgbClr val="F9FAFB"/>
+                </a:solidFill>
+                <a:latin typeface="Calibri"/>
+              </a:rPr>
+              <a:t>Cycle-Time Compression</a:t>
+            </a:r>
+          </a:p>
+          <a:p>
+            <a:pPr algn="l">
+              <a:buNone/>
+            </a:pPr>
+            <a:r>
+              <a:rPr sz="940" b="1" i="0" u="none">
+                <a:solidFill>
+                  <a:srgbClr val="0D9488"/>
+                </a:solidFill>
+                <a:latin typeface="Calibri"/>
+              </a:rPr>
+              <a:t>▼ From 18 to 10 Months · Automated SWE.1-SWE.6 bidirectional traceability</a:t>
+            </a:r>
+          </a:p>
+        </p:txBody>
+      </p:sp>
+      <p:sp>
+        <p:nvSpPr>
+          <p:cNvPr id="10" name="Rounded Rectangle 9"/>
+          <p:cNvSpPr/>
+          <p:nvPr/>
+        </p:nvSpPr>
+        <p:spPr>
+          <a:xfrm>
+            <a:off x="548640" y="3460444"/>
+            <a:ext cx="5464911" cy="2940355"/>
+          </a:xfrm>
+          <a:prstGeom prst="roundRect">
+            <a:avLst>
+              <a:gd name="adj" fmla="val 4000"/>
+            </a:avLst>
+          </a:prstGeom>
+          <a:solidFill>
+            <a:srgbClr val="222A3B"/>
+          </a:solidFill>
+          <a:ln w="12700">
+            <a:solidFill>
+              <a:srgbClr val="3A4150"/>
+            </a:solidFill>
+          </a:ln>
+        </p:spPr>
+        <p:style>
+          <a:lnRef idx="1">
+            <a:schemeClr val="accent1"/>
+          </a:lnRef>
+          <a:fillRef idx="3">
+            <a:schemeClr val="accent1"/>
+          </a:fillRef>
+          <a:effectRef idx="2">
+            <a:schemeClr val="accent1"/>
+          </a:effectRef>
+          <a:fontRef idx="minor">
+            <a:schemeClr val="lt1"/>
+          </a:fontRef>
+        </p:style>
+        <p:txBody>
+          <a:bodyPr rtlCol="0" anchor="ctr"/>
+          <a:lstStyle/>
+          <a:p>
+            <a:pPr algn="ctr"/>
+          </a:p>
+        </p:txBody>
+      </p:sp>
+      <p:sp>
+        <p:nvSpPr>
           <p:cNvPr id="11" name="TextBox 10"/>
           <p:cNvSpPr txBox="1"/>
           <p:nvPr/>
         </p:nvSpPr>
         <p:spPr>
           <a:xfrm>
-            <a:off x="9997135" y="6629400"/>
-            <a:ext cx="1371600" cy="274320"/>
+            <a:off x="713232" y="3625036"/>
+            <a:ext cx="5135727" cy="2611171"/>
           </a:xfrm>
           <a:prstGeom prst="rect">
             <a:avLst/>
@@ -3663,16 +3636,364 @@
           <a:noFill/>
         </p:spPr>
         <p:txBody>
-          <a:bodyPr wrap="square" lIns="0" tIns="0" rIns="0" bIns="0">
+          <a:bodyPr wrap="square" anchor="t" lIns="0" tIns="0" rIns="0" bIns="0">
             <a:spAutoFit/>
           </a:bodyPr>
           <a:lstStyle/>
           <a:p>
+            <a:pPr algn="l">
+              <a:spcAft>
+                <a:spcPts val="300"/>
+              </a:spcAft>
+              <a:buNone/>
+            </a:pPr>
+            <a:r>
+              <a:rPr sz="1439" b="1" i="0" u="none">
+                <a:solidFill>
+                  <a:srgbClr val="F9FAFB"/>
+                </a:solidFill>
+                <a:latin typeface="Calibri"/>
+              </a:rPr>
+              <a:t>⚡ The E-Mobility Motor ECU Bottleneck</a:t>
+            </a:r>
+          </a:p>
+          <a:p>
+            <a:pPr algn="l">
+              <a:spcAft>
+                <a:spcPts val="300"/>
+              </a:spcAft>
+              <a:buNone/>
+            </a:pPr>
+            <a:r>
+              <a:rPr sz="1150" b="0" i="0" u="none">
+                <a:solidFill>
+                  <a:srgbClr val="F9FAFB"/>
+                </a:solidFill>
+                <a:latin typeface="Calibri"/>
+              </a:rPr>
+              <a:t>Next-generation 800V SiC inverters, multi-phase PMSM, and dual-motor torque vectoring demand immense control complexity (FOC, SVPWM, thermal derating, resolver decoding). Engineering teams spend </a:t>
+            </a:r>
+            <a:r>
+              <a:rPr sz="1150" b="1" i="0" u="none">
+                <a:solidFill>
+                  <a:srgbClr val="F9FAFB"/>
+                </a:solidFill>
+                <a:latin typeface="Calibri"/>
+              </a:rPr>
+              <a:t>up to 60% of their billable engineering hours on repetitive manual overhead</a:t>
+            </a:r>
+            <a:r>
+              <a:rPr sz="1150" b="0" i="0" u="none">
+                <a:solidFill>
+                  <a:srgbClr val="F9FAFB"/>
+                </a:solidFill>
+                <a:latin typeface="Calibri"/>
+              </a:rPr>
+              <a:t>: writing traceability matrices, fixing MISRA violations, writing boilerplate test scripts, and running brute-force dyno sweeps.</a:t>
+            </a:r>
+          </a:p>
+        </p:txBody>
+      </p:sp>
+      <p:sp>
+        <p:nvSpPr>
+          <p:cNvPr id="12" name="Rounded Rectangle 11"/>
+          <p:cNvSpPr/>
+          <p:nvPr/>
+        </p:nvSpPr>
+        <p:spPr>
+          <a:xfrm>
+            <a:off x="6178143" y="3460444"/>
+            <a:ext cx="5464911" cy="2940355"/>
+          </a:xfrm>
+          <a:prstGeom prst="roundRect">
+            <a:avLst>
+              <a:gd name="adj" fmla="val 4000"/>
+            </a:avLst>
+          </a:prstGeom>
+          <a:solidFill>
+            <a:srgbClr val="222A3B"/>
+          </a:solidFill>
+          <a:ln w="12700">
+            <a:solidFill>
+              <a:srgbClr val="3A4150"/>
+            </a:solidFill>
+          </a:ln>
+        </p:spPr>
+        <p:style>
+          <a:lnRef idx="1">
+            <a:schemeClr val="accent1"/>
+          </a:lnRef>
+          <a:fillRef idx="3">
+            <a:schemeClr val="accent1"/>
+          </a:fillRef>
+          <a:effectRef idx="2">
+            <a:schemeClr val="accent1"/>
+          </a:effectRef>
+          <a:fontRef idx="minor">
+            <a:schemeClr val="lt1"/>
+          </a:fontRef>
+        </p:style>
+        <p:txBody>
+          <a:bodyPr rtlCol="0" anchor="ctr"/>
+          <a:lstStyle/>
+          <a:p>
+            <a:pPr algn="ctr"/>
+          </a:p>
+        </p:txBody>
+      </p:sp>
+      <p:sp>
+        <p:nvSpPr>
+          <p:cNvPr id="13" name="TextBox 12"/>
+          <p:cNvSpPr txBox="1"/>
+          <p:nvPr/>
+        </p:nvSpPr>
+        <p:spPr>
+          <a:xfrm>
+            <a:off x="6342735" y="3625036"/>
+            <a:ext cx="5135727" cy="2611171"/>
+          </a:xfrm>
+          <a:prstGeom prst="rect">
+            <a:avLst/>
+          </a:prstGeom>
+          <a:noFill/>
+        </p:spPr>
+        <p:txBody>
+          <a:bodyPr wrap="square" anchor="t" lIns="0" tIns="0" rIns="0" bIns="0">
+            <a:spAutoFit/>
+          </a:bodyPr>
+          <a:lstStyle/>
+          <a:p>
+            <a:pPr algn="l">
+              <a:spcAft>
+                <a:spcPts val="300"/>
+              </a:spcAft>
+              <a:buNone/>
+            </a:pPr>
+            <a:r>
+              <a:rPr sz="1439" b="1" i="0" u="none">
+                <a:solidFill>
+                  <a:srgbClr val="F9FAFB"/>
+                </a:solidFill>
+                <a:latin typeface="Calibri"/>
+              </a:rPr>
+              <a:t>🛡️ The Solution: Automotive-Grade Engineering AI</a:t>
+            </a:r>
+          </a:p>
+          <a:p>
+            <a:pPr algn="l">
+              <a:spcAft>
+                <a:spcPts val="300"/>
+              </a:spcAft>
+              <a:buNone/>
+            </a:pPr>
+            <a:r>
+              <a:rPr sz="1150" b="0" i="0" u="none">
+                <a:solidFill>
+                  <a:srgbClr val="F9FAFB"/>
+                </a:solidFill>
+                <a:latin typeface="Calibri"/>
+              </a:rPr>
+              <a:t>Our specialized automotive AI engine embeds directly into your existing enterprise toolchains (DOORS, Simulink, TargetLink, Vector CANoe, dSPACE, ETAS INCA). It acts as an autonomous co-pilot for motor control engineers, handling redundant tasks deterministically while your proprietary IP remains </a:t>
+            </a:r>
+            <a:r>
+              <a:rPr sz="1150" b="1" i="0" u="none">
+                <a:solidFill>
+                  <a:srgbClr val="F9FAFB"/>
+                </a:solidFill>
+                <a:latin typeface="Calibri"/>
+              </a:rPr>
+              <a:t>100% protected within your air-gapped firewall</a:t>
+            </a:r>
+            <a:r>
+              <a:rPr sz="1150" b="0" i="0" u="none">
+                <a:solidFill>
+                  <a:srgbClr val="F9FAFB"/>
+                </a:solidFill>
+                <a:latin typeface="Calibri"/>
+              </a:rPr>
+              <a:t>.</a:t>
+            </a:r>
+          </a:p>
+        </p:txBody>
+      </p:sp>
+      <p:sp>
+        <p:nvSpPr>
+          <p:cNvPr id="14" name="TextBox 13"/>
+          <p:cNvSpPr txBox="1"/>
+          <p:nvPr/>
+        </p:nvSpPr>
+        <p:spPr>
+          <a:xfrm>
+            <a:off x="548640" y="411480"/>
+            <a:ext cx="11094415" cy="1248410"/>
+          </a:xfrm>
+          <a:prstGeom prst="rect">
+            <a:avLst/>
+          </a:prstGeom>
+          <a:noFill/>
+        </p:spPr>
+        <p:txBody>
+          <a:bodyPr wrap="square" anchor="t" lIns="0" tIns="0" rIns="0" bIns="0">
+            <a:spAutoFit/>
+          </a:bodyPr>
+          <a:lstStyle/>
+          <a:p>
+            <a:pPr algn="l">
+              <a:spcAft>
+                <a:spcPts val="200"/>
+              </a:spcAft>
+              <a:buNone/>
+            </a:pPr>
+            <a:r>
+              <a:rPr sz="1100" b="1" i="0" u="none">
+                <a:solidFill>
+                  <a:srgbClr val="38BDF8"/>
+                </a:solidFill>
+                <a:latin typeface="Calibri"/>
+              </a:rPr>
+              <a:t>• EXECUTIVE VISION · AUTOMOTIVE E-DRIVE SOFTWARE</a:t>
+            </a:r>
+          </a:p>
+          <a:p>
+            <a:pPr algn="l">
+              <a:buNone/>
+            </a:pPr>
+            <a:r>
+              <a:rPr sz="2400" b="1" i="0" u="none">
+                <a:solidFill>
+                  <a:srgbClr val="F9FAFB"/>
+                </a:solidFill>
+                <a:latin typeface="Calibri"/>
+              </a:rPr>
+              <a:t>Accelerating Motor ECU Engineering with Secure, Sovereign AI</a:t>
+            </a:r>
+          </a:p>
+          <a:p>
+            <a:pPr algn="l">
+              <a:spcBef>
+                <a:spcPts val="300"/>
+              </a:spcBef>
+              <a:buNone/>
+            </a:pPr>
+            <a:r>
+              <a:rPr sz="1250" b="0" i="0" u="none">
+                <a:solidFill>
+                  <a:srgbClr val="9CA3AF"/>
+                </a:solidFill>
+                <a:latin typeface="Calibri"/>
+              </a:rPr>
+              <a:t>Eliminating redundant manual engineering across the ASPICE V-Cycle for PMSM &amp; Inverter control software—cutting time-to-market by 50% without compromising ASIL-D safety or exposing proprietary motor IP.</a:t>
+            </a:r>
+          </a:p>
+        </p:txBody>
+      </p:sp>
+      <p:sp>
+        <p:nvSpPr>
+          <p:cNvPr id="15" name="Rectangle 14"/>
+          <p:cNvSpPr/>
+          <p:nvPr/>
+        </p:nvSpPr>
+        <p:spPr>
+          <a:xfrm>
+            <a:off x="548640" y="1672590"/>
+            <a:ext cx="2286000" cy="38100"/>
+          </a:xfrm>
+          <a:prstGeom prst="rect">
+            <a:avLst/>
+          </a:prstGeom>
+          <a:solidFill>
+            <a:srgbClr val="38BDF8"/>
+          </a:solidFill>
+          <a:ln>
+            <a:noFill/>
+          </a:ln>
+        </p:spPr>
+        <p:style>
+          <a:lnRef idx="1">
+            <a:schemeClr val="accent1"/>
+          </a:lnRef>
+          <a:fillRef idx="3">
+            <a:schemeClr val="accent1"/>
+          </a:fillRef>
+          <a:effectRef idx="2">
+            <a:schemeClr val="accent1"/>
+          </a:effectRef>
+          <a:fontRef idx="minor">
+            <a:schemeClr val="lt1"/>
+          </a:fontRef>
+        </p:style>
+        <p:txBody>
+          <a:bodyPr rtlCol="0" anchor="ctr"/>
+          <a:lstStyle/>
+          <a:p>
+            <a:pPr algn="ctr"/>
+          </a:p>
+        </p:txBody>
+      </p:sp>
+      <p:sp>
+        <p:nvSpPr>
+          <p:cNvPr id="16" name="TextBox 15"/>
+          <p:cNvSpPr txBox="1"/>
+          <p:nvPr/>
+        </p:nvSpPr>
+        <p:spPr>
+          <a:xfrm>
+            <a:off x="548640" y="6437376"/>
+            <a:ext cx="9539935" cy="256032"/>
+          </a:xfrm>
+          <a:prstGeom prst="rect">
+            <a:avLst/>
+          </a:prstGeom>
+          <a:noFill/>
+        </p:spPr>
+        <p:txBody>
+          <a:bodyPr wrap="square" anchor="ctr" lIns="0" tIns="0" rIns="0" bIns="0">
+            <a:spAutoFit/>
+          </a:bodyPr>
+          <a:lstStyle/>
+          <a:p>
+            <a:pPr algn="l">
+              <a:buNone/>
+            </a:pPr>
+            <a:r>
+              <a:rPr sz="950" b="0" i="0" u="none">
+                <a:solidFill>
+                  <a:srgbClr val="9CA3AF"/>
+                </a:solidFill>
+                <a:latin typeface="Calibri"/>
+              </a:rPr>
+              <a:t>Proprietary &amp; Confidential · E-Mobility Powertrain AI Solution</a:t>
+            </a:r>
+          </a:p>
+        </p:txBody>
+      </p:sp>
+      <p:sp>
+        <p:nvSpPr>
+          <p:cNvPr id="17" name="TextBox 16"/>
+          <p:cNvSpPr txBox="1"/>
+          <p:nvPr/>
+        </p:nvSpPr>
+        <p:spPr>
+          <a:xfrm>
+            <a:off x="10271455" y="6437376"/>
+            <a:ext cx="1371600" cy="256032"/>
+          </a:xfrm>
+          <a:prstGeom prst="rect">
+            <a:avLst/>
+          </a:prstGeom>
+          <a:noFill/>
+        </p:spPr>
+        <p:txBody>
+          <a:bodyPr wrap="square" anchor="ctr" lIns="0" tIns="0" rIns="0" bIns="0">
+            <a:spAutoFit/>
+          </a:bodyPr>
+          <a:lstStyle/>
+          <a:p>
             <a:pPr algn="r">
               <a:buNone/>
             </a:pPr>
             <a:r>
-              <a:rPr sz="1100" b="0" i="0" u="none">
+              <a:rPr sz="950" b="0" i="0" u="none">
                 <a:solidFill>
                   <a:srgbClr val="9CA3AF"/>
                 </a:solidFill>
@@ -3717,18 +4038,20 @@
         </p:nvSpPr>
         <p:spPr>
           <a:xfrm>
-            <a:off x="822960" y="1828800"/>
-            <a:ext cx="3271418" cy="4572000"/>
+            <a:off x="548640" y="1783334"/>
+            <a:ext cx="3588410" cy="2294525"/>
           </a:xfrm>
           <a:prstGeom prst="roundRect">
             <a:avLst>
-              <a:gd name="adj" fmla="val 2000"/>
+              <a:gd name="adj" fmla="val 4000"/>
             </a:avLst>
           </a:prstGeom>
-          <a:noFill/>
-          <a:ln w="6350">
+          <a:solidFill>
+            <a:srgbClr val="222A3B"/>
+          </a:solidFill>
+          <a:ln w="12700">
             <a:solidFill>
-              <a:srgbClr val="3F4555"/>
+              <a:srgbClr val="3A4150"/>
             </a:solidFill>
           </a:ln>
         </p:spPr>
@@ -3762,8 +4085,8 @@
         </p:nvSpPr>
         <p:spPr>
           <a:xfrm>
-            <a:off x="1051560" y="2057400"/>
-            <a:ext cx="2814218" cy="4114800"/>
+            <a:off x="713232" y="1947926"/>
+            <a:ext cx="3259226" cy="1965341"/>
           </a:xfrm>
           <a:prstGeom prst="rect">
             <a:avLst/>
@@ -3771,106 +4094,96 @@
           <a:noFill/>
         </p:spPr>
         <p:txBody>
-          <a:bodyPr wrap="square" lIns="0" tIns="0" rIns="0" bIns="0">
+          <a:bodyPr wrap="square" anchor="t" lIns="0" tIns="0" rIns="0" bIns="0">
             <a:spAutoFit/>
           </a:bodyPr>
           <a:lstStyle/>
           <a:p>
             <a:pPr algn="l">
               <a:spcAft>
-                <a:spcPts val="600"/>
+                <a:spcPts val="280"/>
               </a:spcAft>
               <a:buNone/>
             </a:pPr>
             <a:r>
-              <a:rPr sz="2000" b="1" i="0" u="none">
+              <a:rPr sz="1350" b="1" i="0" u="none">
                 <a:solidFill>
                   <a:srgbClr val="F9FAFB"/>
                 </a:solidFill>
                 <a:latin typeface="Calibri"/>
               </a:rPr>
-              <a:t>1. Physics-Informed ML Surrogates</a:t>
+              <a:t>📐 1. Physics-Informed ML Surrogates</a:t>
             </a:r>
           </a:p>
           <a:p>
             <a:pPr algn="l">
               <a:spcAft>
-                <a:spcPts val="400"/>
+                <a:spcPts val="280"/>
               </a:spcAft>
               <a:buNone/>
             </a:pPr>
             <a:r>
-              <a:rPr sz="1600" b="0" i="0" u="none">
+              <a:rPr sz="1080" b="0" i="0" u="none">
                 <a:solidFill>
                   <a:srgbClr val="F9FAFB"/>
                 </a:solidFill>
                 <a:latin typeface="Calibri"/>
               </a:rPr>
-              <a:t>📐</a:t>
-            </a:r>
-            <a:r>
-              <a:rPr sz="1600" b="0" i="0" u="none">
+              <a:t>Replaces sluggish finite-element (FEA) and complex ODE solvers with microsecond neural surrogates for non-linear motor plant dynamics:</a:t>
+            </a:r>
+          </a:p>
+          <a:p>
+            <a:pPr algn="l" marL="228600" indent="-228600">
+              <a:spcAft>
+                <a:spcPts val="190"/>
+              </a:spcAft>
+              <a:buClr>
+                <a:srgbClr val="38BDF8"/>
+              </a:buClr>
+              <a:buChar char="•"/>
+            </a:pPr>
+            <a:r>
+              <a:rPr sz="1030" b="0" i="0" u="none">
                 <a:solidFill>
                   <a:srgbClr val="F9FAFB"/>
                 </a:solidFill>
                 <a:latin typeface="Calibri"/>
               </a:rPr>
-              <a:t>
-</a:t>
-            </a:r>
-            <a:r>
-              <a:rPr sz="1600" b="0" i="0" u="none">
+              <a:t>Iron saturation, cross-coupling Ld/Lq mapping</a:t>
+            </a:r>
+          </a:p>
+          <a:p>
+            <a:pPr algn="l" marL="228600" indent="-228600">
+              <a:spcAft>
+                <a:spcPts val="190"/>
+              </a:spcAft>
+              <a:buClr>
+                <a:srgbClr val="38BDF8"/>
+              </a:buClr>
+              <a:buChar char="•"/>
+            </a:pPr>
+            <a:r>
+              <a:rPr sz="1030" b="0" i="0" u="none">
                 <a:solidFill>
                   <a:srgbClr val="F9FAFB"/>
                 </a:solidFill>
                 <a:latin typeface="Calibri"/>
               </a:rPr>
-              <a:t>Replaces sluggish finite-element (FEA) and complex ODE solvers with microsecond neural surrogates for non-linear motor plant dynamics:</a:t>
-            </a:r>
-          </a:p>
-          <a:p>
-            <a:pPr algn="l">
+              <a:t>Inverter SiC switching losses &amp; thermal transients</a:t>
+            </a:r>
+          </a:p>
+          <a:p>
+            <a:pPr algn="l" marL="228600" indent="-228600">
               <a:spcAft>
-                <a:spcPts val="200"/>
+                <a:spcPts val="190"/>
               </a:spcAft>
+              <a:buClr>
+                <a:srgbClr val="38BDF8"/>
+              </a:buClr>
               <a:buChar char="•"/>
             </a:pPr>
             <a:r>
-              <a:rPr sz="1600" b="0" i="0" u="none">
-                <a:solidFill>
-                  <a:srgbClr val="F9FAFB"/>
-                </a:solidFill>
-                <a:latin typeface="Calibri"/>
-              </a:rPr>
-              <a:t>Iron saturation, cross-coupling Ld/Lq mapping</a:t>
-            </a:r>
-          </a:p>
-          <a:p>
-            <a:pPr algn="l">
-              <a:spcAft>
-                <a:spcPts val="200"/>
-              </a:spcAft>
-              <a:buChar char="•"/>
-            </a:pPr>
-            <a:r>
-              <a:rPr sz="1600" b="0" i="0" u="none">
-                <a:solidFill>
-                  <a:srgbClr val="F9FAFB"/>
-                </a:solidFill>
-                <a:latin typeface="Calibri"/>
-              </a:rPr>
-              <a:t>Inverter SiC switching losses &amp; thermal transients</a:t>
-            </a:r>
-          </a:p>
-          <a:p>
-            <a:pPr algn="l">
-              <a:spcAft>
-                <a:spcPts val="200"/>
-              </a:spcAft>
-              <a:buChar char="•"/>
-            </a:pPr>
-            <a:r>
-              <a:rPr sz="1600" b="0" i="0" u="none">
+              <a:rPr sz="1030" b="0" i="0" u="none">
                 <a:solidFill>
                   <a:srgbClr val="F9FAFB"/>
                 </a:solidFill>
@@ -3889,18 +4202,20 @@
         </p:nvSpPr>
         <p:spPr>
           <a:xfrm>
-            <a:off x="4460138" y="1828800"/>
-            <a:ext cx="3271418" cy="4572000"/>
+            <a:off x="4301642" y="1783334"/>
+            <a:ext cx="3588410" cy="2294525"/>
           </a:xfrm>
           <a:prstGeom prst="roundRect">
             <a:avLst>
-              <a:gd name="adj" fmla="val 2000"/>
+              <a:gd name="adj" fmla="val 4000"/>
             </a:avLst>
           </a:prstGeom>
-          <a:noFill/>
-          <a:ln w="6350">
+          <a:solidFill>
+            <a:srgbClr val="222A3B"/>
+          </a:solidFill>
+          <a:ln w="12700">
             <a:solidFill>
-              <a:srgbClr val="3F4555"/>
+              <a:srgbClr val="3A4150"/>
             </a:solidFill>
           </a:ln>
         </p:spPr>
@@ -3934,8 +4249,8 @@
         </p:nvSpPr>
         <p:spPr>
           <a:xfrm>
-            <a:off x="4688738" y="2057400"/>
-            <a:ext cx="2814218" cy="4114800"/>
+            <a:off x="4466234" y="1947926"/>
+            <a:ext cx="3259226" cy="1965341"/>
           </a:xfrm>
           <a:prstGeom prst="rect">
             <a:avLst/>
@@ -3943,106 +4258,96 @@
           <a:noFill/>
         </p:spPr>
         <p:txBody>
-          <a:bodyPr wrap="square" lIns="0" tIns="0" rIns="0" bIns="0">
+          <a:bodyPr wrap="square" anchor="t" lIns="0" tIns="0" rIns="0" bIns="0">
             <a:spAutoFit/>
           </a:bodyPr>
           <a:lstStyle/>
           <a:p>
             <a:pPr algn="l">
               <a:spcAft>
-                <a:spcPts val="600"/>
+                <a:spcPts val="280"/>
               </a:spcAft>
               <a:buNone/>
             </a:pPr>
             <a:r>
-              <a:rPr sz="2000" b="1" i="0" u="none">
+              <a:rPr sz="1350" b="1" i="0" u="none">
                 <a:solidFill>
                   <a:srgbClr val="F9FAFB"/>
                 </a:solidFill>
                 <a:latin typeface="Calibri"/>
               </a:rPr>
-              <a:t>2. Domain-Tuned Semantic Agents</a:t>
+              <a:t>🧠 2. Domain-Tuned Semantic Agents</a:t>
             </a:r>
           </a:p>
           <a:p>
             <a:pPr algn="l">
               <a:spcAft>
-                <a:spcPts val="400"/>
+                <a:spcPts val="280"/>
               </a:spcAft>
               <a:buNone/>
             </a:pPr>
             <a:r>
-              <a:rPr sz="1600" b="0" i="0" u="none">
+              <a:rPr sz="1080" b="0" i="0" u="none">
                 <a:solidFill>
                   <a:srgbClr val="F9FAFB"/>
                 </a:solidFill>
                 <a:latin typeface="Calibri"/>
               </a:rPr>
-              <a:t>🧠</a:t>
-            </a:r>
-            <a:r>
-              <a:rPr sz="1600" b="0" i="0" u="none">
+              <a:t>Trained on automotive embedded standards, control protocols, and toolchain syntax rather than public internet chatter:</a:t>
+            </a:r>
+          </a:p>
+          <a:p>
+            <a:pPr algn="l" marL="228600" indent="-228600">
+              <a:spcAft>
+                <a:spcPts val="190"/>
+              </a:spcAft>
+              <a:buClr>
+                <a:srgbClr val="38BDF8"/>
+              </a:buClr>
+              <a:buChar char="•"/>
+            </a:pPr>
+            <a:r>
+              <a:rPr sz="1030" b="0" i="0" u="none">
                 <a:solidFill>
                   <a:srgbClr val="F9FAFB"/>
                 </a:solidFill>
                 <a:latin typeface="Calibri"/>
               </a:rPr>
-              <a:t>
-</a:t>
-            </a:r>
-            <a:r>
-              <a:rPr sz="1600" b="0" i="0" u="none">
+              <a:t>Deep knowledge of AUTOSAR Classic (RTE/BSW/MCAL)</a:t>
+            </a:r>
+          </a:p>
+          <a:p>
+            <a:pPr algn="l" marL="228600" indent="-228600">
+              <a:spcAft>
+                <a:spcPts val="190"/>
+              </a:spcAft>
+              <a:buClr>
+                <a:srgbClr val="38BDF8"/>
+              </a:buClr>
+              <a:buChar char="•"/>
+            </a:pPr>
+            <a:r>
+              <a:rPr sz="1030" b="0" i="0" u="none">
                 <a:solidFill>
                   <a:srgbClr val="F9FAFB"/>
                 </a:solidFill>
                 <a:latin typeface="Calibri"/>
               </a:rPr>
-              <a:t>Trained on automotive embedded standards, control protocols, and toolchain syntax rather than public internet chatter:</a:t>
-            </a:r>
-          </a:p>
-          <a:p>
-            <a:pPr algn="l">
+              <a:t>Native understanding of A2L/ASAP2, CAN/XCP, and MDF4</a:t>
+            </a:r>
+          </a:p>
+          <a:p>
+            <a:pPr algn="l" marL="228600" indent="-228600">
               <a:spcAft>
-                <a:spcPts val="200"/>
+                <a:spcPts val="190"/>
               </a:spcAft>
+              <a:buClr>
+                <a:srgbClr val="38BDF8"/>
+              </a:buClr>
               <a:buChar char="•"/>
             </a:pPr>
             <a:r>
-              <a:rPr sz="1600" b="0" i="0" u="none">
-                <a:solidFill>
-                  <a:srgbClr val="F9FAFB"/>
-                </a:solidFill>
-                <a:latin typeface="Calibri"/>
-              </a:rPr>
-              <a:t>Deep knowledge of AUTOSAR Classic (RTE/BSW/MCAL)</a:t>
-            </a:r>
-          </a:p>
-          <a:p>
-            <a:pPr algn="l">
-              <a:spcAft>
-                <a:spcPts val="200"/>
-              </a:spcAft>
-              <a:buChar char="•"/>
-            </a:pPr>
-            <a:r>
-              <a:rPr sz="1600" b="0" i="0" u="none">
-                <a:solidFill>
-                  <a:srgbClr val="F9FAFB"/>
-                </a:solidFill>
-                <a:latin typeface="Calibri"/>
-              </a:rPr>
-              <a:t>Native understanding of A2L/ASAP2, CAN/XCP, and MDF4</a:t>
-            </a:r>
-          </a:p>
-          <a:p>
-            <a:pPr algn="l">
-              <a:spcAft>
-                <a:spcPts val="200"/>
-              </a:spcAft>
-              <a:buChar char="•"/>
-            </a:pPr>
-            <a:r>
-              <a:rPr sz="1600" b="0" i="0" u="none">
+              <a:rPr sz="1030" b="0" i="0" u="none">
                 <a:solidFill>
                   <a:srgbClr val="F9FAFB"/>
                 </a:solidFill>
@@ -4061,18 +4366,20 @@
         </p:nvSpPr>
         <p:spPr>
           <a:xfrm>
-            <a:off x="8097316" y="1828800"/>
-            <a:ext cx="3271418" cy="4572000"/>
+            <a:off x="8054644" y="1783334"/>
+            <a:ext cx="3588410" cy="2294525"/>
           </a:xfrm>
           <a:prstGeom prst="roundRect">
             <a:avLst>
-              <a:gd name="adj" fmla="val 2000"/>
+              <a:gd name="adj" fmla="val 4000"/>
             </a:avLst>
           </a:prstGeom>
-          <a:noFill/>
-          <a:ln w="6350">
+          <a:solidFill>
+            <a:srgbClr val="222A3B"/>
+          </a:solidFill>
+          <a:ln w="12700">
             <a:solidFill>
-              <a:srgbClr val="3F4555"/>
+              <a:srgbClr val="3A4150"/>
             </a:solidFill>
           </a:ln>
         </p:spPr>
@@ -4106,8 +4413,8 @@
         </p:nvSpPr>
         <p:spPr>
           <a:xfrm>
-            <a:off x="8325916" y="2057400"/>
-            <a:ext cx="2814218" cy="4114800"/>
+            <a:off x="8219236" y="1947926"/>
+            <a:ext cx="3259226" cy="1965341"/>
           </a:xfrm>
           <a:prstGeom prst="rect">
             <a:avLst/>
@@ -4115,169 +4422,740 @@
           <a:noFill/>
         </p:spPr>
         <p:txBody>
-          <a:bodyPr wrap="square" lIns="0" tIns="0" rIns="0" bIns="0">
+          <a:bodyPr wrap="square" anchor="t" lIns="0" tIns="0" rIns="0" bIns="0">
             <a:spAutoFit/>
           </a:bodyPr>
           <a:lstStyle/>
           <a:p>
             <a:pPr algn="l">
               <a:spcAft>
-                <a:spcPts val="600"/>
+                <a:spcPts val="280"/>
               </a:spcAft>
               <a:buNone/>
             </a:pPr>
             <a:r>
-              <a:rPr sz="2000" b="1" i="0" u="none">
+              <a:rPr sz="1350" b="1" i="0" u="none">
                 <a:solidFill>
                   <a:srgbClr val="F9FAFB"/>
                 </a:solidFill>
                 <a:latin typeface="Calibri"/>
               </a:rPr>
-              <a:t>3. Deterministic Verification Gates</a:t>
+              <a:t>🛡️ 3. Deterministic Verification Gates</a:t>
             </a:r>
           </a:p>
           <a:p>
             <a:pPr algn="l">
               <a:spcAft>
-                <a:spcPts val="400"/>
+                <a:spcPts val="280"/>
               </a:spcAft>
               <a:buNone/>
             </a:pPr>
             <a:r>
-              <a:rPr sz="1600" b="0" i="0" u="none">
+              <a:rPr sz="1080" b="0" i="0" u="none">
                 <a:solidFill>
                   <a:srgbClr val="F9FAFB"/>
                 </a:solidFill>
                 <a:latin typeface="Calibri"/>
               </a:rPr>
-              <a:t>🛡️</a:t>
-            </a:r>
-            <a:r>
-              <a:rPr sz="1600" b="0" i="0" u="none">
+              <a:t>Zero hallucination tolerance: Every AI suggestion is strictly gated by deterministic compilers and formal verification tools:</a:t>
+            </a:r>
+          </a:p>
+          <a:p>
+            <a:pPr algn="l" marL="228600" indent="-228600">
+              <a:spcAft>
+                <a:spcPts val="190"/>
+              </a:spcAft>
+              <a:buClr>
+                <a:srgbClr val="38BDF8"/>
+              </a:buClr>
+              <a:buChar char="•"/>
+            </a:pPr>
+            <a:r>
+              <a:rPr sz="1030" b="0" i="0" u="none">
                 <a:solidFill>
                   <a:srgbClr val="F9FAFB"/>
                 </a:solidFill>
                 <a:latin typeface="Calibri"/>
               </a:rPr>
-              <a:t>
-</a:t>
-            </a:r>
-            <a:r>
-              <a:rPr sz="1600" b="0" i="0" u="none">
+              <a:t>Automated MISRA-C:2012 / CERT C rule checkers</a:t>
+            </a:r>
+          </a:p>
+          <a:p>
+            <a:pPr algn="l" marL="228600" indent="-228600">
+              <a:spcAft>
+                <a:spcPts val="190"/>
+              </a:spcAft>
+              <a:buClr>
+                <a:srgbClr val="38BDF8"/>
+              </a:buClr>
+              <a:buChar char="•"/>
+            </a:pPr>
+            <a:r>
+              <a:rPr sz="1030" b="0" i="0" u="none">
                 <a:solidFill>
                   <a:srgbClr val="F9FAFB"/>
                 </a:solidFill>
                 <a:latin typeface="Calibri"/>
               </a:rPr>
-              <a:t>Zero hallucination tolerance: Every AI suggestion is strictly gated by deterministic compilers and formal verification tools:</a:t>
-            </a:r>
-          </a:p>
+              <a:t>SMT-based formal bounds checking (Polyspace/Astree)</a:t>
+            </a:r>
+          </a:p>
+          <a:p>
+            <a:pPr algn="l" marL="228600" indent="-228600">
+              <a:spcAft>
+                <a:spcPts val="190"/>
+              </a:spcAft>
+              <a:buClr>
+                <a:srgbClr val="38BDF8"/>
+              </a:buClr>
+              <a:buChar char="•"/>
+            </a:pPr>
+            <a:r>
+              <a:rPr sz="1030" b="0" i="0" u="none">
+                <a:solidFill>
+                  <a:srgbClr val="F9FAFB"/>
+                </a:solidFill>
+                <a:latin typeface="Calibri"/>
+              </a:rPr>
+              <a:t>Human-in-the-loop sign-off for ASIL-D safety cases</a:t>
+            </a:r>
+          </a:p>
+        </p:txBody>
+      </p:sp>
+      <p:graphicFrame>
+        <p:nvGraphicFramePr>
+          <p:cNvPr id="8" name="Table 7"/>
+          <p:cNvGraphicFramePr>
+            <a:graphicFrameLocks noGrp="1"/>
+          </p:cNvGraphicFramePr>
+          <p:nvPr/>
+        </p:nvGraphicFramePr>
+        <p:xfrm>
+          <a:off x="548640" y="4224163"/>
+          <a:ext cx="11094414" cy="2176635"/>
+        </p:xfrm>
+        <a:graphic>
+          <a:graphicData uri="http://schemas.openxmlformats.org/drawingml/2006/table">
+            <a:tbl>
+              <a:tblPr firstRow="1" bandRow="1">
+                <a:tableStyleId>{5C22544A-7EE6-4342-B048-85BDC9FD1C3A}</a:tableStyleId>
+              </a:tblPr>
+              <a:tblGrid>
+                <a:gridCol w="3892888"/>
+                <a:gridCol w="3225777"/>
+                <a:gridCol w="3975749"/>
+              </a:tblGrid>
+              <a:tr h="435327">
+                <a:tc>
+                  <a:txBody>
+                    <a:bodyPr wrap="square" lIns="120000" rIns="120000" tIns="90000" bIns="90000"/>
+                    <a:lstStyle/>
+                    <a:p>
+                      <a:pPr algn="l"/>
+                      <a:r>
+                        <a:rPr sz="1150" b="1" i="0" u="none">
+                          <a:solidFill>
+                            <a:srgbClr val="F9FAFB"/>
+                          </a:solidFill>
+                          <a:latin typeface="Calibri"/>
+                        </a:rPr>
+                        <a:t>Dimension</a:t>
+                      </a:r>
+                    </a:p>
+                  </a:txBody>
+                  <a:tcPr marL="120000" marR="120000" marT="90000" marB="90000" anchor="ctr">
+                    <a:solidFill>
+                      <a:srgbClr val="222A3B"/>
+                    </a:solidFill>
+                    <a:lnL>
+                      <a:noFill/>
+                    </a:lnL>
+                    <a:lnR>
+                      <a:noFill/>
+                    </a:lnR>
+                    <a:lnB w="19050" cmpd="s">
+                      <a:solidFill>
+                        <a:srgbClr val="3A4150"/>
+                      </a:solidFill>
+                    </a:lnB>
+                  </a:tcPr>
+                </a:tc>
+                <a:tc>
+                  <a:txBody>
+                    <a:bodyPr wrap="square" lIns="120000" rIns="120000" tIns="90000" bIns="90000"/>
+                    <a:lstStyle/>
+                    <a:p>
+                      <a:pPr algn="l"/>
+                      <a:r>
+                        <a:rPr sz="950" b="1" i="0" u="none">
+                          <a:solidFill>
+                            <a:srgbClr val="F9FAFB"/>
+                          </a:solidFill>
+                          <a:latin typeface="Calibri"/>
+                        </a:rPr>
+                        <a:t>Generic Consumer AI (ChatGPT / Public Cloud)</a:t>
+                      </a:r>
+                    </a:p>
+                  </a:txBody>
+                  <a:tcPr marL="120000" marR="120000" marT="90000" marB="90000" anchor="ctr">
+                    <a:solidFill>
+                      <a:srgbClr val="222A3B"/>
+                    </a:solidFill>
+                    <a:lnL>
+                      <a:noFill/>
+                    </a:lnL>
+                    <a:lnR>
+                      <a:noFill/>
+                    </a:lnR>
+                    <a:lnB w="19050" cmpd="s">
+                      <a:solidFill>
+                        <a:srgbClr val="3A4150"/>
+                      </a:solidFill>
+                    </a:lnB>
+                  </a:tcPr>
+                </a:tc>
+                <a:tc>
+                  <a:txBody>
+                    <a:bodyPr wrap="square" lIns="120000" rIns="120000" tIns="90000" bIns="90000"/>
+                    <a:lstStyle/>
+                    <a:p>
+                      <a:pPr algn="l"/>
+                      <a:r>
+                        <a:rPr sz="1150" b="1" i="0" u="none">
+                          <a:solidFill>
+                            <a:srgbClr val="38BDF8"/>
+                          </a:solidFill>
+                          <a:latin typeface="Calibri"/>
+                        </a:rPr>
+                        <a:t>Our Automotive Motor ECU AI Platform</a:t>
+                      </a:r>
+                    </a:p>
+                  </a:txBody>
+                  <a:tcPr marL="120000" marR="120000" marT="90000" marB="90000" anchor="ctr">
+                    <a:solidFill>
+                      <a:srgbClr val="222A3B"/>
+                    </a:solidFill>
+                    <a:lnL>
+                      <a:noFill/>
+                    </a:lnL>
+                    <a:lnR>
+                      <a:noFill/>
+                    </a:lnR>
+                    <a:lnB w="19050" cmpd="s">
+                      <a:solidFill>
+                        <a:srgbClr val="3A4150"/>
+                      </a:solidFill>
+                    </a:lnB>
+                  </a:tcPr>
+                </a:tc>
+              </a:tr>
+              <a:tr h="435327">
+                <a:tc>
+                  <a:txBody>
+                    <a:bodyPr wrap="square" lIns="100000" rIns="100000" tIns="70000" bIns="70000"/>
+                    <a:lstStyle/>
+                    <a:p>
+                      <a:pPr algn="l"/>
+                      <a:r>
+                        <a:rPr sz="1050" b="1" i="0" u="none">
+                          <a:solidFill>
+                            <a:srgbClr val="F9FAFB"/>
+                          </a:solidFill>
+                          <a:latin typeface="Calibri"/>
+                        </a:rPr>
+                        <a:t>Data Confidentiality</a:t>
+                      </a:r>
+                    </a:p>
+                  </a:txBody>
+                  <a:tcPr marL="100000" marR="100000" marT="70000" marB="70000" anchor="ctr">
+                    <a:solidFill>
+                      <a:srgbClr val="222A3B"/>
+                    </a:solidFill>
+                    <a:lnL>
+                      <a:noFill/>
+                    </a:lnL>
+                    <a:lnR>
+                      <a:noFill/>
+                    </a:lnR>
+                    <a:lnB w="9525" cmpd="s">
+                      <a:solidFill>
+                        <a:srgbClr val="3A4150"/>
+                      </a:solidFill>
+                    </a:lnB>
+                  </a:tcPr>
+                </a:tc>
+                <a:tc>
+                  <a:txBody>
+                    <a:bodyPr wrap="square" lIns="100000" rIns="100000" tIns="70000" bIns="70000"/>
+                    <a:lstStyle/>
+                    <a:p>
+                      <a:pPr algn="l"/>
+                      <a:r>
+                        <a:rPr sz="990" b="1" i="0" u="none">
+                          <a:solidFill>
+                            <a:srgbClr val="EF4444"/>
+                          </a:solidFill>
+                          <a:latin typeface="Calibri"/>
+                        </a:rPr>
+                        <a:t>High Risk</a:t>
+                      </a:r>
+                      <a:r>
+                        <a:rPr sz="990" b="0" i="0" u="none">
+                          <a:solidFill>
+                            <a:srgbClr val="F9FAFB"/>
+                          </a:solidFill>
+                          <a:latin typeface="Calibri"/>
+                        </a:rPr>
+                        <a:t> Egresses to public cloud; risks model retraining</a:t>
+                      </a:r>
+                    </a:p>
+                  </a:txBody>
+                  <a:tcPr marL="100000" marR="100000" marT="70000" marB="70000" anchor="ctr">
+                    <a:solidFill>
+                      <a:srgbClr val="222A3B"/>
+                    </a:solidFill>
+                    <a:lnL>
+                      <a:noFill/>
+                    </a:lnL>
+                    <a:lnR>
+                      <a:noFill/>
+                    </a:lnR>
+                    <a:lnB w="9525" cmpd="s">
+                      <a:solidFill>
+                        <a:srgbClr val="3A4150"/>
+                      </a:solidFill>
+                    </a:lnB>
+                  </a:tcPr>
+                </a:tc>
+                <a:tc>
+                  <a:txBody>
+                    <a:bodyPr wrap="square" lIns="100000" rIns="100000" tIns="70000" bIns="70000"/>
+                    <a:lstStyle/>
+                    <a:p>
+                      <a:pPr algn="l"/>
+                      <a:r>
+                        <a:rPr sz="990" b="1" i="0" u="none">
+                          <a:solidFill>
+                            <a:srgbClr val="0D9488"/>
+                          </a:solidFill>
+                          <a:latin typeface="Calibri"/>
+                        </a:rPr>
+                        <a:t>100% Sovereign</a:t>
+                      </a:r>
+                      <a:r>
+                        <a:rPr sz="990" b="0" i="0" u="none">
+                          <a:solidFill>
+                            <a:srgbClr val="F9FAFB"/>
+                          </a:solidFill>
+                          <a:latin typeface="Calibri"/>
+                        </a:rPr>
+                        <a:t> Air-gapped / On-Premise; zero external transmission</a:t>
+                      </a:r>
+                    </a:p>
+                  </a:txBody>
+                  <a:tcPr marL="100000" marR="100000" marT="70000" marB="70000" anchor="ctr">
+                    <a:solidFill>
+                      <a:srgbClr val="222A3B"/>
+                    </a:solidFill>
+                    <a:lnL>
+                      <a:noFill/>
+                    </a:lnL>
+                    <a:lnR>
+                      <a:noFill/>
+                    </a:lnR>
+                    <a:lnB w="9525" cmpd="s">
+                      <a:solidFill>
+                        <a:srgbClr val="3A4150"/>
+                      </a:solidFill>
+                    </a:lnB>
+                  </a:tcPr>
+                </a:tc>
+              </a:tr>
+              <a:tr h="435327">
+                <a:tc>
+                  <a:txBody>
+                    <a:bodyPr wrap="square" lIns="100000" rIns="100000" tIns="70000" bIns="70000"/>
+                    <a:lstStyle/>
+                    <a:p>
+                      <a:pPr algn="l"/>
+                      <a:r>
+                        <a:rPr sz="1050" b="1" i="0" u="none">
+                          <a:solidFill>
+                            <a:srgbClr val="F9FAFB"/>
+                          </a:solidFill>
+                          <a:latin typeface="Calibri"/>
+                        </a:rPr>
+                        <a:t>Automotive Semantics</a:t>
+                      </a:r>
+                    </a:p>
+                  </a:txBody>
+                  <a:tcPr marL="100000" marR="100000" marT="70000" marB="70000" anchor="ctr">
+                    <a:lnL>
+                      <a:noFill/>
+                    </a:lnL>
+                    <a:lnR>
+                      <a:noFill/>
+                    </a:lnR>
+                    <a:lnB w="9525" cmpd="s">
+                      <a:solidFill>
+                        <a:srgbClr val="3A4150"/>
+                      </a:solidFill>
+                    </a:lnB>
+                  </a:tcPr>
+                </a:tc>
+                <a:tc>
+                  <a:txBody>
+                    <a:bodyPr wrap="square" lIns="100000" rIns="100000" tIns="70000" bIns="70000"/>
+                    <a:lstStyle/>
+                    <a:p>
+                      <a:pPr algn="l"/>
+                      <a:r>
+                        <a:rPr sz="950" b="0" i="0" u="none">
+                          <a:solidFill>
+                            <a:srgbClr val="F9FAFB"/>
+                          </a:solidFill>
+                          <a:latin typeface="Calibri"/>
+                        </a:rPr>
+                        <a:t>Generic code; no awareness of FOC, SVPWM, or ARXML</a:t>
+                      </a:r>
+                    </a:p>
+                  </a:txBody>
+                  <a:tcPr marL="100000" marR="100000" marT="70000" marB="70000" anchor="ctr">
+                    <a:lnL>
+                      <a:noFill/>
+                    </a:lnL>
+                    <a:lnR>
+                      <a:noFill/>
+                    </a:lnR>
+                    <a:lnB w="9525" cmpd="s">
+                      <a:solidFill>
+                        <a:srgbClr val="3A4150"/>
+                      </a:solidFill>
+                    </a:lnB>
+                  </a:tcPr>
+                </a:tc>
+                <a:tc>
+                  <a:txBody>
+                    <a:bodyPr wrap="square" lIns="100000" rIns="100000" tIns="70000" bIns="70000"/>
+                    <a:lstStyle/>
+                    <a:p>
+                      <a:pPr algn="l"/>
+                      <a:r>
+                        <a:rPr sz="950" b="0" i="0" u="none">
+                          <a:solidFill>
+                            <a:srgbClr val="F9FAFB"/>
+                          </a:solidFill>
+                          <a:latin typeface="Calibri"/>
+                        </a:rPr>
+                        <a:t>Native understanding of dq-frame transformations, MTPA, and AUTOSAR</a:t>
+                      </a:r>
+                    </a:p>
+                  </a:txBody>
+                  <a:tcPr marL="100000" marR="100000" marT="70000" marB="70000" anchor="ctr">
+                    <a:lnL>
+                      <a:noFill/>
+                    </a:lnL>
+                    <a:lnR>
+                      <a:noFill/>
+                    </a:lnR>
+                    <a:lnB w="9525" cmpd="s">
+                      <a:solidFill>
+                        <a:srgbClr val="3A4150"/>
+                      </a:solidFill>
+                    </a:lnB>
+                  </a:tcPr>
+                </a:tc>
+              </a:tr>
+              <a:tr h="435327">
+                <a:tc>
+                  <a:txBody>
+                    <a:bodyPr wrap="square" lIns="100000" rIns="100000" tIns="70000" bIns="70000"/>
+                    <a:lstStyle/>
+                    <a:p>
+                      <a:pPr algn="l"/>
+                      <a:r>
+                        <a:rPr sz="1050" b="1" i="0" u="none">
+                          <a:solidFill>
+                            <a:srgbClr val="F9FAFB"/>
+                          </a:solidFill>
+                          <a:latin typeface="Calibri"/>
+                        </a:rPr>
+                        <a:t>Safety &amp; Compliance</a:t>
+                      </a:r>
+                    </a:p>
+                  </a:txBody>
+                  <a:tcPr marL="100000" marR="100000" marT="70000" marB="70000" anchor="ctr">
+                    <a:solidFill>
+                      <a:srgbClr val="222A3B"/>
+                    </a:solidFill>
+                    <a:lnL>
+                      <a:noFill/>
+                    </a:lnL>
+                    <a:lnR>
+                      <a:noFill/>
+                    </a:lnR>
+                    <a:lnB w="9525" cmpd="s">
+                      <a:solidFill>
+                        <a:srgbClr val="3A4150"/>
+                      </a:solidFill>
+                    </a:lnB>
+                  </a:tcPr>
+                </a:tc>
+                <a:tc>
+                  <a:txBody>
+                    <a:bodyPr wrap="square" lIns="100000" rIns="100000" tIns="70000" bIns="70000"/>
+                    <a:lstStyle/>
+                    <a:p>
+                      <a:pPr algn="l"/>
+                      <a:r>
+                        <a:rPr sz="950" b="0" i="0" u="none">
+                          <a:solidFill>
+                            <a:srgbClr val="F9FAFB"/>
+                          </a:solidFill>
+                          <a:latin typeface="Calibri"/>
+                        </a:rPr>
+                        <a:t>Unverifiable probabilistic text; unsuited for ASIL-D</a:t>
+                      </a:r>
+                    </a:p>
+                  </a:txBody>
+                  <a:tcPr marL="100000" marR="100000" marT="70000" marB="70000" anchor="ctr">
+                    <a:solidFill>
+                      <a:srgbClr val="222A3B"/>
+                    </a:solidFill>
+                    <a:lnL>
+                      <a:noFill/>
+                    </a:lnL>
+                    <a:lnR>
+                      <a:noFill/>
+                    </a:lnR>
+                    <a:lnB w="9525" cmpd="s">
+                      <a:solidFill>
+                        <a:srgbClr val="3A4150"/>
+                      </a:solidFill>
+                    </a:lnB>
+                  </a:tcPr>
+                </a:tc>
+                <a:tc>
+                  <a:txBody>
+                    <a:bodyPr wrap="square" lIns="100000" rIns="100000" tIns="70000" bIns="70000"/>
+                    <a:lstStyle/>
+                    <a:p>
+                      <a:pPr algn="l"/>
+                      <a:r>
+                        <a:rPr sz="950" b="0" i="0" u="none">
+                          <a:solidFill>
+                            <a:srgbClr val="F9FAFB"/>
+                          </a:solidFill>
+                          <a:latin typeface="Calibri"/>
+                        </a:rPr>
+                        <a:t>Deterministic verification gates; ISO 26262 tool qualification support</a:t>
+                      </a:r>
+                    </a:p>
+                  </a:txBody>
+                  <a:tcPr marL="100000" marR="100000" marT="70000" marB="70000" anchor="ctr">
+                    <a:solidFill>
+                      <a:srgbClr val="222A3B"/>
+                    </a:solidFill>
+                    <a:lnL>
+                      <a:noFill/>
+                    </a:lnL>
+                    <a:lnR>
+                      <a:noFill/>
+                    </a:lnR>
+                    <a:lnB w="9525" cmpd="s">
+                      <a:solidFill>
+                        <a:srgbClr val="3A4150"/>
+                      </a:solidFill>
+                    </a:lnB>
+                  </a:tcPr>
+                </a:tc>
+              </a:tr>
+              <a:tr h="435327">
+                <a:tc>
+                  <a:txBody>
+                    <a:bodyPr wrap="square" lIns="100000" rIns="100000" tIns="70000" bIns="70000"/>
+                    <a:lstStyle/>
+                    <a:p>
+                      <a:pPr algn="l"/>
+                      <a:r>
+                        <a:rPr sz="1050" b="1" i="0" u="none">
+                          <a:solidFill>
+                            <a:srgbClr val="F9FAFB"/>
+                          </a:solidFill>
+                          <a:latin typeface="Calibri"/>
+                        </a:rPr>
+                        <a:t>Toolchain Integration</a:t>
+                      </a:r>
+                    </a:p>
+                  </a:txBody>
+                  <a:tcPr marL="100000" marR="100000" marT="70000" marB="70000" anchor="ctr">
+                    <a:lnL>
+                      <a:noFill/>
+                    </a:lnL>
+                    <a:lnR>
+                      <a:noFill/>
+                    </a:lnR>
+                    <a:lnB w="9525" cmpd="s">
+                      <a:solidFill>
+                        <a:srgbClr val="3A4150"/>
+                      </a:solidFill>
+                    </a:lnB>
+                  </a:tcPr>
+                </a:tc>
+                <a:tc>
+                  <a:txBody>
+                    <a:bodyPr wrap="square" lIns="100000" rIns="100000" tIns="70000" bIns="70000"/>
+                    <a:lstStyle/>
+                    <a:p>
+                      <a:pPr algn="l"/>
+                      <a:r>
+                        <a:rPr sz="950" b="0" i="0" u="none">
+                          <a:solidFill>
+                            <a:srgbClr val="F9FAFB"/>
+                          </a:solidFill>
+                          <a:latin typeface="Calibri"/>
+                        </a:rPr>
+                        <a:t>Copy-paste web browser interface; manual friction</a:t>
+                      </a:r>
+                    </a:p>
+                  </a:txBody>
+                  <a:tcPr marL="100000" marR="100000" marT="70000" marB="70000" anchor="ctr">
+                    <a:lnL>
+                      <a:noFill/>
+                    </a:lnL>
+                    <a:lnR>
+                      <a:noFill/>
+                    </a:lnR>
+                    <a:lnB w="9525" cmpd="s">
+                      <a:solidFill>
+                        <a:srgbClr val="3A4150"/>
+                      </a:solidFill>
+                    </a:lnB>
+                  </a:tcPr>
+                </a:tc>
+                <a:tc>
+                  <a:txBody>
+                    <a:bodyPr wrap="square" lIns="100000" rIns="100000" tIns="70000" bIns="70000"/>
+                    <a:lstStyle/>
+                    <a:p>
+                      <a:pPr algn="l"/>
+                      <a:r>
+                        <a:rPr sz="950" b="0" i="0" u="none">
+                          <a:solidFill>
+                            <a:srgbClr val="F9FAFB"/>
+                          </a:solidFill>
+                          <a:latin typeface="Calibri"/>
+                        </a:rPr>
+                        <a:t>Headless API connectors for DOORS, Simulink, CANoe, INCA, dSPACE</a:t>
+                      </a:r>
+                    </a:p>
+                  </a:txBody>
+                  <a:tcPr marL="100000" marR="100000" marT="70000" marB="70000" anchor="ctr">
+                    <a:lnL>
+                      <a:noFill/>
+                    </a:lnL>
+                    <a:lnR>
+                      <a:noFill/>
+                    </a:lnR>
+                    <a:lnB w="9525" cmpd="s">
+                      <a:solidFill>
+                        <a:srgbClr val="3A4150"/>
+                      </a:solidFill>
+                    </a:lnB>
+                  </a:tcPr>
+                </a:tc>
+              </a:tr>
+            </a:tbl>
+          </a:graphicData>
+        </a:graphic>
+      </p:graphicFrame>
+      <p:sp>
+        <p:nvSpPr>
+          <p:cNvPr id="9" name="TextBox 8"/>
+          <p:cNvSpPr txBox="1"/>
+          <p:nvPr/>
+        </p:nvSpPr>
+        <p:spPr>
+          <a:xfrm>
+            <a:off x="548640" y="411480"/>
+            <a:ext cx="11094415" cy="1248410"/>
+          </a:xfrm>
+          <a:prstGeom prst="rect">
+            <a:avLst/>
+          </a:prstGeom>
+          <a:noFill/>
+        </p:spPr>
+        <p:txBody>
+          <a:bodyPr wrap="square" anchor="t" lIns="0" tIns="0" rIns="0" bIns="0">
+            <a:spAutoFit/>
+          </a:bodyPr>
+          <a:lstStyle/>
           <a:p>
             <a:pPr algn="l">
               <a:spcAft>
                 <a:spcPts val="200"/>
               </a:spcAft>
-              <a:buChar char="•"/>
-            </a:pPr>
-            <a:r>
-              <a:rPr sz="1600" b="0" i="0" u="none">
+              <a:buNone/>
+            </a:pPr>
+            <a:r>
+              <a:rPr sz="1100" b="1" i="0" u="none">
+                <a:solidFill>
+                  <a:srgbClr val="38BDF8"/>
+                </a:solidFill>
+                <a:latin typeface="Calibri"/>
+              </a:rPr>
+              <a:t>• ENGINEERING FOUNDATIONS · BEYOND GENERIC LLMS</a:t>
+            </a:r>
+          </a:p>
+          <a:p>
+            <a:pPr algn="l">
+              <a:buNone/>
+            </a:pPr>
+            <a:r>
+              <a:rPr sz="2400" b="1" i="0" u="none">
                 <a:solidFill>
                   <a:srgbClr val="F9FAFB"/>
                 </a:solidFill>
                 <a:latin typeface="Calibri"/>
               </a:rPr>
-              <a:t>Automated MISRA-C:2012 / CERT C rule checkers</a:t>
+              <a:t>What is AI in Deep Automotive Motor ECU Development?</a:t>
             </a:r>
           </a:p>
           <a:p>
             <a:pPr algn="l">
-              <a:spcAft>
-                <a:spcPts val="200"/>
-              </a:spcAft>
-              <a:buChar char="•"/>
-            </a:pPr>
-            <a:r>
-              <a:rPr sz="1600" b="0" i="0" u="none">
-                <a:solidFill>
-                  <a:srgbClr val="F9FAFB"/>
-                </a:solidFill>
-                <a:latin typeface="Calibri"/>
-              </a:rPr>
-              <a:t>SMT-based formal bounds checking (Polyspace/Astree)</a:t>
-            </a:r>
-          </a:p>
-          <a:p>
-            <a:pPr algn="l">
-              <a:spcAft>
-                <a:spcPts val="200"/>
-              </a:spcAft>
-              <a:buChar char="•"/>
-            </a:pPr>
-            <a:r>
-              <a:rPr sz="1600" b="0" i="0" u="none">
-                <a:solidFill>
-                  <a:srgbClr val="F9FAFB"/>
-                </a:solidFill>
-                <a:latin typeface="Calibri"/>
-              </a:rPr>
-              <a:t>Human-in-the-loop sign-off for ASIL-D safety cases</a:t>
-            </a:r>
-          </a:p>
-        </p:txBody>
-      </p:sp>
-      <p:sp>
-        <p:nvSpPr>
-          <p:cNvPr id="8" name="TextBox 7"/>
-          <p:cNvSpPr txBox="1"/>
-          <p:nvPr/>
-        </p:nvSpPr>
-        <p:spPr>
-          <a:xfrm>
-            <a:off x="822960" y="548640"/>
-            <a:ext cx="10545775" cy="1097280"/>
+              <a:spcBef>
+                <a:spcPts val="300"/>
+              </a:spcBef>
+              <a:buNone/>
+            </a:pPr>
+            <a:r>
+              <a:rPr sz="1250" b="0" i="0" u="none">
+                <a:solidFill>
+                  <a:srgbClr val="9CA3AF"/>
+                </a:solidFill>
+                <a:latin typeface="Calibri"/>
+              </a:rPr>
+              <a:t>Generic commercial AI hallucinates and leaks data. Automotive-grade engineering AI is a deterministic, neuro-symbolic framework engineered specifically for functional safety (ISO 26262) and real-time control physics.</a:t>
+            </a:r>
+          </a:p>
+        </p:txBody>
+      </p:sp>
+      <p:sp>
+        <p:nvSpPr>
+          <p:cNvPr id="10" name="Rectangle 9"/>
+          <p:cNvSpPr/>
+          <p:nvPr/>
+        </p:nvSpPr>
+        <p:spPr>
+          <a:xfrm>
+            <a:off x="548640" y="1672590"/>
+            <a:ext cx="2286000" cy="38100"/>
           </a:xfrm>
           <a:prstGeom prst="rect">
             <a:avLst/>
           </a:prstGeom>
-          <a:noFill/>
-        </p:spPr>
-        <p:txBody>
-          <a:bodyPr wrap="square" lIns="0" tIns="0" rIns="0" bIns="0">
-            <a:spAutoFit/>
-          </a:bodyPr>
-          <a:lstStyle/>
-          <a:p>
-            <a:pPr algn="ctr">
-              <a:buNone/>
-            </a:pPr>
-            <a:r>
-              <a:rPr sz="3000" b="1" i="0" u="none">
-                <a:solidFill>
-                  <a:srgbClr val="F9FAFB"/>
-                </a:solidFill>
-                <a:latin typeface="Calibri"/>
-              </a:rPr>
-              <a:t>What is AI in Deep Automotive Motor ECU Development?</a:t>
-            </a:r>
-          </a:p>
-        </p:txBody>
-      </p:sp>
-      <p:sp>
-        <p:nvSpPr>
-          <p:cNvPr id="9" name="Rectangle 8"/>
-          <p:cNvSpPr/>
-          <p:nvPr/>
-        </p:nvSpPr>
-        <p:spPr>
-          <a:xfrm>
-            <a:off x="822960" y="1645920"/>
-            <a:ext cx="10545775" cy="12700"/>
-          </a:xfrm>
-          <a:prstGeom prst="rect">
-            <a:avLst/>
-          </a:prstGeom>
           <a:solidFill>
-            <a:srgbClr val="3F4555"/>
+            <a:srgbClr val="38BDF8"/>
           </a:solidFill>
           <a:ln>
             <a:noFill/>
@@ -4307,14 +5185,14 @@
       </p:sp>
       <p:sp>
         <p:nvSpPr>
-          <p:cNvPr id="10" name="TextBox 9"/>
+          <p:cNvPr id="11" name="TextBox 10"/>
           <p:cNvSpPr txBox="1"/>
           <p:nvPr/>
         </p:nvSpPr>
         <p:spPr>
           <a:xfrm>
-            <a:off x="9997135" y="6629400"/>
-            <a:ext cx="1371600" cy="274320"/>
+            <a:off x="548640" y="6437376"/>
+            <a:ext cx="9539935" cy="256032"/>
           </a:xfrm>
           <a:prstGeom prst="rect">
             <a:avLst/>
@@ -4322,16 +5200,53 @@
           <a:noFill/>
         </p:spPr>
         <p:txBody>
-          <a:bodyPr wrap="square" lIns="0" tIns="0" rIns="0" bIns="0">
+          <a:bodyPr wrap="square" anchor="ctr" lIns="0" tIns="0" rIns="0" bIns="0">
             <a:spAutoFit/>
           </a:bodyPr>
           <a:lstStyle/>
           <a:p>
+            <a:pPr algn="l">
+              <a:buNone/>
+            </a:pPr>
+            <a:r>
+              <a:rPr sz="950" b="0" i="0" u="none">
+                <a:solidFill>
+                  <a:srgbClr val="9CA3AF"/>
+                </a:solidFill>
+                <a:latin typeface="Calibri"/>
+              </a:rPr>
+              <a:t>Deterministic Neuro-Symbolic Architecture for High-Integrity Systems</a:t>
+            </a:r>
+          </a:p>
+        </p:txBody>
+      </p:sp>
+      <p:sp>
+        <p:nvSpPr>
+          <p:cNvPr id="12" name="TextBox 11"/>
+          <p:cNvSpPr txBox="1"/>
+          <p:nvPr/>
+        </p:nvSpPr>
+        <p:spPr>
+          <a:xfrm>
+            <a:off x="10271455" y="6437376"/>
+            <a:ext cx="1371600" cy="256032"/>
+          </a:xfrm>
+          <a:prstGeom prst="rect">
+            <a:avLst/>
+          </a:prstGeom>
+          <a:noFill/>
+        </p:spPr>
+        <p:txBody>
+          <a:bodyPr wrap="square" anchor="ctr" lIns="0" tIns="0" rIns="0" bIns="0">
+            <a:spAutoFit/>
+          </a:bodyPr>
+          <a:lstStyle/>
+          <a:p>
             <a:pPr algn="r">
               <a:buNone/>
             </a:pPr>
             <a:r>
-              <a:rPr sz="1100" b="0" i="0" u="none">
+              <a:rPr sz="950" b="0" i="0" u="none">
                 <a:solidFill>
                   <a:srgbClr val="9CA3AF"/>
                 </a:solidFill>
@@ -4368,414 +5283,29 @@
         <p:nvPr/>
       </p:nvGrpSpPr>
       <p:grpSpPr/>
-      <p:graphicFrame>
-        <p:nvGraphicFramePr>
-          <p:cNvPr id="2" name="Table 1"/>
-          <p:cNvGraphicFramePr>
-            <a:graphicFrameLocks noGrp="1"/>
-          </p:cNvGraphicFramePr>
-          <p:nvPr/>
-        </p:nvGraphicFramePr>
-        <p:xfrm>
-          <a:off x="822960" y="1828800"/>
-          <a:ext cx="10545774" cy="4572000"/>
-        </p:xfrm>
-        <a:graphic>
-          <a:graphicData uri="http://schemas.openxmlformats.org/drawingml/2006/table">
-            <a:tbl>
-              <a:tblPr firstRow="1" bandRow="1">
-                <a:tableStyleId>{5C22544A-7EE6-4342-B048-85BDC9FD1C3A}</a:tableStyleId>
-              </a:tblPr>
-              <a:tblGrid>
-                <a:gridCol w="3700377"/>
-                <a:gridCol w="3066256"/>
-                <a:gridCol w="3779141"/>
-              </a:tblGrid>
-              <a:tr h="914400">
-                <a:tc>
-                  <a:txBody>
-                    <a:bodyPr wrap="square" lIns="60000" rIns="60000" tIns="40000" bIns="40000"/>
-                    <a:lstStyle/>
-                    <a:p>
-                      <a:pPr algn="l"/>
-                      <a:r>
-                        <a:rPr sz="1680" b="1" i="0">
-                          <a:solidFill>
-                            <a:srgbClr val="F9FAFB"/>
-                          </a:solidFill>
-                          <a:latin typeface="Calibri"/>
-                        </a:rPr>
-                        <a:t>Dimension</a:t>
-                      </a:r>
-                    </a:p>
-                  </a:txBody>
-                  <a:tcPr>
-                    <a:solidFill>
-                      <a:srgbClr val="222A3B"/>
-                    </a:solidFill>
-                  </a:tcPr>
-                </a:tc>
-                <a:tc>
-                  <a:txBody>
-                    <a:bodyPr wrap="square" lIns="60000" rIns="60000" tIns="40000" bIns="40000"/>
-                    <a:lstStyle/>
-                    <a:p>
-                      <a:pPr algn="l"/>
-                      <a:r>
-                        <a:rPr sz="1680" b="1" i="0">
-                          <a:solidFill>
-                            <a:srgbClr val="F9FAFB"/>
-                          </a:solidFill>
-                          <a:latin typeface="Calibri"/>
-                        </a:rPr>
-                        <a:t>Generic Consumer AI (ChatGPT / Public Cloud)</a:t>
-                      </a:r>
-                    </a:p>
-                  </a:txBody>
-                  <a:tcPr>
-                    <a:solidFill>
-                      <a:srgbClr val="222A3B"/>
-                    </a:solidFill>
-                  </a:tcPr>
-                </a:tc>
-                <a:tc>
-                  <a:txBody>
-                    <a:bodyPr wrap="square" lIns="60000" rIns="60000" tIns="40000" bIns="40000"/>
-                    <a:lstStyle/>
-                    <a:p>
-                      <a:pPr algn="l"/>
-                      <a:r>
-                        <a:rPr sz="1680" b="1" i="0">
-                          <a:solidFill>
-                            <a:srgbClr val="F9FAFB"/>
-                          </a:solidFill>
-                          <a:latin typeface="Calibri"/>
-                        </a:rPr>
-                        <a:t>Our Automotive Motor ECU AI Platform</a:t>
-                      </a:r>
-                    </a:p>
-                  </a:txBody>
-                  <a:tcPr>
-                    <a:solidFill>
-                      <a:srgbClr val="222A3B"/>
-                    </a:solidFill>
-                  </a:tcPr>
-                </a:tc>
-              </a:tr>
-              <a:tr h="914400">
-                <a:tc>
-                  <a:txBody>
-                    <a:bodyPr wrap="square" lIns="60000" rIns="60000" tIns="40000" bIns="40000"/>
-                    <a:lstStyle/>
-                    <a:p>
-                      <a:pPr algn="l"/>
-                      <a:r>
-                        <a:rPr sz="1600" b="0" i="0">
-                          <a:solidFill>
-                            <a:srgbClr val="F9FAFB"/>
-                          </a:solidFill>
-                          <a:latin typeface="Calibri"/>
-                        </a:rPr>
-                        <a:t>Data Confidentiality</a:t>
-                      </a:r>
-                    </a:p>
-                  </a:txBody>
-                  <a:tcPr/>
-                </a:tc>
-                <a:tc>
-                  <a:txBody>
-                    <a:bodyPr wrap="square" lIns="60000" rIns="60000" tIns="40000" bIns="40000"/>
-                    <a:lstStyle/>
-                    <a:p>
-                      <a:pPr algn="l"/>
-                      <a:r>
-                        <a:rPr sz="1600" b="0" i="0">
-                          <a:solidFill>
-                            <a:srgbClr val="F9FAFB"/>
-                          </a:solidFill>
-                          <a:latin typeface="Calibri"/>
-                        </a:rPr>
-                        <a:t>High Risk</a:t>
-                      </a:r>
-                      <a:r>
-                        <a:rPr sz="1600" b="0" i="0">
-                          <a:solidFill>
-                            <a:srgbClr val="F9FAFB"/>
-                          </a:solidFill>
-                          <a:latin typeface="Calibri"/>
-                        </a:rPr>
-                        <a:t> Egresses to public cloud; risks model retraining</a:t>
-                      </a:r>
-                    </a:p>
-                  </a:txBody>
-                  <a:tcPr/>
-                </a:tc>
-                <a:tc>
-                  <a:txBody>
-                    <a:bodyPr wrap="square" lIns="60000" rIns="60000" tIns="40000" bIns="40000"/>
-                    <a:lstStyle/>
-                    <a:p>
-                      <a:pPr algn="r"/>
-                      <a:r>
-                        <a:rPr sz="1600" b="0" i="0">
-                          <a:solidFill>
-                            <a:srgbClr val="F9FAFB"/>
-                          </a:solidFill>
-                          <a:latin typeface="Calibri"/>
-                        </a:rPr>
-                        <a:t>100% Sovereign</a:t>
-                      </a:r>
-                      <a:r>
-                        <a:rPr sz="1600" b="0" i="0">
-                          <a:solidFill>
-                            <a:srgbClr val="F9FAFB"/>
-                          </a:solidFill>
-                          <a:latin typeface="Calibri"/>
-                        </a:rPr>
-                        <a:t> Air-gapped / On-Premise; zero external transmission</a:t>
-                      </a:r>
-                    </a:p>
-                  </a:txBody>
-                  <a:tcPr/>
-                </a:tc>
-              </a:tr>
-              <a:tr h="914400">
-                <a:tc>
-                  <a:txBody>
-                    <a:bodyPr wrap="square" lIns="60000" rIns="60000" tIns="40000" bIns="40000"/>
-                    <a:lstStyle/>
-                    <a:p>
-                      <a:pPr algn="l"/>
-                      <a:r>
-                        <a:rPr sz="1600" b="0" i="0">
-                          <a:solidFill>
-                            <a:srgbClr val="F9FAFB"/>
-                          </a:solidFill>
-                          <a:latin typeface="Calibri"/>
-                        </a:rPr>
-                        <a:t>Automotive Semantics</a:t>
-                      </a:r>
-                    </a:p>
-                  </a:txBody>
-                  <a:tcPr/>
-                </a:tc>
-                <a:tc>
-                  <a:txBody>
-                    <a:bodyPr wrap="square" lIns="60000" rIns="60000" tIns="40000" bIns="40000"/>
-                    <a:lstStyle/>
-                    <a:p>
-                      <a:pPr algn="l"/>
-                      <a:r>
-                        <a:rPr sz="1600" b="0" i="0">
-                          <a:solidFill>
-                            <a:srgbClr val="F9FAFB"/>
-                          </a:solidFill>
-                          <a:latin typeface="Calibri"/>
-                        </a:rPr>
-                        <a:t>Generic code; no awareness of FOC, SVPWM, or ARXML</a:t>
-                      </a:r>
-                    </a:p>
-                  </a:txBody>
-                  <a:tcPr/>
-                </a:tc>
-                <a:tc>
-                  <a:txBody>
-                    <a:bodyPr wrap="square" lIns="60000" rIns="60000" tIns="40000" bIns="40000"/>
-                    <a:lstStyle/>
-                    <a:p>
-                      <a:pPr algn="l"/>
-                      <a:r>
-                        <a:rPr sz="1600" b="0" i="0">
-                          <a:solidFill>
-                            <a:srgbClr val="F9FAFB"/>
-                          </a:solidFill>
-                          <a:latin typeface="Calibri"/>
-                        </a:rPr>
-                        <a:t>Native understanding of dq-frame transformations, MTPA, and AUTOSAR</a:t>
-                      </a:r>
-                    </a:p>
-                  </a:txBody>
-                  <a:tcPr/>
-                </a:tc>
-              </a:tr>
-              <a:tr h="914400">
-                <a:tc>
-                  <a:txBody>
-                    <a:bodyPr wrap="square" lIns="60000" rIns="60000" tIns="40000" bIns="40000"/>
-                    <a:lstStyle/>
-                    <a:p>
-                      <a:pPr algn="l"/>
-                      <a:r>
-                        <a:rPr sz="1600" b="0" i="0">
-                          <a:solidFill>
-                            <a:srgbClr val="F9FAFB"/>
-                          </a:solidFill>
-                          <a:latin typeface="Calibri"/>
-                        </a:rPr>
-                        <a:t>Safety &amp; Compliance</a:t>
-                      </a:r>
-                    </a:p>
-                  </a:txBody>
-                  <a:tcPr/>
-                </a:tc>
-                <a:tc>
-                  <a:txBody>
-                    <a:bodyPr wrap="square" lIns="60000" rIns="60000" tIns="40000" bIns="40000"/>
-                    <a:lstStyle/>
-                    <a:p>
-                      <a:pPr algn="l"/>
-                      <a:r>
-                        <a:rPr sz="1600" b="0" i="0">
-                          <a:solidFill>
-                            <a:srgbClr val="F9FAFB"/>
-                          </a:solidFill>
-                          <a:latin typeface="Calibri"/>
-                        </a:rPr>
-                        <a:t>Unverifiable probabilistic text; unsuited for ASIL-D</a:t>
-                      </a:r>
-                    </a:p>
-                  </a:txBody>
-                  <a:tcPr/>
-                </a:tc>
-                <a:tc>
-                  <a:txBody>
-                    <a:bodyPr wrap="square" lIns="60000" rIns="60000" tIns="40000" bIns="40000"/>
-                    <a:lstStyle/>
-                    <a:p>
-                      <a:pPr algn="l"/>
-                      <a:r>
-                        <a:rPr sz="1600" b="0" i="0">
-                          <a:solidFill>
-                            <a:srgbClr val="F9FAFB"/>
-                          </a:solidFill>
-                          <a:latin typeface="Calibri"/>
-                        </a:rPr>
-                        <a:t>Deterministic verification gates; ISO 26262 tool qualification support</a:t>
-                      </a:r>
-                    </a:p>
-                  </a:txBody>
-                  <a:tcPr/>
-                </a:tc>
-              </a:tr>
-              <a:tr h="914400">
-                <a:tc>
-                  <a:txBody>
-                    <a:bodyPr wrap="square" lIns="60000" rIns="60000" tIns="40000" bIns="40000"/>
-                    <a:lstStyle/>
-                    <a:p>
-                      <a:pPr algn="l"/>
-                      <a:r>
-                        <a:rPr sz="1600" b="0" i="0">
-                          <a:solidFill>
-                            <a:srgbClr val="F9FAFB"/>
-                          </a:solidFill>
-                          <a:latin typeface="Calibri"/>
-                        </a:rPr>
-                        <a:t>Toolchain Integration</a:t>
-                      </a:r>
-                    </a:p>
-                  </a:txBody>
-                  <a:tcPr/>
-                </a:tc>
-                <a:tc>
-                  <a:txBody>
-                    <a:bodyPr wrap="square" lIns="60000" rIns="60000" tIns="40000" bIns="40000"/>
-                    <a:lstStyle/>
-                    <a:p>
-                      <a:pPr algn="l"/>
-                      <a:r>
-                        <a:rPr sz="1600" b="0" i="0">
-                          <a:solidFill>
-                            <a:srgbClr val="F9FAFB"/>
-                          </a:solidFill>
-                          <a:latin typeface="Calibri"/>
-                        </a:rPr>
-                        <a:t>Copy-paste web browser interface; manual friction</a:t>
-                      </a:r>
-                    </a:p>
-                  </a:txBody>
-                  <a:tcPr/>
-                </a:tc>
-                <a:tc>
-                  <a:txBody>
-                    <a:bodyPr wrap="square" lIns="60000" rIns="60000" tIns="40000" bIns="40000"/>
-                    <a:lstStyle/>
-                    <a:p>
-                      <a:pPr algn="l"/>
-                      <a:r>
-                        <a:rPr sz="1600" b="0" i="0">
-                          <a:solidFill>
-                            <a:srgbClr val="F9FAFB"/>
-                          </a:solidFill>
-                          <a:latin typeface="Calibri"/>
-                        </a:rPr>
-                        <a:t>Headless API connectors for DOORS, Simulink, CANoe, INCA, dSPACE</a:t>
-                      </a:r>
-                    </a:p>
-                  </a:txBody>
-                  <a:tcPr/>
-                </a:tc>
-              </a:tr>
-            </a:tbl>
-          </a:graphicData>
-        </a:graphic>
-      </p:graphicFrame>
-      <p:sp>
-        <p:nvSpPr>
-          <p:cNvPr id="3" name="TextBox 2"/>
-          <p:cNvSpPr txBox="1"/>
-          <p:nvPr/>
-        </p:nvSpPr>
-        <p:spPr>
-          <a:xfrm>
-            <a:off x="822960" y="548640"/>
-            <a:ext cx="10545775" cy="1097280"/>
-          </a:xfrm>
-          <a:prstGeom prst="rect">
-            <a:avLst/>
-          </a:prstGeom>
-          <a:noFill/>
-        </p:spPr>
-        <p:txBody>
-          <a:bodyPr wrap="square" lIns="0" tIns="0" rIns="0" bIns="0">
-            <a:spAutoFit/>
-          </a:bodyPr>
-          <a:lstStyle/>
-          <a:p>
-            <a:pPr algn="ctr">
-              <a:buNone/>
-            </a:pPr>
-            <a:r>
-              <a:rPr sz="3000" b="1" i="0" u="none">
-                <a:solidFill>
-                  <a:srgbClr val="F9FAFB"/>
-                </a:solidFill>
-                <a:latin typeface="Calibri"/>
-              </a:rPr>
-              <a:t>What is AI in Deep Automotive Motor ECU Development? (cont.)</a:t>
-            </a:r>
-          </a:p>
-        </p:txBody>
-      </p:sp>
-      <p:sp>
-        <p:nvSpPr>
-          <p:cNvPr id="4" name="Rectangle 3"/>
+      <p:sp>
+        <p:nvSpPr>
+          <p:cNvPr id="2" name="Rounded Rectangle 1"/>
           <p:cNvSpPr/>
           <p:nvPr/>
         </p:nvSpPr>
         <p:spPr>
           <a:xfrm>
-            <a:off x="822960" y="1645920"/>
-            <a:ext cx="10545775" cy="12700"/>
-          </a:xfrm>
-          <a:prstGeom prst="rect">
-            <a:avLst/>
+            <a:off x="548640" y="1783334"/>
+            <a:ext cx="4428740" cy="986316"/>
+          </a:xfrm>
+          <a:prstGeom prst="roundRect">
+            <a:avLst>
+              <a:gd name="adj" fmla="val 4000"/>
+            </a:avLst>
           </a:prstGeom>
           <a:solidFill>
-            <a:srgbClr val="3F4555"/>
+            <a:srgbClr val="222A3B"/>
           </a:solidFill>
-          <a:ln>
-            <a:noFill/>
+          <a:ln w="12700">
+            <a:solidFill>
+              <a:srgbClr val="38BDF8"/>
+            </a:solidFill>
           </a:ln>
         </p:spPr>
         <p:style>
@@ -4802,31 +5332,1566 @@
       </p:sp>
       <p:sp>
         <p:nvSpPr>
-          <p:cNvPr id="5" name="TextBox 4"/>
-          <p:cNvSpPr txBox="1"/>
-          <p:nvPr/>
-        </p:nvSpPr>
-        <p:spPr>
-          <a:xfrm>
-            <a:off x="9997135" y="6629400"/>
-            <a:ext cx="1371600" cy="274320"/>
+          <p:cNvPr id="3" name="Rectangle 2"/>
+          <p:cNvSpPr/>
+          <p:nvPr/>
+        </p:nvSpPr>
+        <p:spPr>
+          <a:xfrm>
+            <a:off x="548640" y="1783334"/>
+            <a:ext cx="50800" cy="986316"/>
           </a:xfrm>
           <a:prstGeom prst="rect">
             <a:avLst/>
           </a:prstGeom>
+          <a:solidFill>
+            <a:srgbClr val="38BDF8"/>
+          </a:solidFill>
+          <a:ln>
+            <a:noFill/>
+          </a:ln>
+        </p:spPr>
+        <p:style>
+          <a:lnRef idx="1">
+            <a:schemeClr val="accent1"/>
+          </a:lnRef>
+          <a:fillRef idx="3">
+            <a:schemeClr val="accent1"/>
+          </a:fillRef>
+          <a:effectRef idx="2">
+            <a:schemeClr val="accent1"/>
+          </a:effectRef>
+          <a:fontRef idx="minor">
+            <a:schemeClr val="lt1"/>
+          </a:fontRef>
+        </p:style>
+        <p:txBody>
+          <a:bodyPr rtlCol="0" anchor="ctr"/>
+          <a:lstStyle/>
+          <a:p>
+            <a:pPr algn="ctr"/>
+          </a:p>
+        </p:txBody>
+      </p:sp>
+      <p:sp>
+        <p:nvSpPr>
+          <p:cNvPr id="4" name="TextBox 3"/>
+          <p:cNvSpPr txBox="1"/>
+          <p:nvPr/>
+        </p:nvSpPr>
+        <p:spPr>
+          <a:xfrm>
+            <a:off x="745744" y="1874774"/>
+            <a:ext cx="4085332" cy="803436"/>
+          </a:xfrm>
+          <a:prstGeom prst="rect">
+            <a:avLst/>
+          </a:prstGeom>
           <a:noFill/>
         </p:spPr>
         <p:txBody>
-          <a:bodyPr wrap="square" lIns="0" tIns="0" rIns="0" bIns="0">
+          <a:bodyPr wrap="square" anchor="ctr" lIns="0" tIns="0" rIns="0" bIns="0">
             <a:spAutoFit/>
           </a:bodyPr>
           <a:lstStyle/>
           <a:p>
+            <a:pPr algn="l">
+              <a:spcAft>
+                <a:spcPts val="190"/>
+              </a:spcAft>
+              <a:buNone/>
+            </a:pPr>
+            <a:r>
+              <a:rPr sz="1180" b="1" i="0" u="none">
+                <a:solidFill>
+                  <a:srgbClr val="F9FAFB"/>
+                </a:solidFill>
+                <a:latin typeface="Calibri"/>
+              </a:rPr>
+              <a:t>SWE.1: Requirements Engineering</a:t>
+            </a:r>
+            <a:r>
+              <a:rPr sz="940" b="1" i="0" u="none">
+                <a:solidFill>
+                  <a:srgbClr val="38BDF8"/>
+                </a:solidFill>
+                <a:latin typeface="Calibri"/>
+              </a:rPr>
+              <a:t>   [DOORS / Polarion]</a:t>
+            </a:r>
+          </a:p>
+          <a:p>
+            <a:pPr algn="l">
+              <a:spcAft>
+                <a:spcPts val="190"/>
+              </a:spcAft>
+              <a:buNone/>
+            </a:pPr>
+            <a:r>
+              <a:rPr sz="1030" b="1" i="0" u="none">
+                <a:solidFill>
+                  <a:srgbClr val="F9FAFB"/>
+                </a:solidFill>
+                <a:latin typeface="Calibri"/>
+              </a:rPr>
+              <a:t>AI Parser:</a:t>
+            </a:r>
+            <a:r>
+              <a:rPr sz="1030" b="0" i="0" u="none">
+                <a:solidFill>
+                  <a:srgbClr val="F9FAFB"/>
+                </a:solidFill>
+                <a:latin typeface="Calibri"/>
+              </a:rPr>
+              <a:t> Converts OEM vehicle torque requests into formal Motor Control specs; flags conflicting or untestable boundary conditions automatically.</a:t>
+            </a:r>
+          </a:p>
+        </p:txBody>
+      </p:sp>
+      <p:sp>
+        <p:nvSpPr>
+          <p:cNvPr id="5" name="Rounded Rectangle 4"/>
+          <p:cNvSpPr/>
+          <p:nvPr/>
+        </p:nvSpPr>
+        <p:spPr>
+          <a:xfrm>
+            <a:off x="548640" y="2851946"/>
+            <a:ext cx="4428740" cy="986316"/>
+          </a:xfrm>
+          <a:prstGeom prst="roundRect">
+            <a:avLst>
+              <a:gd name="adj" fmla="val 4000"/>
+            </a:avLst>
+          </a:prstGeom>
+          <a:solidFill>
+            <a:srgbClr val="222A3B"/>
+          </a:solidFill>
+          <a:ln w="12700">
+            <a:solidFill>
+              <a:srgbClr val="38BDF8"/>
+            </a:solidFill>
+          </a:ln>
+        </p:spPr>
+        <p:style>
+          <a:lnRef idx="1">
+            <a:schemeClr val="accent1"/>
+          </a:lnRef>
+          <a:fillRef idx="3">
+            <a:schemeClr val="accent1"/>
+          </a:fillRef>
+          <a:effectRef idx="2">
+            <a:schemeClr val="accent1"/>
+          </a:effectRef>
+          <a:fontRef idx="minor">
+            <a:schemeClr val="lt1"/>
+          </a:fontRef>
+        </p:style>
+        <p:txBody>
+          <a:bodyPr rtlCol="0" anchor="ctr"/>
+          <a:lstStyle/>
+          <a:p>
+            <a:pPr algn="ctr"/>
+          </a:p>
+        </p:txBody>
+      </p:sp>
+      <p:sp>
+        <p:nvSpPr>
+          <p:cNvPr id="6" name="Rectangle 5"/>
+          <p:cNvSpPr/>
+          <p:nvPr/>
+        </p:nvSpPr>
+        <p:spPr>
+          <a:xfrm>
+            <a:off x="548640" y="2851946"/>
+            <a:ext cx="50800" cy="986316"/>
+          </a:xfrm>
+          <a:prstGeom prst="rect">
+            <a:avLst/>
+          </a:prstGeom>
+          <a:solidFill>
+            <a:srgbClr val="38BDF8"/>
+          </a:solidFill>
+          <a:ln>
+            <a:noFill/>
+          </a:ln>
+        </p:spPr>
+        <p:style>
+          <a:lnRef idx="1">
+            <a:schemeClr val="accent1"/>
+          </a:lnRef>
+          <a:fillRef idx="3">
+            <a:schemeClr val="accent1"/>
+          </a:fillRef>
+          <a:effectRef idx="2">
+            <a:schemeClr val="accent1"/>
+          </a:effectRef>
+          <a:fontRef idx="minor">
+            <a:schemeClr val="lt1"/>
+          </a:fontRef>
+        </p:style>
+        <p:txBody>
+          <a:bodyPr rtlCol="0" anchor="ctr"/>
+          <a:lstStyle/>
+          <a:p>
+            <a:pPr algn="ctr"/>
+          </a:p>
+        </p:txBody>
+      </p:sp>
+      <p:sp>
+        <p:nvSpPr>
+          <p:cNvPr id="7" name="TextBox 6"/>
+          <p:cNvSpPr txBox="1"/>
+          <p:nvPr/>
+        </p:nvSpPr>
+        <p:spPr>
+          <a:xfrm>
+            <a:off x="745744" y="2943386"/>
+            <a:ext cx="4085332" cy="803436"/>
+          </a:xfrm>
+          <a:prstGeom prst="rect">
+            <a:avLst/>
+          </a:prstGeom>
+          <a:noFill/>
+        </p:spPr>
+        <p:txBody>
+          <a:bodyPr wrap="square" anchor="ctr" lIns="0" tIns="0" rIns="0" bIns="0">
+            <a:spAutoFit/>
+          </a:bodyPr>
+          <a:lstStyle/>
+          <a:p>
+            <a:pPr algn="l">
+              <a:spcAft>
+                <a:spcPts val="190"/>
+              </a:spcAft>
+              <a:buNone/>
+            </a:pPr>
+            <a:r>
+              <a:rPr sz="1180" b="1" i="0" u="none">
+                <a:solidFill>
+                  <a:srgbClr val="F9FAFB"/>
+                </a:solidFill>
+                <a:latin typeface="Calibri"/>
+              </a:rPr>
+              <a:t>SWE.2: System Architecture</a:t>
+            </a:r>
+            <a:r>
+              <a:rPr sz="940" b="1" i="0" u="none">
+                <a:solidFill>
+                  <a:srgbClr val="38BDF8"/>
+                </a:solidFill>
+                <a:latin typeface="Calibri"/>
+              </a:rPr>
+              <a:t>   [AUTOSAR ARXML]</a:t>
+            </a:r>
+          </a:p>
+          <a:p>
+            <a:pPr algn="l">
+              <a:spcAft>
+                <a:spcPts val="190"/>
+              </a:spcAft>
+              <a:buNone/>
+            </a:pPr>
+            <a:r>
+              <a:rPr sz="1030" b="1" i="0" u="none">
+                <a:solidFill>
+                  <a:srgbClr val="F9FAFB"/>
+                </a:solidFill>
+                <a:latin typeface="Calibri"/>
+              </a:rPr>
+              <a:t>ARXML Co-Pilot:</a:t>
+            </a:r>
+            <a:r>
+              <a:rPr sz="1030" b="0" i="0" u="none">
+                <a:solidFill>
+                  <a:srgbClr val="F9FAFB"/>
+                </a:solidFill>
+                <a:latin typeface="Calibri"/>
+              </a:rPr>
+              <a:t> Automated SWC port mapping, runnable scheduling, and data dictionary validation for inverter RTE and BSW complex drivers.</a:t>
+            </a:r>
+          </a:p>
+        </p:txBody>
+      </p:sp>
+      <p:sp>
+        <p:nvSpPr>
+          <p:cNvPr id="8" name="Rounded Rectangle 7"/>
+          <p:cNvSpPr/>
+          <p:nvPr/>
+        </p:nvSpPr>
+        <p:spPr>
+          <a:xfrm>
+            <a:off x="548640" y="3920558"/>
+            <a:ext cx="4428740" cy="986316"/>
+          </a:xfrm>
+          <a:prstGeom prst="roundRect">
+            <a:avLst>
+              <a:gd name="adj" fmla="val 4000"/>
+            </a:avLst>
+          </a:prstGeom>
+          <a:solidFill>
+            <a:srgbClr val="222A3B"/>
+          </a:solidFill>
+          <a:ln w="12700">
+            <a:solidFill>
+              <a:srgbClr val="38BDF8"/>
+            </a:solidFill>
+          </a:ln>
+        </p:spPr>
+        <p:style>
+          <a:lnRef idx="1">
+            <a:schemeClr val="accent1"/>
+          </a:lnRef>
+          <a:fillRef idx="3">
+            <a:schemeClr val="accent1"/>
+          </a:fillRef>
+          <a:effectRef idx="2">
+            <a:schemeClr val="accent1"/>
+          </a:effectRef>
+          <a:fontRef idx="minor">
+            <a:schemeClr val="lt1"/>
+          </a:fontRef>
+        </p:style>
+        <p:txBody>
+          <a:bodyPr rtlCol="0" anchor="ctr"/>
+          <a:lstStyle/>
+          <a:p>
+            <a:pPr algn="ctr"/>
+          </a:p>
+        </p:txBody>
+      </p:sp>
+      <p:sp>
+        <p:nvSpPr>
+          <p:cNvPr id="9" name="Rectangle 8"/>
+          <p:cNvSpPr/>
+          <p:nvPr/>
+        </p:nvSpPr>
+        <p:spPr>
+          <a:xfrm>
+            <a:off x="548640" y="3920558"/>
+            <a:ext cx="50800" cy="986316"/>
+          </a:xfrm>
+          <a:prstGeom prst="rect">
+            <a:avLst/>
+          </a:prstGeom>
+          <a:solidFill>
+            <a:srgbClr val="38BDF8"/>
+          </a:solidFill>
+          <a:ln>
+            <a:noFill/>
+          </a:ln>
+        </p:spPr>
+        <p:style>
+          <a:lnRef idx="1">
+            <a:schemeClr val="accent1"/>
+          </a:lnRef>
+          <a:fillRef idx="3">
+            <a:schemeClr val="accent1"/>
+          </a:fillRef>
+          <a:effectRef idx="2">
+            <a:schemeClr val="accent1"/>
+          </a:effectRef>
+          <a:fontRef idx="minor">
+            <a:schemeClr val="lt1"/>
+          </a:fontRef>
+        </p:style>
+        <p:txBody>
+          <a:bodyPr rtlCol="0" anchor="ctr"/>
+          <a:lstStyle/>
+          <a:p>
+            <a:pPr algn="ctr"/>
+          </a:p>
+        </p:txBody>
+      </p:sp>
+      <p:sp>
+        <p:nvSpPr>
+          <p:cNvPr id="10" name="TextBox 9"/>
+          <p:cNvSpPr txBox="1"/>
+          <p:nvPr/>
+        </p:nvSpPr>
+        <p:spPr>
+          <a:xfrm>
+            <a:off x="745744" y="4011998"/>
+            <a:ext cx="4085332" cy="803436"/>
+          </a:xfrm>
+          <a:prstGeom prst="rect">
+            <a:avLst/>
+          </a:prstGeom>
+          <a:noFill/>
+        </p:spPr>
+        <p:txBody>
+          <a:bodyPr wrap="square" anchor="ctr" lIns="0" tIns="0" rIns="0" bIns="0">
+            <a:spAutoFit/>
+          </a:bodyPr>
+          <a:lstStyle/>
+          <a:p>
+            <a:pPr algn="l">
+              <a:spcAft>
+                <a:spcPts val="180"/>
+              </a:spcAft>
+              <a:buNone/>
+            </a:pPr>
+            <a:r>
+              <a:rPr sz="1120" b="1" i="0" u="none">
+                <a:solidFill>
+                  <a:srgbClr val="F9FAFB"/>
+                </a:solidFill>
+                <a:latin typeface="Calibri"/>
+              </a:rPr>
+              <a:t>SWE.3: Detailed MBD &amp; Code Gen</a:t>
+            </a:r>
+            <a:r>
+              <a:rPr sz="900" b="1" i="0" u="none">
+                <a:solidFill>
+                  <a:srgbClr val="38BDF8"/>
+                </a:solidFill>
+                <a:latin typeface="Calibri"/>
+              </a:rPr>
+              <a:t>   [Simulink / TargetLink]</a:t>
+            </a:r>
+          </a:p>
+          <a:p>
+            <a:pPr algn="l">
+              <a:spcAft>
+                <a:spcPts val="180"/>
+              </a:spcAft>
+              <a:buNone/>
+            </a:pPr>
+            <a:r>
+              <a:rPr sz="990" b="1" i="0" u="none">
+                <a:solidFill>
+                  <a:srgbClr val="F9FAFB"/>
+                </a:solidFill>
+                <a:latin typeface="Calibri"/>
+              </a:rPr>
+              <a:t>Model &amp; Code Assistant:</a:t>
+            </a:r>
+            <a:r>
+              <a:rPr sz="990" b="0" i="0" u="none">
+                <a:solidFill>
+                  <a:srgbClr val="F9FAFB"/>
+                </a:solidFill>
+                <a:latin typeface="Calibri"/>
+              </a:rPr>
+              <a:t> Automated FOC sub-system harness generation, fixed-point scaling optimization, and automated MISRA-C:2012 remediation.</a:t>
+            </a:r>
+          </a:p>
+        </p:txBody>
+      </p:sp>
+      <p:sp>
+        <p:nvSpPr>
+          <p:cNvPr id="11" name="Rounded Rectangle 10"/>
+          <p:cNvSpPr/>
+          <p:nvPr/>
+        </p:nvSpPr>
+        <p:spPr>
+          <a:xfrm>
+            <a:off x="5123684" y="2750745"/>
+            <a:ext cx="1944327" cy="1188720"/>
+          </a:xfrm>
+          <a:prstGeom prst="roundRect">
+            <a:avLst>
+              <a:gd name="adj" fmla="val 4000"/>
+            </a:avLst>
+          </a:prstGeom>
+          <a:solidFill>
+            <a:srgbClr val="222A3B"/>
+          </a:solidFill>
+          <a:ln w="12700">
+            <a:solidFill>
+              <a:srgbClr val="38BDF8"/>
+            </a:solidFill>
+          </a:ln>
+        </p:spPr>
+        <p:style>
+          <a:lnRef idx="1">
+            <a:schemeClr val="accent1"/>
+          </a:lnRef>
+          <a:fillRef idx="3">
+            <a:schemeClr val="accent1"/>
+          </a:fillRef>
+          <a:effectRef idx="2">
+            <a:schemeClr val="accent1"/>
+          </a:effectRef>
+          <a:fontRef idx="minor">
+            <a:schemeClr val="lt1"/>
+          </a:fontRef>
+        </p:style>
+        <p:txBody>
+          <a:bodyPr rtlCol="0" anchor="ctr"/>
+          <a:lstStyle/>
+          <a:p>
+            <a:pPr algn="ctr"/>
+          </a:p>
+        </p:txBody>
+      </p:sp>
+      <p:sp>
+        <p:nvSpPr>
+          <p:cNvPr id="12" name="Rectangle 11"/>
+          <p:cNvSpPr/>
+          <p:nvPr/>
+        </p:nvSpPr>
+        <p:spPr>
+          <a:xfrm>
+            <a:off x="5123684" y="2750745"/>
+            <a:ext cx="50800" cy="1188720"/>
+          </a:xfrm>
+          <a:prstGeom prst="rect">
+            <a:avLst/>
+          </a:prstGeom>
+          <a:solidFill>
+            <a:srgbClr val="38BDF8"/>
+          </a:solidFill>
+          <a:ln>
+            <a:noFill/>
+          </a:ln>
+        </p:spPr>
+        <p:style>
+          <a:lnRef idx="1">
+            <a:schemeClr val="accent1"/>
+          </a:lnRef>
+          <a:fillRef idx="3">
+            <a:schemeClr val="accent1"/>
+          </a:fillRef>
+          <a:effectRef idx="2">
+            <a:schemeClr val="accent1"/>
+          </a:effectRef>
+          <a:fontRef idx="minor">
+            <a:schemeClr val="lt1"/>
+          </a:fontRef>
+        </p:style>
+        <p:txBody>
+          <a:bodyPr rtlCol="0" anchor="ctr"/>
+          <a:lstStyle/>
+          <a:p>
+            <a:pPr algn="ctr"/>
+          </a:p>
+        </p:txBody>
+      </p:sp>
+      <p:sp>
+        <p:nvSpPr>
+          <p:cNvPr id="13" name="TextBox 12"/>
+          <p:cNvSpPr txBox="1"/>
+          <p:nvPr/>
+        </p:nvSpPr>
+        <p:spPr>
+          <a:xfrm>
+            <a:off x="5282502" y="2842185"/>
+            <a:ext cx="1677491" cy="1005840"/>
+          </a:xfrm>
+          <a:prstGeom prst="rect">
+            <a:avLst/>
+          </a:prstGeom>
+          <a:noFill/>
+        </p:spPr>
+        <p:txBody>
+          <a:bodyPr wrap="square" anchor="ctr" lIns="0" tIns="0" rIns="0" bIns="0">
+            <a:spAutoFit/>
+          </a:bodyPr>
+          <a:lstStyle/>
+          <a:p>
+            <a:pPr algn="l">
+              <a:spcAft>
+                <a:spcPts val="200"/>
+              </a:spcAft>
+              <a:buNone/>
+            </a:pPr>
+            <a:r>
+              <a:rPr sz="1250" b="1" i="0" u="none">
+                <a:solidFill>
+                  <a:srgbClr val="F9FAFB"/>
+                </a:solidFill>
+                <a:latin typeface="Calibri"/>
+              </a:rPr>
+              <a:t>⚡ ➔ ⚙️ CLOSED LOOP</a:t>
+            </a:r>
+          </a:p>
+          <a:p>
+            <a:pPr algn="l">
+              <a:spcAft>
+                <a:spcPts val="200"/>
+              </a:spcAft>
+              <a:buNone/>
+            </a:pPr>
+            <a:r>
+              <a:rPr sz="1100" b="1" i="0" u="none">
+                <a:solidFill>
+                  <a:srgbClr val="F9FAFB"/>
+                </a:solidFill>
+                <a:latin typeface="Calibri"/>
+              </a:rPr>
+              <a:t>Continuous Automated Traceability</a:t>
+            </a:r>
+          </a:p>
+        </p:txBody>
+      </p:sp>
+      <p:sp>
+        <p:nvSpPr>
+          <p:cNvPr id="14" name="Rounded Rectangle 13"/>
+          <p:cNvSpPr/>
+          <p:nvPr/>
+        </p:nvSpPr>
+        <p:spPr>
+          <a:xfrm>
+            <a:off x="7214315" y="1783334"/>
+            <a:ext cx="4428740" cy="986316"/>
+          </a:xfrm>
+          <a:prstGeom prst="roundRect">
+            <a:avLst>
+              <a:gd name="adj" fmla="val 4000"/>
+            </a:avLst>
+          </a:prstGeom>
+          <a:solidFill>
+            <a:srgbClr val="222A3B"/>
+          </a:solidFill>
+          <a:ln w="12700">
+            <a:solidFill>
+              <a:srgbClr val="0D9488"/>
+            </a:solidFill>
+          </a:ln>
+        </p:spPr>
+        <p:style>
+          <a:lnRef idx="1">
+            <a:schemeClr val="accent1"/>
+          </a:lnRef>
+          <a:fillRef idx="3">
+            <a:schemeClr val="accent1"/>
+          </a:fillRef>
+          <a:effectRef idx="2">
+            <a:schemeClr val="accent1"/>
+          </a:effectRef>
+          <a:fontRef idx="minor">
+            <a:schemeClr val="lt1"/>
+          </a:fontRef>
+        </p:style>
+        <p:txBody>
+          <a:bodyPr rtlCol="0" anchor="ctr"/>
+          <a:lstStyle/>
+          <a:p>
+            <a:pPr algn="ctr"/>
+          </a:p>
+        </p:txBody>
+      </p:sp>
+      <p:sp>
+        <p:nvSpPr>
+          <p:cNvPr id="15" name="Rectangle 14"/>
+          <p:cNvSpPr/>
+          <p:nvPr/>
+        </p:nvSpPr>
+        <p:spPr>
+          <a:xfrm>
+            <a:off x="7214315" y="1783334"/>
+            <a:ext cx="50800" cy="986316"/>
+          </a:xfrm>
+          <a:prstGeom prst="rect">
+            <a:avLst/>
+          </a:prstGeom>
+          <a:solidFill>
+            <a:srgbClr val="0D9488"/>
+          </a:solidFill>
+          <a:ln>
+            <a:noFill/>
+          </a:ln>
+        </p:spPr>
+        <p:style>
+          <a:lnRef idx="1">
+            <a:schemeClr val="accent1"/>
+          </a:lnRef>
+          <a:fillRef idx="3">
+            <a:schemeClr val="accent1"/>
+          </a:fillRef>
+          <a:effectRef idx="2">
+            <a:schemeClr val="accent1"/>
+          </a:effectRef>
+          <a:fontRef idx="minor">
+            <a:schemeClr val="lt1"/>
+          </a:fontRef>
+        </p:style>
+        <p:txBody>
+          <a:bodyPr rtlCol="0" anchor="ctr"/>
+          <a:lstStyle/>
+          <a:p>
+            <a:pPr algn="ctr"/>
+          </a:p>
+        </p:txBody>
+      </p:sp>
+      <p:sp>
+        <p:nvSpPr>
+          <p:cNvPr id="16" name="TextBox 15"/>
+          <p:cNvSpPr txBox="1"/>
+          <p:nvPr/>
+        </p:nvSpPr>
+        <p:spPr>
+          <a:xfrm>
+            <a:off x="7411419" y="1874774"/>
+            <a:ext cx="4085332" cy="803436"/>
+          </a:xfrm>
+          <a:prstGeom prst="rect">
+            <a:avLst/>
+          </a:prstGeom>
+          <a:noFill/>
+        </p:spPr>
+        <p:txBody>
+          <a:bodyPr wrap="square" anchor="ctr" lIns="0" tIns="0" rIns="0" bIns="0">
+            <a:spAutoFit/>
+          </a:bodyPr>
+          <a:lstStyle/>
+          <a:p>
+            <a:pPr algn="l">
+              <a:spcAft>
+                <a:spcPts val="190"/>
+              </a:spcAft>
+              <a:buNone/>
+            </a:pPr>
+            <a:r>
+              <a:rPr sz="1180" b="1" i="0" u="none">
+                <a:solidFill>
+                  <a:srgbClr val="F9FAFB"/>
+                </a:solidFill>
+                <a:latin typeface="Calibri"/>
+              </a:rPr>
+              <a:t>SWE.4: Unit &amp; Static Verification</a:t>
+            </a:r>
+            <a:r>
+              <a:rPr sz="940" b="1" i="0" u="none">
+                <a:solidFill>
+                  <a:srgbClr val="0D9488"/>
+                </a:solidFill>
+                <a:latin typeface="Calibri"/>
+              </a:rPr>
+              <a:t>   [Polyspace / TPT]</a:t>
+            </a:r>
+          </a:p>
+          <a:p>
+            <a:pPr algn="l">
+              <a:spcAft>
+                <a:spcPts val="190"/>
+              </a:spcAft>
+              <a:buNone/>
+            </a:pPr>
+            <a:r>
+              <a:rPr sz="1030" b="1" i="0" u="none">
+                <a:solidFill>
+                  <a:srgbClr val="F9FAFB"/>
+                </a:solidFill>
+                <a:latin typeface="Calibri"/>
+              </a:rPr>
+              <a:t>Test Vector Synthesizer:</a:t>
+            </a:r>
+            <a:r>
+              <a:rPr sz="1030" b="0" i="0" u="none">
+                <a:solidFill>
+                  <a:srgbClr val="F9FAFB"/>
+                </a:solidFill>
+                <a:latin typeface="Calibri"/>
+              </a:rPr>
+              <a:t> Autonomously generates boundary and equivalence test cases achieving 100% MC/DC coverage for ASIL-D motor safety monitors.</a:t>
+            </a:r>
+          </a:p>
+        </p:txBody>
+      </p:sp>
+      <p:sp>
+        <p:nvSpPr>
+          <p:cNvPr id="17" name="Rounded Rectangle 16"/>
+          <p:cNvSpPr/>
+          <p:nvPr/>
+        </p:nvSpPr>
+        <p:spPr>
+          <a:xfrm>
+            <a:off x="7214315" y="2851946"/>
+            <a:ext cx="4428740" cy="986316"/>
+          </a:xfrm>
+          <a:prstGeom prst="roundRect">
+            <a:avLst>
+              <a:gd name="adj" fmla="val 4000"/>
+            </a:avLst>
+          </a:prstGeom>
+          <a:solidFill>
+            <a:srgbClr val="222A3B"/>
+          </a:solidFill>
+          <a:ln w="12700">
+            <a:solidFill>
+              <a:srgbClr val="0D9488"/>
+            </a:solidFill>
+          </a:ln>
+        </p:spPr>
+        <p:style>
+          <a:lnRef idx="1">
+            <a:schemeClr val="accent1"/>
+          </a:lnRef>
+          <a:fillRef idx="3">
+            <a:schemeClr val="accent1"/>
+          </a:fillRef>
+          <a:effectRef idx="2">
+            <a:schemeClr val="accent1"/>
+          </a:effectRef>
+          <a:fontRef idx="minor">
+            <a:schemeClr val="lt1"/>
+          </a:fontRef>
+        </p:style>
+        <p:txBody>
+          <a:bodyPr rtlCol="0" anchor="ctr"/>
+          <a:lstStyle/>
+          <a:p>
+            <a:pPr algn="ctr"/>
+          </a:p>
+        </p:txBody>
+      </p:sp>
+      <p:sp>
+        <p:nvSpPr>
+          <p:cNvPr id="18" name="Rectangle 17"/>
+          <p:cNvSpPr/>
+          <p:nvPr/>
+        </p:nvSpPr>
+        <p:spPr>
+          <a:xfrm>
+            <a:off x="7214315" y="2851946"/>
+            <a:ext cx="50800" cy="986316"/>
+          </a:xfrm>
+          <a:prstGeom prst="rect">
+            <a:avLst/>
+          </a:prstGeom>
+          <a:solidFill>
+            <a:srgbClr val="0D9488"/>
+          </a:solidFill>
+          <a:ln>
+            <a:noFill/>
+          </a:ln>
+        </p:spPr>
+        <p:style>
+          <a:lnRef idx="1">
+            <a:schemeClr val="accent1"/>
+          </a:lnRef>
+          <a:fillRef idx="3">
+            <a:schemeClr val="accent1"/>
+          </a:fillRef>
+          <a:effectRef idx="2">
+            <a:schemeClr val="accent1"/>
+          </a:effectRef>
+          <a:fontRef idx="minor">
+            <a:schemeClr val="lt1"/>
+          </a:fontRef>
+        </p:style>
+        <p:txBody>
+          <a:bodyPr rtlCol="0" anchor="ctr"/>
+          <a:lstStyle/>
+          <a:p>
+            <a:pPr algn="ctr"/>
+          </a:p>
+        </p:txBody>
+      </p:sp>
+      <p:sp>
+        <p:nvSpPr>
+          <p:cNvPr id="19" name="TextBox 18"/>
+          <p:cNvSpPr txBox="1"/>
+          <p:nvPr/>
+        </p:nvSpPr>
+        <p:spPr>
+          <a:xfrm>
+            <a:off x="7411419" y="2943386"/>
+            <a:ext cx="4085332" cy="803436"/>
+          </a:xfrm>
+          <a:prstGeom prst="rect">
+            <a:avLst/>
+          </a:prstGeom>
+          <a:noFill/>
+        </p:spPr>
+        <p:txBody>
+          <a:bodyPr wrap="square" anchor="ctr" lIns="0" tIns="0" rIns="0" bIns="0">
+            <a:spAutoFit/>
+          </a:bodyPr>
+          <a:lstStyle/>
+          <a:p>
+            <a:pPr algn="l">
+              <a:spcAft>
+                <a:spcPts val="170"/>
+              </a:spcAft>
+              <a:buNone/>
+            </a:pPr>
+            <a:r>
+              <a:rPr sz="1080" b="1" i="0" u="none">
+                <a:solidFill>
+                  <a:srgbClr val="F9FAFB"/>
+                </a:solidFill>
+                <a:latin typeface="Calibri"/>
+              </a:rPr>
+              <a:t>SWE.5: SIL / HIL Integration</a:t>
+            </a:r>
+            <a:r>
+              <a:rPr sz="860" b="1" i="0" u="none">
+                <a:solidFill>
+                  <a:srgbClr val="0D9488"/>
+                </a:solidFill>
+                <a:latin typeface="Calibri"/>
+              </a:rPr>
+              <a:t>   [dSPACE / Vector CANoe]</a:t>
+            </a:r>
+          </a:p>
+          <a:p>
+            <a:pPr algn="l">
+              <a:spcAft>
+                <a:spcPts val="170"/>
+              </a:spcAft>
+              <a:buNone/>
+            </a:pPr>
+            <a:r>
+              <a:rPr sz="950" b="1" i="0" u="none">
+                <a:solidFill>
+                  <a:srgbClr val="F9FAFB"/>
+                </a:solidFill>
+                <a:latin typeface="Calibri"/>
+              </a:rPr>
+              <a:t>HIL Automation Engine:</a:t>
+            </a:r>
+            <a:r>
+              <a:rPr sz="950" b="0" i="0" u="none">
+                <a:solidFill>
+                  <a:srgbClr val="F9FAFB"/>
+                </a:solidFill>
+                <a:latin typeface="Calibri"/>
+              </a:rPr>
+              <a:t> Generates automated CAPL/Python scripts for resolver signal loss, DC bus over-voltage, and inverter bridge shoot-through faults.</a:t>
+            </a:r>
+          </a:p>
+        </p:txBody>
+      </p:sp>
+      <p:sp>
+        <p:nvSpPr>
+          <p:cNvPr id="20" name="Rounded Rectangle 19"/>
+          <p:cNvSpPr/>
+          <p:nvPr/>
+        </p:nvSpPr>
+        <p:spPr>
+          <a:xfrm>
+            <a:off x="7214315" y="3920558"/>
+            <a:ext cx="4428740" cy="986316"/>
+          </a:xfrm>
+          <a:prstGeom prst="roundRect">
+            <a:avLst>
+              <a:gd name="adj" fmla="val 4000"/>
+            </a:avLst>
+          </a:prstGeom>
+          <a:solidFill>
+            <a:srgbClr val="222A3B"/>
+          </a:solidFill>
+          <a:ln w="12700">
+            <a:solidFill>
+              <a:srgbClr val="0D9488"/>
+            </a:solidFill>
+          </a:ln>
+        </p:spPr>
+        <p:style>
+          <a:lnRef idx="1">
+            <a:schemeClr val="accent1"/>
+          </a:lnRef>
+          <a:fillRef idx="3">
+            <a:schemeClr val="accent1"/>
+          </a:fillRef>
+          <a:effectRef idx="2">
+            <a:schemeClr val="accent1"/>
+          </a:effectRef>
+          <a:fontRef idx="minor">
+            <a:schemeClr val="lt1"/>
+          </a:fontRef>
+        </p:style>
+        <p:txBody>
+          <a:bodyPr rtlCol="0" anchor="ctr"/>
+          <a:lstStyle/>
+          <a:p>
+            <a:pPr algn="ctr"/>
+          </a:p>
+        </p:txBody>
+      </p:sp>
+      <p:sp>
+        <p:nvSpPr>
+          <p:cNvPr id="21" name="Rectangle 20"/>
+          <p:cNvSpPr/>
+          <p:nvPr/>
+        </p:nvSpPr>
+        <p:spPr>
+          <a:xfrm>
+            <a:off x="7214315" y="3920558"/>
+            <a:ext cx="50800" cy="986316"/>
+          </a:xfrm>
+          <a:prstGeom prst="rect">
+            <a:avLst/>
+          </a:prstGeom>
+          <a:solidFill>
+            <a:srgbClr val="0D9488"/>
+          </a:solidFill>
+          <a:ln>
+            <a:noFill/>
+          </a:ln>
+        </p:spPr>
+        <p:style>
+          <a:lnRef idx="1">
+            <a:schemeClr val="accent1"/>
+          </a:lnRef>
+          <a:fillRef idx="3">
+            <a:schemeClr val="accent1"/>
+          </a:fillRef>
+          <a:effectRef idx="2">
+            <a:schemeClr val="accent1"/>
+          </a:effectRef>
+          <a:fontRef idx="minor">
+            <a:schemeClr val="lt1"/>
+          </a:fontRef>
+        </p:style>
+        <p:txBody>
+          <a:bodyPr rtlCol="0" anchor="ctr"/>
+          <a:lstStyle/>
+          <a:p>
+            <a:pPr algn="ctr"/>
+          </a:p>
+        </p:txBody>
+      </p:sp>
+      <p:sp>
+        <p:nvSpPr>
+          <p:cNvPr id="22" name="TextBox 21"/>
+          <p:cNvSpPr txBox="1"/>
+          <p:nvPr/>
+        </p:nvSpPr>
+        <p:spPr>
+          <a:xfrm>
+            <a:off x="7411419" y="4011998"/>
+            <a:ext cx="4085332" cy="803436"/>
+          </a:xfrm>
+          <a:prstGeom prst="rect">
+            <a:avLst/>
+          </a:prstGeom>
+          <a:noFill/>
+        </p:spPr>
+        <p:txBody>
+          <a:bodyPr wrap="square" anchor="ctr" lIns="0" tIns="0" rIns="0" bIns="0">
+            <a:spAutoFit/>
+          </a:bodyPr>
+          <a:lstStyle/>
+          <a:p>
+            <a:pPr algn="l">
+              <a:spcAft>
+                <a:spcPts val="170"/>
+              </a:spcAft>
+              <a:buNone/>
+            </a:pPr>
+            <a:r>
+              <a:rPr sz="1080" b="1" i="0" u="none">
+                <a:solidFill>
+                  <a:srgbClr val="F9FAFB"/>
+                </a:solidFill>
+                <a:latin typeface="Calibri"/>
+              </a:rPr>
+              <a:t>SWE.6: Dyno Calibration &amp; Mapping</a:t>
+            </a:r>
+            <a:r>
+              <a:rPr sz="860" b="1" i="0" u="none">
+                <a:solidFill>
+                  <a:srgbClr val="0D9488"/>
+                </a:solidFill>
+                <a:latin typeface="Calibri"/>
+              </a:rPr>
+              <a:t>   [ETAS INCA / CANape]</a:t>
+            </a:r>
+          </a:p>
+          <a:p>
+            <a:pPr algn="l">
+              <a:spcAft>
+                <a:spcPts val="170"/>
+              </a:spcAft>
+              <a:buNone/>
+            </a:pPr>
+            <a:r>
+              <a:rPr sz="950" b="1" i="0" u="none">
+                <a:solidFill>
+                  <a:srgbClr val="F9FAFB"/>
+                </a:solidFill>
+                <a:latin typeface="Calibri"/>
+              </a:rPr>
+              <a:t>Bayesian Calibration Co-Pilot:</a:t>
+            </a:r>
+            <a:r>
+              <a:rPr sz="950" b="0" i="0" u="none">
+                <a:solidFill>
+                  <a:srgbClr val="F9FAFB"/>
+                </a:solidFill>
+                <a:latin typeface="Calibri"/>
+              </a:rPr>
+              <a:t> Active-learning MTPA/MTPV table generator; slashes dyno cell operating hours by 50% via intelligent sweep reduction.</a:t>
+            </a:r>
+          </a:p>
+        </p:txBody>
+      </p:sp>
+      <p:sp>
+        <p:nvSpPr>
+          <p:cNvPr id="23" name="Rounded Rectangle 22"/>
+          <p:cNvSpPr/>
+          <p:nvPr/>
+        </p:nvSpPr>
+        <p:spPr>
+          <a:xfrm>
+            <a:off x="548640" y="5053180"/>
+            <a:ext cx="5464911" cy="1347619"/>
+          </a:xfrm>
+          <a:prstGeom prst="roundRect">
+            <a:avLst>
+              <a:gd name="adj" fmla="val 4000"/>
+            </a:avLst>
+          </a:prstGeom>
+          <a:solidFill>
+            <a:srgbClr val="222A3B"/>
+          </a:solidFill>
+          <a:ln w="12700">
+            <a:solidFill>
+              <a:srgbClr val="EF4444"/>
+            </a:solidFill>
+          </a:ln>
+        </p:spPr>
+        <p:style>
+          <a:lnRef idx="1">
+            <a:schemeClr val="accent1"/>
+          </a:lnRef>
+          <a:fillRef idx="3">
+            <a:schemeClr val="accent1"/>
+          </a:fillRef>
+          <a:effectRef idx="2">
+            <a:schemeClr val="accent1"/>
+          </a:effectRef>
+          <a:fontRef idx="minor">
+            <a:schemeClr val="lt1"/>
+          </a:fontRef>
+        </p:style>
+        <p:txBody>
+          <a:bodyPr rtlCol="0" anchor="ctr"/>
+          <a:lstStyle/>
+          <a:p>
+            <a:pPr algn="ctr"/>
+          </a:p>
+        </p:txBody>
+      </p:sp>
+      <p:sp>
+        <p:nvSpPr>
+          <p:cNvPr id="24" name="Rectangle 23"/>
+          <p:cNvSpPr/>
+          <p:nvPr/>
+        </p:nvSpPr>
+        <p:spPr>
+          <a:xfrm>
+            <a:off x="548640" y="5053180"/>
+            <a:ext cx="5464911" cy="50800"/>
+          </a:xfrm>
+          <a:prstGeom prst="rect">
+            <a:avLst/>
+          </a:prstGeom>
+          <a:solidFill>
+            <a:srgbClr val="EF4444"/>
+          </a:solidFill>
+          <a:ln>
+            <a:noFill/>
+          </a:ln>
+        </p:spPr>
+        <p:style>
+          <a:lnRef idx="1">
+            <a:schemeClr val="accent1"/>
+          </a:lnRef>
+          <a:fillRef idx="3">
+            <a:schemeClr val="accent1"/>
+          </a:fillRef>
+          <a:effectRef idx="2">
+            <a:schemeClr val="accent1"/>
+          </a:effectRef>
+          <a:fontRef idx="minor">
+            <a:schemeClr val="lt1"/>
+          </a:fontRef>
+        </p:style>
+        <p:txBody>
+          <a:bodyPr rtlCol="0" anchor="ctr"/>
+          <a:lstStyle/>
+          <a:p>
+            <a:pPr algn="ctr"/>
+          </a:p>
+        </p:txBody>
+      </p:sp>
+      <p:sp>
+        <p:nvSpPr>
+          <p:cNvPr id="25" name="TextBox 24"/>
+          <p:cNvSpPr txBox="1"/>
+          <p:nvPr/>
+        </p:nvSpPr>
+        <p:spPr>
+          <a:xfrm>
+            <a:off x="683401" y="5238741"/>
+            <a:ext cx="5195389" cy="1027297"/>
+          </a:xfrm>
+          <a:prstGeom prst="rect">
+            <a:avLst/>
+          </a:prstGeom>
+          <a:noFill/>
+        </p:spPr>
+        <p:txBody>
+          <a:bodyPr wrap="square" anchor="t" lIns="0" tIns="0" rIns="0" bIns="0">
+            <a:spAutoFit/>
+          </a:bodyPr>
+          <a:lstStyle/>
+          <a:p>
+            <a:pPr algn="l">
+              <a:spcAft>
+                <a:spcPts val="300"/>
+              </a:spcAft>
+              <a:buNone/>
+            </a:pPr>
+            <a:r>
+              <a:rPr sz="1439" b="1" i="0" u="none">
+                <a:solidFill>
+                  <a:srgbClr val="EF4444"/>
+                </a:solidFill>
+                <a:latin typeface="Calibri"/>
+              </a:rPr>
+              <a:t>Traditional Manual Bottleneck:</a:t>
+            </a:r>
+          </a:p>
+          <a:p>
+            <a:pPr algn="l">
+              <a:spcAft>
+                <a:spcPts val="300"/>
+              </a:spcAft>
+              <a:buNone/>
+            </a:pPr>
+            <a:r>
+              <a:rPr sz="1150" b="0" i="0" u="none">
+                <a:solidFill>
+                  <a:srgbClr val="F9FAFB"/>
+                </a:solidFill>
+                <a:latin typeface="Calibri"/>
+              </a:rPr>
+              <a:t>Manual test script authoring, repetitive regression debug in gigabyte CAN trace logs, and weeks of tedious test bench sweep tuning.</a:t>
+            </a:r>
+          </a:p>
+        </p:txBody>
+      </p:sp>
+      <p:sp>
+        <p:nvSpPr>
+          <p:cNvPr id="26" name="Rounded Rectangle 25"/>
+          <p:cNvSpPr/>
+          <p:nvPr/>
+        </p:nvSpPr>
+        <p:spPr>
+          <a:xfrm>
+            <a:off x="6178143" y="5053180"/>
+            <a:ext cx="5464911" cy="1347619"/>
+          </a:xfrm>
+          <a:prstGeom prst="roundRect">
+            <a:avLst>
+              <a:gd name="adj" fmla="val 4000"/>
+            </a:avLst>
+          </a:prstGeom>
+          <a:solidFill>
+            <a:srgbClr val="222A3B"/>
+          </a:solidFill>
+          <a:ln w="12700">
+            <a:solidFill>
+              <a:srgbClr val="0D9488"/>
+            </a:solidFill>
+          </a:ln>
+        </p:spPr>
+        <p:style>
+          <a:lnRef idx="1">
+            <a:schemeClr val="accent1"/>
+          </a:lnRef>
+          <a:fillRef idx="3">
+            <a:schemeClr val="accent1"/>
+          </a:fillRef>
+          <a:effectRef idx="2">
+            <a:schemeClr val="accent1"/>
+          </a:effectRef>
+          <a:fontRef idx="minor">
+            <a:schemeClr val="lt1"/>
+          </a:fontRef>
+        </p:style>
+        <p:txBody>
+          <a:bodyPr rtlCol="0" anchor="ctr"/>
+          <a:lstStyle/>
+          <a:p>
+            <a:pPr algn="ctr"/>
+          </a:p>
+        </p:txBody>
+      </p:sp>
+      <p:sp>
+        <p:nvSpPr>
+          <p:cNvPr id="27" name="Rectangle 26"/>
+          <p:cNvSpPr/>
+          <p:nvPr/>
+        </p:nvSpPr>
+        <p:spPr>
+          <a:xfrm>
+            <a:off x="6178143" y="5053180"/>
+            <a:ext cx="5464911" cy="50800"/>
+          </a:xfrm>
+          <a:prstGeom prst="rect">
+            <a:avLst/>
+          </a:prstGeom>
+          <a:solidFill>
+            <a:srgbClr val="0D9488"/>
+          </a:solidFill>
+          <a:ln>
+            <a:noFill/>
+          </a:ln>
+        </p:spPr>
+        <p:style>
+          <a:lnRef idx="1">
+            <a:schemeClr val="accent1"/>
+          </a:lnRef>
+          <a:fillRef idx="3">
+            <a:schemeClr val="accent1"/>
+          </a:fillRef>
+          <a:effectRef idx="2">
+            <a:schemeClr val="accent1"/>
+          </a:effectRef>
+          <a:fontRef idx="minor">
+            <a:schemeClr val="lt1"/>
+          </a:fontRef>
+        </p:style>
+        <p:txBody>
+          <a:bodyPr rtlCol="0" anchor="ctr"/>
+          <a:lstStyle/>
+          <a:p>
+            <a:pPr algn="ctr"/>
+          </a:p>
+        </p:txBody>
+      </p:sp>
+      <p:sp>
+        <p:nvSpPr>
+          <p:cNvPr id="28" name="TextBox 27"/>
+          <p:cNvSpPr txBox="1"/>
+          <p:nvPr/>
+        </p:nvSpPr>
+        <p:spPr>
+          <a:xfrm>
+            <a:off x="6312904" y="5238741"/>
+            <a:ext cx="5195389" cy="1027297"/>
+          </a:xfrm>
+          <a:prstGeom prst="rect">
+            <a:avLst/>
+          </a:prstGeom>
+          <a:noFill/>
+        </p:spPr>
+        <p:txBody>
+          <a:bodyPr wrap="square" anchor="t" lIns="0" tIns="0" rIns="0" bIns="0">
+            <a:spAutoFit/>
+          </a:bodyPr>
+          <a:lstStyle/>
+          <a:p>
+            <a:pPr algn="l">
+              <a:spcAft>
+                <a:spcPts val="300"/>
+              </a:spcAft>
+              <a:buNone/>
+            </a:pPr>
+            <a:r>
+              <a:rPr sz="1439" b="1" i="0" u="none">
+                <a:solidFill>
+                  <a:srgbClr val="0D9488"/>
+                </a:solidFill>
+                <a:latin typeface="Calibri"/>
+              </a:rPr>
+              <a:t>AI-Accelerated Engineering:</a:t>
+            </a:r>
+          </a:p>
+          <a:p>
+            <a:pPr algn="l">
+              <a:spcAft>
+                <a:spcPts val="300"/>
+              </a:spcAft>
+              <a:buNone/>
+            </a:pPr>
+            <a:r>
+              <a:rPr sz="1150" b="0" i="0" u="none">
+                <a:solidFill>
+                  <a:srgbClr val="F9FAFB"/>
+                </a:solidFill>
+                <a:latin typeface="Calibri"/>
+              </a:rPr>
+              <a:t>Automated test synthesis, 10-second MDF4 log root-cause analysis, and optimal dyno sampling points calculated autonomously.</a:t>
+            </a:r>
+          </a:p>
+        </p:txBody>
+      </p:sp>
+      <p:sp>
+        <p:nvSpPr>
+          <p:cNvPr id="29" name="TextBox 28"/>
+          <p:cNvSpPr txBox="1"/>
+          <p:nvPr/>
+        </p:nvSpPr>
+        <p:spPr>
+          <a:xfrm>
+            <a:off x="548640" y="411480"/>
+            <a:ext cx="11094415" cy="1248410"/>
+          </a:xfrm>
+          <a:prstGeom prst="rect">
+            <a:avLst/>
+          </a:prstGeom>
+          <a:noFill/>
+        </p:spPr>
+        <p:txBody>
+          <a:bodyPr wrap="square" anchor="t" lIns="0" tIns="0" rIns="0" bIns="0">
+            <a:spAutoFit/>
+          </a:bodyPr>
+          <a:lstStyle/>
+          <a:p>
+            <a:pPr algn="l">
+              <a:spcAft>
+                <a:spcPts val="200"/>
+              </a:spcAft>
+              <a:buNone/>
+            </a:pPr>
+            <a:r>
+              <a:rPr sz="1100" b="1" i="0" u="none">
+                <a:solidFill>
+                  <a:srgbClr val="38BDF8"/>
+                </a:solidFill>
+                <a:latin typeface="Calibri"/>
+              </a:rPr>
+              <a:t>• END-TO-END V-MODEL TRANSFORMATION · ASPICE SWE.1 TO SWE.6</a:t>
+            </a:r>
+          </a:p>
+          <a:p>
+            <a:pPr algn="l">
+              <a:buNone/>
+            </a:pPr>
+            <a:r>
+              <a:rPr sz="2400" b="1" i="0" u="none">
+                <a:solidFill>
+                  <a:srgbClr val="F9FAFB"/>
+                </a:solidFill>
+                <a:latin typeface="Calibri"/>
+              </a:rPr>
+              <a:t>AI Across the Motor ECU V-Development Cycle</a:t>
+            </a:r>
+          </a:p>
+          <a:p>
+            <a:pPr algn="l">
+              <a:spcBef>
+                <a:spcPts val="300"/>
+              </a:spcBef>
+              <a:buNone/>
+            </a:pPr>
+            <a:r>
+              <a:rPr sz="1250" b="0" i="0" u="none">
+                <a:solidFill>
+                  <a:srgbClr val="9CA3AF"/>
+                </a:solidFill>
+                <a:latin typeface="Calibri"/>
+              </a:rPr>
+              <a:t>Automating time-sink manual tasks from requirements decomposition down to dyno calibration while preserving full engineering control and safety integrity.</a:t>
+            </a:r>
+          </a:p>
+        </p:txBody>
+      </p:sp>
+      <p:sp>
+        <p:nvSpPr>
+          <p:cNvPr id="30" name="Rectangle 29"/>
+          <p:cNvSpPr/>
+          <p:nvPr/>
+        </p:nvSpPr>
+        <p:spPr>
+          <a:xfrm>
+            <a:off x="548640" y="1672590"/>
+            <a:ext cx="2286000" cy="38100"/>
+          </a:xfrm>
+          <a:prstGeom prst="rect">
+            <a:avLst/>
+          </a:prstGeom>
+          <a:solidFill>
+            <a:srgbClr val="38BDF8"/>
+          </a:solidFill>
+          <a:ln>
+            <a:noFill/>
+          </a:ln>
+        </p:spPr>
+        <p:style>
+          <a:lnRef idx="1">
+            <a:schemeClr val="accent1"/>
+          </a:lnRef>
+          <a:fillRef idx="3">
+            <a:schemeClr val="accent1"/>
+          </a:fillRef>
+          <a:effectRef idx="2">
+            <a:schemeClr val="accent1"/>
+          </a:effectRef>
+          <a:fontRef idx="minor">
+            <a:schemeClr val="lt1"/>
+          </a:fontRef>
+        </p:style>
+        <p:txBody>
+          <a:bodyPr rtlCol="0" anchor="ctr"/>
+          <a:lstStyle/>
+          <a:p>
+            <a:pPr algn="ctr"/>
+          </a:p>
+        </p:txBody>
+      </p:sp>
+      <p:sp>
+        <p:nvSpPr>
+          <p:cNvPr id="31" name="TextBox 30"/>
+          <p:cNvSpPr txBox="1"/>
+          <p:nvPr/>
+        </p:nvSpPr>
+        <p:spPr>
+          <a:xfrm>
+            <a:off x="548640" y="6437376"/>
+            <a:ext cx="9539935" cy="256032"/>
+          </a:xfrm>
+          <a:prstGeom prst="rect">
+            <a:avLst/>
+          </a:prstGeom>
+          <a:noFill/>
+        </p:spPr>
+        <p:txBody>
+          <a:bodyPr wrap="square" anchor="ctr" lIns="0" tIns="0" rIns="0" bIns="0">
+            <a:spAutoFit/>
+          </a:bodyPr>
+          <a:lstStyle/>
+          <a:p>
+            <a:pPr algn="l">
+              <a:buNone/>
+            </a:pPr>
+            <a:r>
+              <a:rPr sz="950" b="0" i="0" u="none">
+                <a:solidFill>
+                  <a:srgbClr val="9CA3AF"/>
+                </a:solidFill>
+                <a:latin typeface="Calibri"/>
+              </a:rPr>
+              <a:t>ASPICE Level 3 &amp; ISO 26262 ASIL-D Process Aligned</a:t>
+            </a:r>
+          </a:p>
+        </p:txBody>
+      </p:sp>
+      <p:sp>
+        <p:nvSpPr>
+          <p:cNvPr id="32" name="TextBox 31"/>
+          <p:cNvSpPr txBox="1"/>
+          <p:nvPr/>
+        </p:nvSpPr>
+        <p:spPr>
+          <a:xfrm>
+            <a:off x="10271455" y="6437376"/>
+            <a:ext cx="1371600" cy="256032"/>
+          </a:xfrm>
+          <a:prstGeom prst="rect">
+            <a:avLst/>
+          </a:prstGeom>
+          <a:noFill/>
+        </p:spPr>
+        <p:txBody>
+          <a:bodyPr wrap="square" anchor="ctr" lIns="0" tIns="0" rIns="0" bIns="0">
+            <a:spAutoFit/>
+          </a:bodyPr>
+          <a:lstStyle/>
+          <a:p>
             <a:pPr algn="r">
               <a:buNone/>
             </a:pPr>
             <a:r>
-              <a:rPr sz="1100" b="0" i="0" u="none">
+              <a:rPr sz="950" b="0" i="0" u="none">
                 <a:solidFill>
                   <a:srgbClr val="9CA3AF"/>
                 </a:solidFill>
@@ -4865,77 +6930,27 @@
       <p:grpSpPr/>
       <p:sp>
         <p:nvSpPr>
-          <p:cNvPr id="2" name="TextBox 1"/>
-          <p:cNvSpPr txBox="1"/>
-          <p:nvPr/>
-        </p:nvSpPr>
-        <p:spPr>
-          <a:xfrm>
-            <a:off x="822960" y="548640"/>
-            <a:ext cx="10545775" cy="1097280"/>
-          </a:xfrm>
-          <a:prstGeom prst="rect">
-            <a:avLst/>
-          </a:prstGeom>
-          <a:noFill/>
-        </p:spPr>
-        <p:txBody>
-          <a:bodyPr wrap="square" lIns="0" tIns="0" rIns="0" bIns="0">
-            <a:spAutoFit/>
-          </a:bodyPr>
-          <a:lstStyle/>
-          <a:p>
-            <a:pPr algn="ctr">
-              <a:buNone/>
-            </a:pPr>
-            <a:r>
-              <a:rPr sz="3000" b="1" i="0" u="none">
-                <a:solidFill>
-                  <a:srgbClr val="F9FAFB"/>
-                </a:solidFill>
-                <a:latin typeface="Calibri"/>
-              </a:rPr>
-              <a:t>AI Across the Motor ECU V-Development Cycle</a:t>
-            </a:r>
-          </a:p>
-          <a:p>
-            <a:pPr algn="ctr">
-              <a:spcBef>
-                <a:spcPts val="400"/>
-              </a:spcBef>
-              <a:buNone/>
-            </a:pPr>
-            <a:r>
-              <a:rPr sz="1800" b="0" i="0" u="none">
-                <a:solidFill>
-                  <a:srgbClr val="9CA3AF"/>
-                </a:solidFill>
-                <a:latin typeface="Calibri"/>
-              </a:rPr>
-              <a:t>Automating time-sink manual tasks from requirements decomposition down to dyno calibration while preserving full engineering control and safety integrity.</a:t>
-            </a:r>
-          </a:p>
-        </p:txBody>
-      </p:sp>
-      <p:sp>
-        <p:nvSpPr>
-          <p:cNvPr id="3" name="Rectangle 2"/>
+          <p:cNvPr id="2" name="Rounded Rectangle 1"/>
           <p:cNvSpPr/>
           <p:nvPr/>
         </p:nvSpPr>
         <p:spPr>
           <a:xfrm>
-            <a:off x="822960" y="1645920"/>
-            <a:ext cx="10545775" cy="12700"/>
-          </a:xfrm>
-          <a:prstGeom prst="rect">
-            <a:avLst/>
+            <a:off x="548640" y="1783334"/>
+            <a:ext cx="5464911" cy="1680692"/>
+          </a:xfrm>
+          <a:prstGeom prst="roundRect">
+            <a:avLst>
+              <a:gd name="adj" fmla="val 4000"/>
+            </a:avLst>
           </a:prstGeom>
           <a:solidFill>
-            <a:srgbClr val="3F4555"/>
+            <a:srgbClr val="222A3B"/>
           </a:solidFill>
-          <a:ln>
-            <a:noFill/>
+          <a:ln w="12700">
+            <a:solidFill>
+              <a:srgbClr val="0D9488"/>
+            </a:solidFill>
           </a:ln>
         </p:spPr>
         <p:style>
@@ -4962,14 +6977,57 @@
       </p:sp>
       <p:sp>
         <p:nvSpPr>
+          <p:cNvPr id="3" name="Rectangle 2"/>
+          <p:cNvSpPr/>
+          <p:nvPr/>
+        </p:nvSpPr>
+        <p:spPr>
+          <a:xfrm>
+            <a:off x="548640" y="1783334"/>
+            <a:ext cx="5464911" cy="50800"/>
+          </a:xfrm>
+          <a:prstGeom prst="rect">
+            <a:avLst/>
+          </a:prstGeom>
+          <a:solidFill>
+            <a:srgbClr val="0D9488"/>
+          </a:solidFill>
+          <a:ln>
+            <a:noFill/>
+          </a:ln>
+        </p:spPr>
+        <p:style>
+          <a:lnRef idx="1">
+            <a:schemeClr val="accent1"/>
+          </a:lnRef>
+          <a:fillRef idx="3">
+            <a:schemeClr val="accent1"/>
+          </a:fillRef>
+          <a:effectRef idx="2">
+            <a:schemeClr val="accent1"/>
+          </a:effectRef>
+          <a:fontRef idx="minor">
+            <a:schemeClr val="lt1"/>
+          </a:fontRef>
+        </p:style>
+        <p:txBody>
+          <a:bodyPr rtlCol="0" anchor="ctr"/>
+          <a:lstStyle/>
+          <a:p>
+            <a:pPr algn="ctr"/>
+          </a:p>
+        </p:txBody>
+      </p:sp>
+      <p:sp>
+        <p:nvSpPr>
           <p:cNvPr id="4" name="TextBox 3"/>
           <p:cNvSpPr txBox="1"/>
           <p:nvPr/>
         </p:nvSpPr>
         <p:spPr>
           <a:xfrm>
-            <a:off x="9997135" y="6629400"/>
-            <a:ext cx="1371600" cy="274320"/>
+            <a:off x="713232" y="1998726"/>
+            <a:ext cx="5135727" cy="1300708"/>
           </a:xfrm>
           <a:prstGeom prst="rect">
             <a:avLst/>
@@ -4977,16 +7035,898 @@
           <a:noFill/>
         </p:spPr>
         <p:txBody>
-          <a:bodyPr wrap="square" lIns="0" tIns="0" rIns="0" bIns="0">
+          <a:bodyPr wrap="square" anchor="t" lIns="0" tIns="0" rIns="0" bIns="0">
             <a:spAutoFit/>
           </a:bodyPr>
           <a:lstStyle/>
           <a:p>
+            <a:pPr algn="l">
+              <a:spcAft>
+                <a:spcPts val="200"/>
+              </a:spcAft>
+              <a:buNone/>
+            </a:pPr>
+            <a:r>
+              <a:rPr sz="1000" b="1" i="0" u="none">
+                <a:solidFill>
+                  <a:srgbClr val="0D9488"/>
+                </a:solidFill>
+                <a:latin typeface="Calibri"/>
+              </a:rPr>
+              <a:t>• 🔒 PILLAR 1 · SOVEREIGN HOSTING</a:t>
+            </a:r>
+          </a:p>
+          <a:p>
+            <a:pPr algn="l">
+              <a:spcAft>
+                <a:spcPts val="300"/>
+              </a:spcAft>
+              <a:buNone/>
+            </a:pPr>
+            <a:r>
+              <a:rPr sz="1439" b="1" i="0" u="none">
+                <a:solidFill>
+                  <a:srgbClr val="F9FAFB"/>
+                </a:solidFill>
+                <a:latin typeface="Calibri"/>
+              </a:rPr>
+              <a:t>100% Air-Gapped / On-Premise VPC</a:t>
+            </a:r>
+          </a:p>
+          <a:p>
+            <a:pPr algn="l">
+              <a:spcAft>
+                <a:spcPts val="300"/>
+              </a:spcAft>
+              <a:buNone/>
+            </a:pPr>
+            <a:r>
+              <a:rPr sz="1150" b="0" i="0" u="none">
+                <a:solidFill>
+                  <a:srgbClr val="F9FAFB"/>
+                </a:solidFill>
+                <a:latin typeface="Calibri"/>
+              </a:rPr>
+              <a:t>Deployed completely behind your corporate firewall on customer-owned infrastructure (NVIDIA DGX, private server racks, or dedicated sovereign cloud enclaves). </a:t>
+            </a:r>
+            <a:r>
+              <a:rPr sz="1150" b="1" i="0" u="none">
+                <a:solidFill>
+                  <a:srgbClr val="F9FAFB"/>
+                </a:solidFill>
+                <a:latin typeface="Calibri"/>
+              </a:rPr>
+              <a:t>Zero telemetry, zero external API calls, and zero external network dependencies.</a:t>
+            </a:r>
+          </a:p>
+        </p:txBody>
+      </p:sp>
+      <p:sp>
+        <p:nvSpPr>
+          <p:cNvPr id="5" name="Rounded Rectangle 4"/>
+          <p:cNvSpPr/>
+          <p:nvPr/>
+        </p:nvSpPr>
+        <p:spPr>
+          <a:xfrm>
+            <a:off x="6178143" y="1783334"/>
+            <a:ext cx="5464911" cy="1680692"/>
+          </a:xfrm>
+          <a:prstGeom prst="roundRect">
+            <a:avLst>
+              <a:gd name="adj" fmla="val 4000"/>
+            </a:avLst>
+          </a:prstGeom>
+          <a:solidFill>
+            <a:srgbClr val="222A3B"/>
+          </a:solidFill>
+          <a:ln w="12700">
+            <a:solidFill>
+              <a:srgbClr val="0D9488"/>
+            </a:solidFill>
+          </a:ln>
+        </p:spPr>
+        <p:style>
+          <a:lnRef idx="1">
+            <a:schemeClr val="accent1"/>
+          </a:lnRef>
+          <a:fillRef idx="3">
+            <a:schemeClr val="accent1"/>
+          </a:fillRef>
+          <a:effectRef idx="2">
+            <a:schemeClr val="accent1"/>
+          </a:effectRef>
+          <a:fontRef idx="minor">
+            <a:schemeClr val="lt1"/>
+          </a:fontRef>
+        </p:style>
+        <p:txBody>
+          <a:bodyPr rtlCol="0" anchor="ctr"/>
+          <a:lstStyle/>
+          <a:p>
+            <a:pPr algn="ctr"/>
+          </a:p>
+        </p:txBody>
+      </p:sp>
+      <p:sp>
+        <p:nvSpPr>
+          <p:cNvPr id="6" name="Rectangle 5"/>
+          <p:cNvSpPr/>
+          <p:nvPr/>
+        </p:nvSpPr>
+        <p:spPr>
+          <a:xfrm>
+            <a:off x="6178143" y="1783334"/>
+            <a:ext cx="5464911" cy="50800"/>
+          </a:xfrm>
+          <a:prstGeom prst="rect">
+            <a:avLst/>
+          </a:prstGeom>
+          <a:solidFill>
+            <a:srgbClr val="0D9488"/>
+          </a:solidFill>
+          <a:ln>
+            <a:noFill/>
+          </a:ln>
+        </p:spPr>
+        <p:style>
+          <a:lnRef idx="1">
+            <a:schemeClr val="accent1"/>
+          </a:lnRef>
+          <a:fillRef idx="3">
+            <a:schemeClr val="accent1"/>
+          </a:fillRef>
+          <a:effectRef idx="2">
+            <a:schemeClr val="accent1"/>
+          </a:effectRef>
+          <a:fontRef idx="minor">
+            <a:schemeClr val="lt1"/>
+          </a:fontRef>
+        </p:style>
+        <p:txBody>
+          <a:bodyPr rtlCol="0" anchor="ctr"/>
+          <a:lstStyle/>
+          <a:p>
+            <a:pPr algn="ctr"/>
+          </a:p>
+        </p:txBody>
+      </p:sp>
+      <p:sp>
+        <p:nvSpPr>
+          <p:cNvPr id="7" name="TextBox 6"/>
+          <p:cNvSpPr txBox="1"/>
+          <p:nvPr/>
+        </p:nvSpPr>
+        <p:spPr>
+          <a:xfrm>
+            <a:off x="6342735" y="1998726"/>
+            <a:ext cx="5135727" cy="1300708"/>
+          </a:xfrm>
+          <a:prstGeom prst="rect">
+            <a:avLst/>
+          </a:prstGeom>
+          <a:noFill/>
+        </p:spPr>
+        <p:txBody>
+          <a:bodyPr wrap="square" anchor="t" lIns="0" tIns="0" rIns="0" bIns="0">
+            <a:spAutoFit/>
+          </a:bodyPr>
+          <a:lstStyle/>
+          <a:p>
+            <a:pPr algn="l">
+              <a:spcAft>
+                <a:spcPts val="200"/>
+              </a:spcAft>
+              <a:buNone/>
+            </a:pPr>
+            <a:r>
+              <a:rPr sz="1000" b="1" i="0" u="none">
+                <a:solidFill>
+                  <a:srgbClr val="0D9488"/>
+                </a:solidFill>
+                <a:latin typeface="Calibri"/>
+              </a:rPr>
+              <a:t>• 🛡️ PILLAR 2 · INTELLECTUAL PROPERTY RIGHTS</a:t>
+            </a:r>
+          </a:p>
+          <a:p>
+            <a:pPr algn="l">
+              <a:spcAft>
+                <a:spcPts val="300"/>
+              </a:spcAft>
+              <a:buNone/>
+            </a:pPr>
+            <a:r>
+              <a:rPr sz="1439" b="1" i="0" u="none">
+                <a:solidFill>
+                  <a:srgbClr val="F9FAFB"/>
+                </a:solidFill>
+                <a:latin typeface="Calibri"/>
+              </a:rPr>
+              <a:t>Zero Data Retention &amp; No Retraining</a:t>
+            </a:r>
+          </a:p>
+          <a:p>
+            <a:pPr algn="l">
+              <a:spcAft>
+                <a:spcPts val="300"/>
+              </a:spcAft>
+              <a:buNone/>
+            </a:pPr>
+            <a:r>
+              <a:rPr sz="1150" b="0" i="0" u="none">
+                <a:solidFill>
+                  <a:srgbClr val="F9FAFB"/>
+                </a:solidFill>
+                <a:latin typeface="Calibri"/>
+              </a:rPr>
+              <a:t>Your proprietary motor control models, Simulink diagrams, C source code, and calibration A2L files are never used to train base foundation models. Ephemeral session memory is securely wiped following execution.</a:t>
+            </a:r>
+          </a:p>
+        </p:txBody>
+      </p:sp>
+      <p:sp>
+        <p:nvSpPr>
+          <p:cNvPr id="8" name="Rounded Rectangle 7"/>
+          <p:cNvSpPr/>
+          <p:nvPr/>
+        </p:nvSpPr>
+        <p:spPr>
+          <a:xfrm>
+            <a:off x="548640" y="3628618"/>
+            <a:ext cx="5464911" cy="1680692"/>
+          </a:xfrm>
+          <a:prstGeom prst="roundRect">
+            <a:avLst>
+              <a:gd name="adj" fmla="val 4000"/>
+            </a:avLst>
+          </a:prstGeom>
+          <a:solidFill>
+            <a:srgbClr val="222A3B"/>
+          </a:solidFill>
+          <a:ln w="12700">
+            <a:solidFill>
+              <a:srgbClr val="0D9488"/>
+            </a:solidFill>
+          </a:ln>
+        </p:spPr>
+        <p:style>
+          <a:lnRef idx="1">
+            <a:schemeClr val="accent1"/>
+          </a:lnRef>
+          <a:fillRef idx="3">
+            <a:schemeClr val="accent1"/>
+          </a:fillRef>
+          <a:effectRef idx="2">
+            <a:schemeClr val="accent1"/>
+          </a:effectRef>
+          <a:fontRef idx="minor">
+            <a:schemeClr val="lt1"/>
+          </a:fontRef>
+        </p:style>
+        <p:txBody>
+          <a:bodyPr rtlCol="0" anchor="ctr"/>
+          <a:lstStyle/>
+          <a:p>
+            <a:pPr algn="ctr"/>
+          </a:p>
+        </p:txBody>
+      </p:sp>
+      <p:sp>
+        <p:nvSpPr>
+          <p:cNvPr id="9" name="Rectangle 8"/>
+          <p:cNvSpPr/>
+          <p:nvPr/>
+        </p:nvSpPr>
+        <p:spPr>
+          <a:xfrm>
+            <a:off x="548640" y="3628618"/>
+            <a:ext cx="5464911" cy="50800"/>
+          </a:xfrm>
+          <a:prstGeom prst="rect">
+            <a:avLst/>
+          </a:prstGeom>
+          <a:solidFill>
+            <a:srgbClr val="0D9488"/>
+          </a:solidFill>
+          <a:ln>
+            <a:noFill/>
+          </a:ln>
+        </p:spPr>
+        <p:style>
+          <a:lnRef idx="1">
+            <a:schemeClr val="accent1"/>
+          </a:lnRef>
+          <a:fillRef idx="3">
+            <a:schemeClr val="accent1"/>
+          </a:fillRef>
+          <a:effectRef idx="2">
+            <a:schemeClr val="accent1"/>
+          </a:effectRef>
+          <a:fontRef idx="minor">
+            <a:schemeClr val="lt1"/>
+          </a:fontRef>
+        </p:style>
+        <p:txBody>
+          <a:bodyPr rtlCol="0" anchor="ctr"/>
+          <a:lstStyle/>
+          <a:p>
+            <a:pPr algn="ctr"/>
+          </a:p>
+        </p:txBody>
+      </p:sp>
+      <p:sp>
+        <p:nvSpPr>
+          <p:cNvPr id="10" name="TextBox 9"/>
+          <p:cNvSpPr txBox="1"/>
+          <p:nvPr/>
+        </p:nvSpPr>
+        <p:spPr>
+          <a:xfrm>
+            <a:off x="713232" y="3844010"/>
+            <a:ext cx="5135727" cy="1300708"/>
+          </a:xfrm>
+          <a:prstGeom prst="rect">
+            <a:avLst/>
+          </a:prstGeom>
+          <a:noFill/>
+        </p:spPr>
+        <p:txBody>
+          <a:bodyPr wrap="square" anchor="t" lIns="0" tIns="0" rIns="0" bIns="0">
+            <a:spAutoFit/>
+          </a:bodyPr>
+          <a:lstStyle/>
+          <a:p>
+            <a:pPr algn="l">
+              <a:spcAft>
+                <a:spcPts val="200"/>
+              </a:spcAft>
+              <a:buNone/>
+            </a:pPr>
+            <a:r>
+              <a:rPr sz="1000" b="1" i="0" u="none">
+                <a:solidFill>
+                  <a:srgbClr val="0D9488"/>
+                </a:solidFill>
+                <a:latin typeface="Calibri"/>
+              </a:rPr>
+              <a:t>• ⚡ PILLAR 3 · COMPLIANCE STANDARD</a:t>
+            </a:r>
+          </a:p>
+          <a:p>
+            <a:pPr algn="l">
+              <a:spcAft>
+                <a:spcPts val="300"/>
+              </a:spcAft>
+              <a:buNone/>
+            </a:pPr>
+            <a:r>
+              <a:rPr sz="1439" b="1" i="0" u="none">
+                <a:solidFill>
+                  <a:srgbClr val="F9FAFB"/>
+                </a:solidFill>
+                <a:latin typeface="Calibri"/>
+              </a:rPr>
+              <a:t>TISAX Level 3 &amp; ISO/SAE 21434 Certified</a:t>
+            </a:r>
+          </a:p>
+          <a:p>
+            <a:pPr algn="l">
+              <a:spcAft>
+                <a:spcPts val="300"/>
+              </a:spcAft>
+              <a:buNone/>
+            </a:pPr>
+            <a:r>
+              <a:rPr sz="1150" b="0" i="0" u="none">
+                <a:solidFill>
+                  <a:srgbClr val="F9FAFB"/>
+                </a:solidFill>
+                <a:latin typeface="Calibri"/>
+              </a:rPr>
+              <a:t>Built to conform strictly with automotive cybersecurity standards (ISO/SAE 21434) and European automotive supplier information security (TISAX AL3 - Very High Protection Need). Role-based access control (RBAC) and hardware cryptographic signing.</a:t>
+            </a:r>
+          </a:p>
+        </p:txBody>
+      </p:sp>
+      <p:sp>
+        <p:nvSpPr>
+          <p:cNvPr id="11" name="Rounded Rectangle 10"/>
+          <p:cNvSpPr/>
+          <p:nvPr/>
+        </p:nvSpPr>
+        <p:spPr>
+          <a:xfrm>
+            <a:off x="6178143" y="3628618"/>
+            <a:ext cx="5464911" cy="1680692"/>
+          </a:xfrm>
+          <a:prstGeom prst="roundRect">
+            <a:avLst>
+              <a:gd name="adj" fmla="val 4000"/>
+            </a:avLst>
+          </a:prstGeom>
+          <a:solidFill>
+            <a:srgbClr val="222A3B"/>
+          </a:solidFill>
+          <a:ln w="12700">
+            <a:solidFill>
+              <a:srgbClr val="0D9488"/>
+            </a:solidFill>
+          </a:ln>
+        </p:spPr>
+        <p:style>
+          <a:lnRef idx="1">
+            <a:schemeClr val="accent1"/>
+          </a:lnRef>
+          <a:fillRef idx="3">
+            <a:schemeClr val="accent1"/>
+          </a:fillRef>
+          <a:effectRef idx="2">
+            <a:schemeClr val="accent1"/>
+          </a:effectRef>
+          <a:fontRef idx="minor">
+            <a:schemeClr val="lt1"/>
+          </a:fontRef>
+        </p:style>
+        <p:txBody>
+          <a:bodyPr rtlCol="0" anchor="ctr"/>
+          <a:lstStyle/>
+          <a:p>
+            <a:pPr algn="ctr"/>
+          </a:p>
+        </p:txBody>
+      </p:sp>
+      <p:sp>
+        <p:nvSpPr>
+          <p:cNvPr id="12" name="Rectangle 11"/>
+          <p:cNvSpPr/>
+          <p:nvPr/>
+        </p:nvSpPr>
+        <p:spPr>
+          <a:xfrm>
+            <a:off x="6178143" y="3628618"/>
+            <a:ext cx="5464911" cy="50800"/>
+          </a:xfrm>
+          <a:prstGeom prst="rect">
+            <a:avLst/>
+          </a:prstGeom>
+          <a:solidFill>
+            <a:srgbClr val="0D9488"/>
+          </a:solidFill>
+          <a:ln>
+            <a:noFill/>
+          </a:ln>
+        </p:spPr>
+        <p:style>
+          <a:lnRef idx="1">
+            <a:schemeClr val="accent1"/>
+          </a:lnRef>
+          <a:fillRef idx="3">
+            <a:schemeClr val="accent1"/>
+          </a:fillRef>
+          <a:effectRef idx="2">
+            <a:schemeClr val="accent1"/>
+          </a:effectRef>
+          <a:fontRef idx="minor">
+            <a:schemeClr val="lt1"/>
+          </a:fontRef>
+        </p:style>
+        <p:txBody>
+          <a:bodyPr rtlCol="0" anchor="ctr"/>
+          <a:lstStyle/>
+          <a:p>
+            <a:pPr algn="ctr"/>
+          </a:p>
+        </p:txBody>
+      </p:sp>
+      <p:sp>
+        <p:nvSpPr>
+          <p:cNvPr id="13" name="TextBox 12"/>
+          <p:cNvSpPr txBox="1"/>
+          <p:nvPr/>
+        </p:nvSpPr>
+        <p:spPr>
+          <a:xfrm>
+            <a:off x="6342735" y="3844010"/>
+            <a:ext cx="5135727" cy="1300708"/>
+          </a:xfrm>
+          <a:prstGeom prst="rect">
+            <a:avLst/>
+          </a:prstGeom>
+          <a:noFill/>
+        </p:spPr>
+        <p:txBody>
+          <a:bodyPr wrap="square" anchor="t" lIns="0" tIns="0" rIns="0" bIns="0">
+            <a:spAutoFit/>
+          </a:bodyPr>
+          <a:lstStyle/>
+          <a:p>
+            <a:pPr algn="l">
+              <a:spcAft>
+                <a:spcPts val="200"/>
+              </a:spcAft>
+              <a:buNone/>
+            </a:pPr>
+            <a:r>
+              <a:rPr sz="1000" b="1" i="0" u="none">
+                <a:solidFill>
+                  <a:srgbClr val="0D9488"/>
+                </a:solidFill>
+                <a:latin typeface="Calibri"/>
+              </a:rPr>
+              <a:t>• 🔍 PILLAR 4 · AUDIT &amp; TRACEABILITY</a:t>
+            </a:r>
+          </a:p>
+          <a:p>
+            <a:pPr algn="l">
+              <a:spcAft>
+                <a:spcPts val="300"/>
+              </a:spcAft>
+              <a:buNone/>
+            </a:pPr>
+            <a:r>
+              <a:rPr sz="1439" b="1" i="0" u="none">
+                <a:solidFill>
+                  <a:srgbClr val="F9FAFB"/>
+                </a:solidFill>
+                <a:latin typeface="Calibri"/>
+              </a:rPr>
+              <a:t>Complete Audit Trail &amp; Human Sign-off</a:t>
+            </a:r>
+          </a:p>
+          <a:p>
+            <a:pPr algn="l">
+              <a:spcAft>
+                <a:spcPts val="300"/>
+              </a:spcAft>
+              <a:buNone/>
+            </a:pPr>
+            <a:r>
+              <a:rPr sz="1150" b="0" i="0" u="none">
+                <a:solidFill>
+                  <a:srgbClr val="F9FAFB"/>
+                </a:solidFill>
+                <a:latin typeface="Calibri"/>
+              </a:rPr>
+              <a:t>Every generated test case, code patch, or calibration adjustment includes full cryptographic provenance and timestamped justification. Meets strict ASPICE audit requirements with mandatory Senior Engineer sign-off gates.</a:t>
+            </a:r>
+          </a:p>
+        </p:txBody>
+      </p:sp>
+      <p:sp>
+        <p:nvSpPr>
+          <p:cNvPr id="14" name="Rounded Rectangle 13"/>
+          <p:cNvSpPr/>
+          <p:nvPr/>
+        </p:nvSpPr>
+        <p:spPr>
+          <a:xfrm>
+            <a:off x="548640" y="5455614"/>
+            <a:ext cx="11094415" cy="945185"/>
+          </a:xfrm>
+          <a:prstGeom prst="roundRect">
+            <a:avLst>
+              <a:gd name="adj" fmla="val 4000"/>
+            </a:avLst>
+          </a:prstGeom>
+          <a:solidFill>
+            <a:srgbClr val="222A3B"/>
+          </a:solidFill>
+          <a:ln w="12700">
+            <a:solidFill>
+              <a:srgbClr val="38BDF8"/>
+            </a:solidFill>
+          </a:ln>
+        </p:spPr>
+        <p:style>
+          <a:lnRef idx="1">
+            <a:schemeClr val="accent1"/>
+          </a:lnRef>
+          <a:fillRef idx="3">
+            <a:schemeClr val="accent1"/>
+          </a:fillRef>
+          <a:effectRef idx="2">
+            <a:schemeClr val="accent1"/>
+          </a:effectRef>
+          <a:fontRef idx="minor">
+            <a:schemeClr val="lt1"/>
+          </a:fontRef>
+        </p:style>
+        <p:txBody>
+          <a:bodyPr rtlCol="0" anchor="ctr"/>
+          <a:lstStyle/>
+          <a:p>
+            <a:pPr algn="ctr"/>
+          </a:p>
+        </p:txBody>
+      </p:sp>
+      <p:sp>
+        <p:nvSpPr>
+          <p:cNvPr id="15" name="Rectangle 14"/>
+          <p:cNvSpPr/>
+          <p:nvPr/>
+        </p:nvSpPr>
+        <p:spPr>
+          <a:xfrm>
+            <a:off x="548640" y="5455614"/>
+            <a:ext cx="50800" cy="945185"/>
+          </a:xfrm>
+          <a:prstGeom prst="rect">
+            <a:avLst/>
+          </a:prstGeom>
+          <a:solidFill>
+            <a:srgbClr val="38BDF8"/>
+          </a:solidFill>
+          <a:ln>
+            <a:noFill/>
+          </a:ln>
+        </p:spPr>
+        <p:style>
+          <a:lnRef idx="1">
+            <a:schemeClr val="accent1"/>
+          </a:lnRef>
+          <a:fillRef idx="3">
+            <a:schemeClr val="accent1"/>
+          </a:fillRef>
+          <a:effectRef idx="2">
+            <a:schemeClr val="accent1"/>
+          </a:effectRef>
+          <a:fontRef idx="minor">
+            <a:schemeClr val="lt1"/>
+          </a:fontRef>
+        </p:style>
+        <p:txBody>
+          <a:bodyPr rtlCol="0" anchor="ctr"/>
+          <a:lstStyle/>
+          <a:p>
+            <a:pPr algn="ctr"/>
+          </a:p>
+        </p:txBody>
+      </p:sp>
+      <p:sp>
+        <p:nvSpPr>
+          <p:cNvPr id="16" name="TextBox 15"/>
+          <p:cNvSpPr txBox="1"/>
+          <p:nvPr/>
+        </p:nvSpPr>
+        <p:spPr>
+          <a:xfrm>
+            <a:off x="745744" y="5547054"/>
+            <a:ext cx="10751007" cy="762305"/>
+          </a:xfrm>
+          <a:prstGeom prst="rect">
+            <a:avLst/>
+          </a:prstGeom>
+          <a:noFill/>
+        </p:spPr>
+        <p:txBody>
+          <a:bodyPr wrap="square" anchor="ctr" lIns="0" tIns="0" rIns="0" bIns="0">
+            <a:spAutoFit/>
+          </a:bodyPr>
+          <a:lstStyle/>
+          <a:p>
+            <a:pPr algn="l">
+              <a:spcAft>
+                <a:spcPts val="200"/>
+              </a:spcAft>
+              <a:buNone/>
+            </a:pPr>
+            <a:r>
+              <a:rPr sz="1250" b="1" i="0" u="none">
+                <a:solidFill>
+                  <a:srgbClr val="F9FAFB"/>
+                </a:solidFill>
+                <a:latin typeface="Calibri"/>
+              </a:rPr>
+              <a:t>🏛️ Enterprise Air-Gap Deployment Mode</a:t>
+            </a:r>
+            <a:r>
+              <a:rPr sz="1000" b="1" i="0" u="none">
+                <a:solidFill>
+                  <a:srgbClr val="0D9488"/>
+                </a:solidFill>
+                <a:latin typeface="Calibri"/>
+              </a:rPr>
+              <a:t>   [✓ ZERO DATA LEAKAGE CERTIFIED]</a:t>
+            </a:r>
+          </a:p>
+          <a:p>
+            <a:pPr algn="l">
+              <a:spcAft>
+                <a:spcPts val="200"/>
+              </a:spcAft>
+              <a:buNone/>
+            </a:pPr>
+            <a:r>
+              <a:rPr sz="1100" b="0" i="0" u="none">
+                <a:solidFill>
+                  <a:srgbClr val="F9FAFB"/>
+                </a:solidFill>
+                <a:latin typeface="Calibri"/>
+              </a:rPr>
+              <a:t>Containerized microservices (Docker/Kubernetes) running locally with on-prem quantized model weights.</a:t>
+            </a:r>
+          </a:p>
+        </p:txBody>
+      </p:sp>
+      <p:sp>
+        <p:nvSpPr>
+          <p:cNvPr id="17" name="TextBox 16"/>
+          <p:cNvSpPr txBox="1"/>
+          <p:nvPr/>
+        </p:nvSpPr>
+        <p:spPr>
+          <a:xfrm>
+            <a:off x="548640" y="411480"/>
+            <a:ext cx="11094415" cy="1248410"/>
+          </a:xfrm>
+          <a:prstGeom prst="rect">
+            <a:avLst/>
+          </a:prstGeom>
+          <a:noFill/>
+        </p:spPr>
+        <p:txBody>
+          <a:bodyPr wrap="square" anchor="t" lIns="0" tIns="0" rIns="0" bIns="0">
+            <a:spAutoFit/>
+          </a:bodyPr>
+          <a:lstStyle/>
+          <a:p>
+            <a:pPr algn="l">
+              <a:spcAft>
+                <a:spcPts val="200"/>
+              </a:spcAft>
+              <a:buNone/>
+            </a:pPr>
+            <a:r>
+              <a:rPr sz="1100" b="1" i="0" u="none">
+                <a:solidFill>
+                  <a:srgbClr val="38BDF8"/>
+                </a:solidFill>
+                <a:latin typeface="Calibri"/>
+              </a:rPr>
+              <a:t>• ENTERPRISE SECURITY ARCHITECTURE · ZERO TRUST</a:t>
+            </a:r>
+          </a:p>
+          <a:p>
+            <a:pPr algn="l">
+              <a:buNone/>
+            </a:pPr>
+            <a:r>
+              <a:rPr sz="2400" b="1" i="0" u="none">
+                <a:solidFill>
+                  <a:srgbClr val="F9FAFB"/>
+                </a:solidFill>
+                <a:latin typeface="Calibri"/>
+              </a:rPr>
+              <a:t>Absolute IP Protection &amp; Zero Data Leakage Guarantee</a:t>
+            </a:r>
+          </a:p>
+          <a:p>
+            <a:pPr algn="l">
+              <a:spcBef>
+                <a:spcPts val="300"/>
+              </a:spcBef>
+              <a:buNone/>
+            </a:pPr>
+            <a:r>
+              <a:rPr sz="1250" b="0" i="0" u="none">
+                <a:solidFill>
+                  <a:srgbClr val="9CA3AF"/>
+                </a:solidFill>
+                <a:latin typeface="Calibri"/>
+              </a:rPr>
+              <a:t>Your motor topologies, inverter switching algorithms, and calibration datasets represent core IP. Our platform guarantees mathematical data isolation with zero cloud exposure.</a:t>
+            </a:r>
+          </a:p>
+        </p:txBody>
+      </p:sp>
+      <p:sp>
+        <p:nvSpPr>
+          <p:cNvPr id="18" name="Rectangle 17"/>
+          <p:cNvSpPr/>
+          <p:nvPr/>
+        </p:nvSpPr>
+        <p:spPr>
+          <a:xfrm>
+            <a:off x="548640" y="1672590"/>
+            <a:ext cx="2286000" cy="38100"/>
+          </a:xfrm>
+          <a:prstGeom prst="rect">
+            <a:avLst/>
+          </a:prstGeom>
+          <a:solidFill>
+            <a:srgbClr val="38BDF8"/>
+          </a:solidFill>
+          <a:ln>
+            <a:noFill/>
+          </a:ln>
+        </p:spPr>
+        <p:style>
+          <a:lnRef idx="1">
+            <a:schemeClr val="accent1"/>
+          </a:lnRef>
+          <a:fillRef idx="3">
+            <a:schemeClr val="accent1"/>
+          </a:fillRef>
+          <a:effectRef idx="2">
+            <a:schemeClr val="accent1"/>
+          </a:effectRef>
+          <a:fontRef idx="minor">
+            <a:schemeClr val="lt1"/>
+          </a:fontRef>
+        </p:style>
+        <p:txBody>
+          <a:bodyPr rtlCol="0" anchor="ctr"/>
+          <a:lstStyle/>
+          <a:p>
+            <a:pPr algn="ctr"/>
+          </a:p>
+        </p:txBody>
+      </p:sp>
+      <p:sp>
+        <p:nvSpPr>
+          <p:cNvPr id="19" name="TextBox 18"/>
+          <p:cNvSpPr txBox="1"/>
+          <p:nvPr/>
+        </p:nvSpPr>
+        <p:spPr>
+          <a:xfrm>
+            <a:off x="548640" y="6437376"/>
+            <a:ext cx="9539935" cy="256032"/>
+          </a:xfrm>
+          <a:prstGeom prst="rect">
+            <a:avLst/>
+          </a:prstGeom>
+          <a:noFill/>
+        </p:spPr>
+        <p:txBody>
+          <a:bodyPr wrap="square" anchor="ctr" lIns="0" tIns="0" rIns="0" bIns="0">
+            <a:spAutoFit/>
+          </a:bodyPr>
+          <a:lstStyle/>
+          <a:p>
+            <a:pPr algn="l">
+              <a:buNone/>
+            </a:pPr>
+            <a:r>
+              <a:rPr sz="950" b="0" i="0" u="none">
+                <a:solidFill>
+                  <a:srgbClr val="9CA3AF"/>
+                </a:solidFill>
+                <a:latin typeface="Calibri"/>
+              </a:rPr>
+              <a:t>Hardware-Enforced Data Isolation for Tier-1 &amp; OEM Intellectual Property</a:t>
+            </a:r>
+          </a:p>
+        </p:txBody>
+      </p:sp>
+      <p:sp>
+        <p:nvSpPr>
+          <p:cNvPr id="20" name="TextBox 19"/>
+          <p:cNvSpPr txBox="1"/>
+          <p:nvPr/>
+        </p:nvSpPr>
+        <p:spPr>
+          <a:xfrm>
+            <a:off x="10271455" y="6437376"/>
+            <a:ext cx="1371600" cy="256032"/>
+          </a:xfrm>
+          <a:prstGeom prst="rect">
+            <a:avLst/>
+          </a:prstGeom>
+          <a:noFill/>
+        </p:spPr>
+        <p:txBody>
+          <a:bodyPr wrap="square" anchor="ctr" lIns="0" tIns="0" rIns="0" bIns="0">
+            <a:spAutoFit/>
+          </a:bodyPr>
+          <a:lstStyle/>
+          <a:p>
             <a:pPr algn="r">
               <a:buNone/>
             </a:pPr>
             <a:r>
-              <a:rPr sz="1100" b="0" i="0" u="none">
+              <a:rPr sz="950" b="0" i="0" u="none">
                 <a:solidFill>
                   <a:srgbClr val="9CA3AF"/>
                 </a:solidFill>
@@ -5025,180 +7965,27 @@
       <p:grpSpPr/>
       <p:sp>
         <p:nvSpPr>
-          <p:cNvPr id="2" name="TextBox 1"/>
-          <p:cNvSpPr txBox="1"/>
-          <p:nvPr/>
-        </p:nvSpPr>
-        <p:spPr>
-          <a:xfrm>
-            <a:off x="822960" y="1828800"/>
-            <a:ext cx="5090007" cy="457200"/>
-          </a:xfrm>
-          <a:prstGeom prst="rect">
-            <a:avLst/>
-          </a:prstGeom>
-          <a:noFill/>
-        </p:spPr>
-        <p:txBody>
-          <a:bodyPr wrap="square" lIns="0" tIns="0" rIns="0" bIns="0">
-            <a:spAutoFit/>
-          </a:bodyPr>
-          <a:lstStyle/>
-          <a:p>
-            <a:pPr algn="l">
-              <a:spcAft>
-                <a:spcPts val="400"/>
-              </a:spcAft>
-              <a:buNone/>
-            </a:pPr>
-            <a:r>
-              <a:rPr sz="2000" b="1" i="0" u="none">
-                <a:solidFill>
-                  <a:srgbClr val="1D4ED8"/>
-                </a:solidFill>
-                <a:latin typeface="Calibri"/>
-              </a:rPr>
-              <a:t>🏛️</a:t>
-            </a:r>
-          </a:p>
-        </p:txBody>
-      </p:sp>
-      <p:sp>
-        <p:nvSpPr>
-          <p:cNvPr id="3" name="TextBox 2"/>
-          <p:cNvSpPr txBox="1"/>
-          <p:nvPr/>
-        </p:nvSpPr>
-        <p:spPr>
-          <a:xfrm>
-            <a:off x="822960" y="2209800"/>
-            <a:ext cx="5090007" cy="665480"/>
-          </a:xfrm>
-          <a:prstGeom prst="rect">
-            <a:avLst/>
-          </a:prstGeom>
-          <a:noFill/>
-        </p:spPr>
-        <p:txBody>
-          <a:bodyPr wrap="square" lIns="0" tIns="0" rIns="0" bIns="0">
-            <a:spAutoFit/>
-          </a:bodyPr>
-          <a:lstStyle/>
-          <a:p>
-            <a:pPr algn="l">
-              <a:spcBef>
-                <a:spcPts val="800"/>
-              </a:spcBef>
-              <a:spcAft>
-                <a:spcPts val="400"/>
-              </a:spcAft>
-              <a:buNone/>
-            </a:pPr>
-            <a:r>
-              <a:rPr sz="2000" b="1" i="0" u="none">
-                <a:solidFill>
-                  <a:srgbClr val="1D4ED8"/>
-                </a:solidFill>
-                <a:latin typeface="Calibri"/>
-              </a:rPr>
-              <a:t>Enterprise Air-Gap Deployment Mode</a:t>
-            </a:r>
-          </a:p>
-          <a:p>
-            <a:pPr algn="l">
-              <a:spcBef>
-                <a:spcPts val="400"/>
-              </a:spcBef>
-              <a:spcAft>
-                <a:spcPts val="400"/>
-              </a:spcAft>
-              <a:buNone/>
-            </a:pPr>
-            <a:r>
-              <a:rPr sz="1600" b="0" i="0" u="none">
-                <a:solidFill>
-                  <a:srgbClr val="F9FAFB"/>
-                </a:solidFill>
-                <a:latin typeface="Calibri"/>
-              </a:rPr>
-              <a:t>Containerized microservices (Docker/Kubernetes) running locally with on-prem quantized model weights.</a:t>
-            </a:r>
-          </a:p>
-        </p:txBody>
-      </p:sp>
-      <p:sp>
-        <p:nvSpPr>
-          <p:cNvPr id="4" name="TextBox 3"/>
-          <p:cNvSpPr txBox="1"/>
-          <p:nvPr/>
-        </p:nvSpPr>
-        <p:spPr>
-          <a:xfrm>
-            <a:off x="822960" y="548640"/>
-            <a:ext cx="10545775" cy="1097280"/>
-          </a:xfrm>
-          <a:prstGeom prst="rect">
-            <a:avLst/>
-          </a:prstGeom>
-          <a:noFill/>
-        </p:spPr>
-        <p:txBody>
-          <a:bodyPr wrap="square" lIns="0" tIns="0" rIns="0" bIns="0">
-            <a:spAutoFit/>
-          </a:bodyPr>
-          <a:lstStyle/>
-          <a:p>
-            <a:pPr algn="ctr">
-              <a:buNone/>
-            </a:pPr>
-            <a:r>
-              <a:rPr sz="3000" b="1" i="0" u="none">
-                <a:solidFill>
-                  <a:srgbClr val="F9FAFB"/>
-                </a:solidFill>
-                <a:latin typeface="Calibri"/>
-              </a:rPr>
-              <a:t>Absolute IP Protection &amp; Zero Data Leakage Guarantee</a:t>
-            </a:r>
-          </a:p>
-          <a:p>
-            <a:pPr algn="ctr">
-              <a:spcBef>
-                <a:spcPts val="400"/>
-              </a:spcBef>
-              <a:buNone/>
-            </a:pPr>
-            <a:r>
-              <a:rPr sz="1800" b="0" i="0" u="none">
-                <a:solidFill>
-                  <a:srgbClr val="9CA3AF"/>
-                </a:solidFill>
-                <a:latin typeface="Calibri"/>
-              </a:rPr>
-              <a:t>Your motor topologies, inverter switching algorithms, and calibration datasets represent core IP. Our platform guarantees mathematical data isolation with zero cloud exposure.</a:t>
-            </a:r>
-          </a:p>
-        </p:txBody>
-      </p:sp>
-      <p:sp>
-        <p:nvSpPr>
-          <p:cNvPr id="5" name="Rectangle 4"/>
+          <p:cNvPr id="2" name="Rounded Rectangle 1"/>
           <p:cNvSpPr/>
           <p:nvPr/>
         </p:nvSpPr>
         <p:spPr>
           <a:xfrm>
-            <a:off x="822960" y="1645920"/>
-            <a:ext cx="10545775" cy="12700"/>
-          </a:xfrm>
-          <a:prstGeom prst="rect">
-            <a:avLst/>
+            <a:off x="548640" y="1783334"/>
+            <a:ext cx="2650159" cy="2119013"/>
+          </a:xfrm>
+          <a:prstGeom prst="roundRect">
+            <a:avLst>
+              <a:gd name="adj" fmla="val 4000"/>
+            </a:avLst>
           </a:prstGeom>
           <a:solidFill>
-            <a:srgbClr val="3F4555"/>
+            <a:srgbClr val="222A3B"/>
           </a:solidFill>
-          <a:ln>
-            <a:noFill/>
+          <a:ln w="12700">
+            <a:solidFill>
+              <a:srgbClr val="38BDF8"/>
+            </a:solidFill>
           </a:ln>
         </p:spPr>
         <p:style>
@@ -5225,88 +8012,23 @@
       </p:sp>
       <p:sp>
         <p:nvSpPr>
-          <p:cNvPr id="6" name="TextBox 5"/>
-          <p:cNvSpPr txBox="1"/>
-          <p:nvPr/>
-        </p:nvSpPr>
-        <p:spPr>
-          <a:xfrm>
-            <a:off x="9997135" y="6629400"/>
-            <a:ext cx="1371600" cy="274320"/>
+          <p:cNvPr id="3" name="Rectangle 2"/>
+          <p:cNvSpPr/>
+          <p:nvPr/>
+        </p:nvSpPr>
+        <p:spPr>
+          <a:xfrm>
+            <a:off x="548640" y="1783334"/>
+            <a:ext cx="2650159" cy="50800"/>
           </a:xfrm>
           <a:prstGeom prst="rect">
             <a:avLst/>
           </a:prstGeom>
-          <a:noFill/>
-        </p:spPr>
-        <p:txBody>
-          <a:bodyPr wrap="square" lIns="0" tIns="0" rIns="0" bIns="0">
-            <a:spAutoFit/>
-          </a:bodyPr>
-          <a:lstStyle/>
-          <a:p>
-            <a:pPr algn="r">
-              <a:buNone/>
-            </a:pPr>
-            <a:r>
-              <a:rPr sz="1100" b="0" i="0" u="none">
-                <a:solidFill>
-                  <a:srgbClr val="9CA3AF"/>
-                </a:solidFill>
-                <a:latin typeface="Calibri"/>
-              </a:rPr>
-              <a:t>5</a:t>
-            </a:r>
-          </a:p>
-        </p:txBody>
-      </p:sp>
-    </p:spTree>
-  </p:cSld>
-  <p:clrMapOvr>
-    <a:masterClrMapping/>
-  </p:clrMapOvr>
-</p:sld>
-</file>
-
-<file path=ppt/slides/slide6.xml><?xml version="1.0" encoding="utf-8"?>
-<p:sld xmlns:a="http://schemas.openxmlformats.org/drawingml/2006/main" xmlns:p="http://schemas.openxmlformats.org/presentationml/2006/main" xmlns:r="http://schemas.openxmlformats.org/officeDocument/2006/relationships">
-  <p:cSld>
-    <p:bg>
-      <p:bgPr>
-        <a:solidFill>
-          <a:srgbClr val="0F172A"/>
-        </a:solidFill>
-        <a:effectLst/>
-      </p:bgPr>
-    </p:bg>
-    <p:spTree>
-      <p:nvGrpSpPr>
-        <p:cNvPr id="1" name=""/>
-        <p:cNvGrpSpPr/>
-        <p:nvPr/>
-      </p:nvGrpSpPr>
-      <p:grpSpPr/>
-      <p:sp>
-        <p:nvSpPr>
-          <p:cNvPr id="2" name="Rounded Rectangle 1"/>
-          <p:cNvSpPr/>
-          <p:nvPr/>
-        </p:nvSpPr>
-        <p:spPr>
-          <a:xfrm>
-            <a:off x="822960" y="1828800"/>
-            <a:ext cx="2362123" cy="4572000"/>
-          </a:xfrm>
-          <a:prstGeom prst="roundRect">
-            <a:avLst>
-              <a:gd name="adj" fmla="val 2000"/>
-            </a:avLst>
-          </a:prstGeom>
-          <a:noFill/>
-          <a:ln w="6350">
-            <a:solidFill>
-              <a:srgbClr val="3F4555"/>
-            </a:solidFill>
+          <a:solidFill>
+            <a:srgbClr val="38BDF8"/>
+          </a:solidFill>
+          <a:ln>
+            <a:noFill/>
           </a:ln>
         </p:spPr>
         <p:style>
@@ -5333,14 +8055,14 @@
       </p:sp>
       <p:sp>
         <p:nvSpPr>
-          <p:cNvPr id="3" name="TextBox 2"/>
+          <p:cNvPr id="4" name="TextBox 3"/>
           <p:cNvSpPr txBox="1"/>
           <p:nvPr/>
         </p:nvSpPr>
         <p:spPr>
           <a:xfrm>
-            <a:off x="1051560" y="2057400"/>
-            <a:ext cx="1904923" cy="4114800"/>
+            <a:off x="713232" y="1998726"/>
+            <a:ext cx="2320975" cy="1739029"/>
           </a:xfrm>
           <a:prstGeom prst="rect">
             <a:avLst/>
@@ -5348,36 +8070,36 @@
           <a:noFill/>
         </p:spPr>
         <p:txBody>
-          <a:bodyPr wrap="square" lIns="0" tIns="0" rIns="0" bIns="0">
+          <a:bodyPr wrap="square" anchor="t" lIns="0" tIns="0" rIns="0" bIns="0">
             <a:spAutoFit/>
           </a:bodyPr>
           <a:lstStyle/>
           <a:p>
             <a:pPr algn="l">
               <a:spcAft>
-                <a:spcPts val="400"/>
+                <a:spcPts val="190"/>
               </a:spcAft>
               <a:buNone/>
             </a:pPr>
             <a:r>
-              <a:rPr sz="1210" b="1" i="0" u="none">
-                <a:solidFill>
-                  <a:srgbClr val="1D4ED8"/>
-                </a:solidFill>
-                <a:latin typeface="Calibri"/>
-              </a:rPr>
-              <a:t>SERVICE 01</a:t>
+              <a:rPr sz="940" b="1" i="0" u="none">
+                <a:solidFill>
+                  <a:srgbClr val="38BDF8"/>
+                </a:solidFill>
+                <a:latin typeface="Calibri"/>
+              </a:rPr>
+              <a:t>• SERVICE 01</a:t>
             </a:r>
           </a:p>
           <a:p>
             <a:pPr algn="l">
               <a:spcAft>
-                <a:spcPts val="600"/>
+                <a:spcPts val="280"/>
               </a:spcAft>
               <a:buNone/>
             </a:pPr>
             <a:r>
-              <a:rPr sz="2000" b="1" i="0" u="none">
+              <a:rPr sz="1350" b="1" i="0" u="none">
                 <a:solidFill>
                   <a:srgbClr val="F9FAFB"/>
                 </a:solidFill>
@@ -5389,12 +8111,12 @@
           <a:p>
             <a:pPr algn="l">
               <a:spcAft>
-                <a:spcPts val="400"/>
+                <a:spcPts val="280"/>
               </a:spcAft>
               <a:buNone/>
             </a:pPr>
             <a:r>
-              <a:rPr sz="1600" b="0" i="0" u="none">
+              <a:rPr sz="1080" b="0" i="0" u="none">
                 <a:solidFill>
                   <a:srgbClr val="F9FAFB"/>
                 </a:solidFill>
@@ -5402,20 +8124,18 @@
               </a:rPr>
               <a:t>Turnkey integration with dSPACE, Vector CANoe, and TPT. Automated test authoring and 24/7 automated regression failure diagnosis.</a:t>
             </a:r>
-            <a:r>
-              <a:rPr sz="1600" b="0" i="0" u="none">
-                <a:solidFill>
-                  <a:srgbClr val="F9FAFB"/>
-                </a:solidFill>
-                <a:latin typeface="Calibri"/>
-              </a:rPr>
-              <a:t>
-</a:t>
-            </a:r>
-            <a:r>
-              <a:rPr sz="1600" b="1" i="0" u="none">
-                <a:solidFill>
-                  <a:srgbClr val="F9FAFB"/>
+          </a:p>
+          <a:p>
+            <a:pPr algn="l">
+              <a:spcBef>
+                <a:spcPts val="280"/>
+              </a:spcBef>
+              <a:buNone/>
+            </a:pPr>
+            <a:r>
+              <a:rPr sz="990" b="1" i="0" u="none">
+                <a:solidFill>
+                  <a:srgbClr val="0D9488"/>
                 </a:solidFill>
                 <a:latin typeface="Calibri"/>
               </a:rPr>
@@ -5426,24 +8146,26 @@
       </p:sp>
       <p:sp>
         <p:nvSpPr>
-          <p:cNvPr id="4" name="Rounded Rectangle 3"/>
+          <p:cNvPr id="5" name="Rounded Rectangle 4"/>
           <p:cNvSpPr/>
           <p:nvPr/>
         </p:nvSpPr>
         <p:spPr>
           <a:xfrm>
-            <a:off x="3550843" y="1828800"/>
-            <a:ext cx="2362123" cy="4572000"/>
+            <a:off x="3363391" y="1783334"/>
+            <a:ext cx="2650159" cy="2119013"/>
           </a:xfrm>
           <a:prstGeom prst="roundRect">
             <a:avLst>
-              <a:gd name="adj" fmla="val 2000"/>
+              <a:gd name="adj" fmla="val 4000"/>
             </a:avLst>
           </a:prstGeom>
-          <a:noFill/>
-          <a:ln w="6350">
+          <a:solidFill>
+            <a:srgbClr val="222A3B"/>
+          </a:solidFill>
+          <a:ln w="12700">
             <a:solidFill>
-              <a:srgbClr val="3F4555"/>
+              <a:srgbClr val="38BDF8"/>
             </a:solidFill>
           </a:ln>
         </p:spPr>
@@ -5471,118 +8193,23 @@
       </p:sp>
       <p:sp>
         <p:nvSpPr>
-          <p:cNvPr id="5" name="TextBox 4"/>
-          <p:cNvSpPr txBox="1"/>
-          <p:nvPr/>
-        </p:nvSpPr>
-        <p:spPr>
-          <a:xfrm>
-            <a:off x="3779443" y="2057400"/>
-            <a:ext cx="1904923" cy="4114800"/>
+          <p:cNvPr id="6" name="Rectangle 5"/>
+          <p:cNvSpPr/>
+          <p:nvPr/>
+        </p:nvSpPr>
+        <p:spPr>
+          <a:xfrm>
+            <a:off x="3363391" y="1783334"/>
+            <a:ext cx="2650159" cy="50800"/>
           </a:xfrm>
           <a:prstGeom prst="rect">
             <a:avLst/>
           </a:prstGeom>
-          <a:noFill/>
-        </p:spPr>
-        <p:txBody>
-          <a:bodyPr wrap="square" lIns="0" tIns="0" rIns="0" bIns="0">
-            <a:spAutoFit/>
-          </a:bodyPr>
-          <a:lstStyle/>
-          <a:p>
-            <a:pPr algn="l">
-              <a:spcAft>
-                <a:spcPts val="400"/>
-              </a:spcAft>
-              <a:buNone/>
-            </a:pPr>
-            <a:r>
-              <a:rPr sz="1210" b="1" i="0" u="none">
-                <a:solidFill>
-                  <a:srgbClr val="1D4ED8"/>
-                </a:solidFill>
-                <a:latin typeface="Calibri"/>
-              </a:rPr>
-              <a:t>SERVICE 02</a:t>
-            </a:r>
-          </a:p>
-          <a:p>
-            <a:pPr algn="l">
-              <a:spcAft>
-                <a:spcPts val="600"/>
-              </a:spcAft>
-              <a:buNone/>
-            </a:pPr>
-            <a:r>
-              <a:rPr sz="2000" b="1" i="0" u="none">
-                <a:solidFill>
-                  <a:srgbClr val="F9FAFB"/>
-                </a:solidFill>
-                <a:latin typeface="Calibri"/>
-              </a:rPr>
-              <a:t>Dyno Calibration Co-Pilot</a:t>
-            </a:r>
-          </a:p>
-          <a:p>
-            <a:pPr algn="l">
-              <a:spcAft>
-                <a:spcPts val="400"/>
-              </a:spcAft>
-              <a:buNone/>
-            </a:pPr>
-            <a:r>
-              <a:rPr sz="1600" b="0" i="0" u="none">
-                <a:solidFill>
-                  <a:srgbClr val="F9FAFB"/>
-                </a:solidFill>
-                <a:latin typeface="Calibri"/>
-              </a:rPr>
-              <a:t>Deployment of Bayesian active-learning agents to optimize test bench schedules and auto-generate MTPA, MTPV, and thermal derating tables.</a:t>
-            </a:r>
-            <a:r>
-              <a:rPr sz="1600" b="0" i="0" u="none">
-                <a:solidFill>
-                  <a:srgbClr val="F9FAFB"/>
-                </a:solidFill>
-                <a:latin typeface="Calibri"/>
-              </a:rPr>
-              <a:t>
-</a:t>
-            </a:r>
-            <a:r>
-              <a:rPr sz="1600" b="1" i="0" u="none">
-                <a:solidFill>
-                  <a:srgbClr val="F9FAFB"/>
-                </a:solidFill>
-                <a:latin typeface="Calibri"/>
-              </a:rPr>
-              <a:t>▸ 50% Dyno Hour Reduction</a:t>
-            </a:r>
-          </a:p>
-        </p:txBody>
-      </p:sp>
-      <p:sp>
-        <p:nvSpPr>
-          <p:cNvPr id="6" name="Rounded Rectangle 5"/>
-          <p:cNvSpPr/>
-          <p:nvPr/>
-        </p:nvSpPr>
-        <p:spPr>
-          <a:xfrm>
-            <a:off x="6278726" y="1828800"/>
-            <a:ext cx="2362123" cy="4572000"/>
-          </a:xfrm>
-          <a:prstGeom prst="roundRect">
-            <a:avLst>
-              <a:gd name="adj" fmla="val 2000"/>
-            </a:avLst>
-          </a:prstGeom>
-          <a:noFill/>
-          <a:ln w="6350">
-            <a:solidFill>
-              <a:srgbClr val="3F4555"/>
-            </a:solidFill>
+          <a:solidFill>
+            <a:srgbClr val="38BDF8"/>
+          </a:solidFill>
+          <a:ln>
+            <a:noFill/>
           </a:ln>
         </p:spPr>
         <p:style>
@@ -5615,8 +8242,8 @@
         </p:nvSpPr>
         <p:spPr>
           <a:xfrm>
-            <a:off x="6507326" y="2057400"/>
-            <a:ext cx="1904923" cy="4114800"/>
+            <a:off x="3527983" y="1998726"/>
+            <a:ext cx="2320975" cy="1739029"/>
           </a:xfrm>
           <a:prstGeom prst="rect">
             <a:avLst/>
@@ -5624,78 +8251,76 @@
           <a:noFill/>
         </p:spPr>
         <p:txBody>
-          <a:bodyPr wrap="square" lIns="0" tIns="0" rIns="0" bIns="0">
+          <a:bodyPr wrap="square" anchor="t" lIns="0" tIns="0" rIns="0" bIns="0">
             <a:spAutoFit/>
           </a:bodyPr>
           <a:lstStyle/>
           <a:p>
             <a:pPr algn="l">
               <a:spcAft>
-                <a:spcPts val="400"/>
+                <a:spcPts val="200"/>
               </a:spcAft>
               <a:buNone/>
             </a:pPr>
             <a:r>
-              <a:rPr sz="1210" b="1" i="0" u="none">
-                <a:solidFill>
-                  <a:srgbClr val="1D4ED8"/>
-                </a:solidFill>
-                <a:latin typeface="Calibri"/>
-              </a:rPr>
-              <a:t>SERVICE 03</a:t>
+              <a:rPr sz="1000" b="1" i="0" u="none">
+                <a:solidFill>
+                  <a:srgbClr val="38BDF8"/>
+                </a:solidFill>
+                <a:latin typeface="Calibri"/>
+              </a:rPr>
+              <a:t>• SERVICE 02</a:t>
             </a:r>
           </a:p>
           <a:p>
             <a:pPr algn="l">
               <a:spcAft>
-                <a:spcPts val="600"/>
+                <a:spcPts val="300"/>
               </a:spcAft>
               <a:buNone/>
             </a:pPr>
             <a:r>
-              <a:rPr sz="2000" b="1" i="0" u="none">
+              <a:rPr sz="1439" b="1" i="0" u="none">
                 <a:solidFill>
                   <a:srgbClr val="F9FAFB"/>
                 </a:solidFill>
                 <a:latin typeface="Calibri"/>
               </a:rPr>
-              <a:t>ASPICE &amp; Safety Compliance Accelerator</a:t>
+              <a:t>Dyno Calibration Co-Pilot</a:t>
             </a:r>
           </a:p>
           <a:p>
             <a:pPr algn="l">
               <a:spcAft>
-                <a:spcPts val="400"/>
+                <a:spcPts val="300"/>
               </a:spcAft>
               <a:buNone/>
             </a:pPr>
             <a:r>
-              <a:rPr sz="1600" b="0" i="0" u="none">
+              <a:rPr sz="1150" b="0" i="0" u="none">
                 <a:solidFill>
                   <a:srgbClr val="F9FAFB"/>
                 </a:solidFill>
                 <a:latin typeface="Calibri"/>
               </a:rPr>
-              <a:t>End-to-end bidirectional traceability automation from DOORS requirements to test logs, plus automated MISRA-C static remediation.</a:t>
-            </a:r>
-            <a:r>
-              <a:rPr sz="1600" b="0" i="0" u="none">
-                <a:solidFill>
-                  <a:srgbClr val="F9FAFB"/>
-                </a:solidFill>
-                <a:latin typeface="Calibri"/>
-              </a:rPr>
-              <a:t>
-</a:t>
-            </a:r>
-            <a:r>
-              <a:rPr sz="1600" b="1" i="0" u="none">
-                <a:solidFill>
-                  <a:srgbClr val="F9FAFB"/>
-                </a:solidFill>
-                <a:latin typeface="Calibri"/>
-              </a:rPr>
-              <a:t>▸ 100% Audit-Ready SWE.1-6</a:t>
+              <a:t>Deployment of Bayesian active-learning agents to optimize test bench schedules and auto-generate MTPA, MTPV, and thermal derating tables.</a:t>
+            </a:r>
+          </a:p>
+          <a:p>
+            <a:pPr algn="l">
+              <a:spcBef>
+                <a:spcPts val="300"/>
+              </a:spcBef>
+              <a:buNone/>
+            </a:pPr>
+            <a:r>
+              <a:rPr sz="1050" b="1" i="0" u="none">
+                <a:solidFill>
+                  <a:srgbClr val="0D9488"/>
+                </a:solidFill>
+                <a:latin typeface="Calibri"/>
+              </a:rPr>
+              <a:t>▸ 50% Dyno Hour Reduction</a:t>
             </a:r>
           </a:p>
         </p:txBody>
@@ -5708,18 +8333,20 @@
         </p:nvSpPr>
         <p:spPr>
           <a:xfrm>
-            <a:off x="9006609" y="1828800"/>
-            <a:ext cx="2362123" cy="4572000"/>
+            <a:off x="6178142" y="1783334"/>
+            <a:ext cx="2650159" cy="2119013"/>
           </a:xfrm>
           <a:prstGeom prst="roundRect">
             <a:avLst>
-              <a:gd name="adj" fmla="val 2000"/>
+              <a:gd name="adj" fmla="val 4000"/>
             </a:avLst>
           </a:prstGeom>
-          <a:noFill/>
-          <a:ln w="6350">
+          <a:solidFill>
+            <a:srgbClr val="222A3B"/>
+          </a:solidFill>
+          <a:ln w="12700">
             <a:solidFill>
-              <a:srgbClr val="3F4555"/>
+              <a:srgbClr val="38BDF8"/>
             </a:solidFill>
           </a:ln>
         </p:spPr>
@@ -5747,150 +8374,20 @@
       </p:sp>
       <p:sp>
         <p:nvSpPr>
-          <p:cNvPr id="9" name="TextBox 8"/>
-          <p:cNvSpPr txBox="1"/>
-          <p:nvPr/>
-        </p:nvSpPr>
-        <p:spPr>
-          <a:xfrm>
-            <a:off x="9235209" y="2057400"/>
-            <a:ext cx="1904923" cy="4114800"/>
+          <p:cNvPr id="9" name="Rectangle 8"/>
+          <p:cNvSpPr/>
+          <p:nvPr/>
+        </p:nvSpPr>
+        <p:spPr>
+          <a:xfrm>
+            <a:off x="6178142" y="1783334"/>
+            <a:ext cx="2650159" cy="50800"/>
           </a:xfrm>
           <a:prstGeom prst="rect">
             <a:avLst/>
           </a:prstGeom>
-          <a:noFill/>
-        </p:spPr>
-        <p:txBody>
-          <a:bodyPr wrap="square" lIns="0" tIns="0" rIns="0" bIns="0">
-            <a:spAutoFit/>
-          </a:bodyPr>
-          <a:lstStyle/>
-          <a:p>
-            <a:pPr algn="l">
-              <a:spcAft>
-                <a:spcPts val="400"/>
-              </a:spcAft>
-              <a:buNone/>
-            </a:pPr>
-            <a:r>
-              <a:rPr sz="1210" b="1" i="0" u="none">
-                <a:solidFill>
-                  <a:srgbClr val="1D4ED8"/>
-                </a:solidFill>
-                <a:latin typeface="Calibri"/>
-              </a:rPr>
-              <a:t>SERVICE 04</a:t>
-            </a:r>
-          </a:p>
-          <a:p>
-            <a:pPr algn="l">
-              <a:spcAft>
-                <a:spcPts val="600"/>
-              </a:spcAft>
-              <a:buNone/>
-            </a:pPr>
-            <a:r>
-              <a:rPr sz="2000" b="1" i="0" u="none">
-                <a:solidFill>
-                  <a:srgbClr val="F9FAFB"/>
-                </a:solidFill>
-                <a:latin typeface="Calibri"/>
-              </a:rPr>
-              <a:t>Air-Gapped Sovereign Deployment</a:t>
-            </a:r>
-          </a:p>
-          <a:p>
-            <a:pPr algn="l">
-              <a:spcAft>
-                <a:spcPts val="400"/>
-              </a:spcAft>
-              <a:buNone/>
-            </a:pPr>
-            <a:r>
-              <a:rPr sz="1600" b="0" i="0" u="none">
-                <a:solidFill>
-                  <a:srgbClr val="F9FAFB"/>
-                </a:solidFill>
-                <a:latin typeface="Calibri"/>
-              </a:rPr>
-              <a:t>On-premise hardware setup, fine-tuning domain models on your internal motor firmware conventions, and hands-on team enablement.</a:t>
-            </a:r>
-            <a:r>
-              <a:rPr sz="1600" b="0" i="0" u="none">
-                <a:solidFill>
-                  <a:srgbClr val="F9FAFB"/>
-                </a:solidFill>
-                <a:latin typeface="Calibri"/>
-              </a:rPr>
-              <a:t>
-</a:t>
-            </a:r>
-            <a:r>
-              <a:rPr sz="1600" b="1" i="0" u="none">
-                <a:solidFill>
-                  <a:srgbClr val="F9FAFB"/>
-                </a:solidFill>
-                <a:latin typeface="Calibri"/>
-              </a:rPr>
-              <a:t>▸ Zero Security Compromise</a:t>
-            </a:r>
-          </a:p>
-        </p:txBody>
-      </p:sp>
-      <p:sp>
-        <p:nvSpPr>
-          <p:cNvPr id="10" name="TextBox 9"/>
-          <p:cNvSpPr txBox="1"/>
-          <p:nvPr/>
-        </p:nvSpPr>
-        <p:spPr>
-          <a:xfrm>
-            <a:off x="822960" y="548640"/>
-            <a:ext cx="10545775" cy="1097280"/>
-          </a:xfrm>
-          <a:prstGeom prst="rect">
-            <a:avLst/>
-          </a:prstGeom>
-          <a:noFill/>
-        </p:spPr>
-        <p:txBody>
-          <a:bodyPr wrap="square" lIns="0" tIns="0" rIns="0" bIns="0">
-            <a:spAutoFit/>
-          </a:bodyPr>
-          <a:lstStyle/>
-          <a:p>
-            <a:pPr algn="ctr">
-              <a:buNone/>
-            </a:pPr>
-            <a:r>
-              <a:rPr sz="3000" b="1" i="0" u="none">
-                <a:solidFill>
-                  <a:srgbClr val="F9FAFB"/>
-                </a:solidFill>
-                <a:latin typeface="Calibri"/>
-              </a:rPr>
-              <a:t>Turnkey Services: Accelerate Your Motor ECU Programs</a:t>
-            </a:r>
-          </a:p>
-        </p:txBody>
-      </p:sp>
-      <p:sp>
-        <p:nvSpPr>
-          <p:cNvPr id="11" name="Rectangle 10"/>
-          <p:cNvSpPr/>
-          <p:nvPr/>
-        </p:nvSpPr>
-        <p:spPr>
-          <a:xfrm>
-            <a:off x="822960" y="1645920"/>
-            <a:ext cx="10545775" cy="12700"/>
-          </a:xfrm>
-          <a:prstGeom prst="rect">
-            <a:avLst/>
-          </a:prstGeom>
           <a:solidFill>
-            <a:srgbClr val="3F4555"/>
+            <a:srgbClr val="38BDF8"/>
           </a:solidFill>
           <a:ln>
             <a:noFill/>
@@ -5920,14 +8417,14 @@
       </p:sp>
       <p:sp>
         <p:nvSpPr>
-          <p:cNvPr id="12" name="TextBox 11"/>
+          <p:cNvPr id="10" name="TextBox 9"/>
           <p:cNvSpPr txBox="1"/>
           <p:nvPr/>
         </p:nvSpPr>
         <p:spPr>
           <a:xfrm>
-            <a:off x="9997135" y="6629400"/>
-            <a:ext cx="1371600" cy="274320"/>
+            <a:off x="6342734" y="1998726"/>
+            <a:ext cx="2320975" cy="1739029"/>
           </a:xfrm>
           <a:prstGeom prst="rect">
             <a:avLst/>
@@ -5935,72 +8432,102 @@
           <a:noFill/>
         </p:spPr>
         <p:txBody>
-          <a:bodyPr wrap="square" lIns="0" tIns="0" rIns="0" bIns="0">
+          <a:bodyPr wrap="square" anchor="t" lIns="0" tIns="0" rIns="0" bIns="0">
             <a:spAutoFit/>
           </a:bodyPr>
           <a:lstStyle/>
           <a:p>
-            <a:pPr algn="r">
-              <a:buNone/>
-            </a:pPr>
-            <a:r>
-              <a:rPr sz="1100" b="0" i="0" u="none">
-                <a:solidFill>
-                  <a:srgbClr val="9CA3AF"/>
-                </a:solidFill>
-                <a:latin typeface="Calibri"/>
-              </a:rPr>
-              <a:t>6</a:t>
-            </a:r>
-          </a:p>
-        </p:txBody>
-      </p:sp>
-    </p:spTree>
-  </p:cSld>
-  <p:clrMapOvr>
-    <a:masterClrMapping/>
-  </p:clrMapOvr>
-</p:sld>
-</file>
-
-<file path=ppt/slides/slide7.xml><?xml version="1.0" encoding="utf-8"?>
-<p:sld xmlns:a="http://schemas.openxmlformats.org/drawingml/2006/main" xmlns:p="http://schemas.openxmlformats.org/presentationml/2006/main" xmlns:r="http://schemas.openxmlformats.org/officeDocument/2006/relationships">
-  <p:cSld>
-    <p:bg>
-      <p:bgPr>
-        <a:solidFill>
-          <a:srgbClr val="0F172A"/>
-        </a:solidFill>
-        <a:effectLst/>
-      </p:bgPr>
-    </p:bg>
-    <p:spTree>
-      <p:nvGrpSpPr>
-        <p:cNvPr id="1" name=""/>
-        <p:cNvGrpSpPr/>
-        <p:nvPr/>
-      </p:nvGrpSpPr>
-      <p:grpSpPr/>
-      <p:sp>
-        <p:nvSpPr>
-          <p:cNvPr id="2" name="Rounded Rectangle 1"/>
+            <a:pPr algn="l">
+              <a:spcAft>
+                <a:spcPts val="180"/>
+              </a:spcAft>
+              <a:buNone/>
+            </a:pPr>
+            <a:r>
+              <a:rPr sz="900" b="1" i="0" u="none">
+                <a:solidFill>
+                  <a:srgbClr val="38BDF8"/>
+                </a:solidFill>
+                <a:latin typeface="Calibri"/>
+              </a:rPr>
+              <a:t>• SERVICE 03</a:t>
+            </a:r>
+          </a:p>
+          <a:p>
+            <a:pPr algn="l">
+              <a:spcAft>
+                <a:spcPts val="270"/>
+              </a:spcAft>
+              <a:buNone/>
+            </a:pPr>
+            <a:r>
+              <a:rPr sz="1300" b="1" i="0" u="none">
+                <a:solidFill>
+                  <a:srgbClr val="F9FAFB"/>
+                </a:solidFill>
+                <a:latin typeface="Calibri"/>
+              </a:rPr>
+              <a:t>ASPICE &amp; Safety Compliance Accelerator</a:t>
+            </a:r>
+          </a:p>
+          <a:p>
+            <a:pPr algn="l">
+              <a:spcAft>
+                <a:spcPts val="270"/>
+              </a:spcAft>
+              <a:buNone/>
+            </a:pPr>
+            <a:r>
+              <a:rPr sz="1030" b="0" i="0" u="none">
+                <a:solidFill>
+                  <a:srgbClr val="F9FAFB"/>
+                </a:solidFill>
+                <a:latin typeface="Calibri"/>
+              </a:rPr>
+              <a:t>End-to-end bidirectional traceability automation from DOORS requirements to test logs, plus automated MISRA-C static remediation.</a:t>
+            </a:r>
+          </a:p>
+          <a:p>
+            <a:pPr algn="l">
+              <a:spcBef>
+                <a:spcPts val="270"/>
+              </a:spcBef>
+              <a:buNone/>
+            </a:pPr>
+            <a:r>
+              <a:rPr sz="950" b="1" i="0" u="none">
+                <a:solidFill>
+                  <a:srgbClr val="0D9488"/>
+                </a:solidFill>
+                <a:latin typeface="Calibri"/>
+              </a:rPr>
+              <a:t>▸ 100% Audit-Ready SWE.1-6</a:t>
+            </a:r>
+          </a:p>
+        </p:txBody>
+      </p:sp>
+      <p:sp>
+        <p:nvSpPr>
+          <p:cNvPr id="11" name="Rounded Rectangle 10"/>
           <p:cNvSpPr/>
           <p:nvPr/>
         </p:nvSpPr>
         <p:spPr>
           <a:xfrm>
-            <a:off x="822960" y="1828800"/>
-            <a:ext cx="5090007" cy="4572000"/>
+            <a:off x="8992893" y="1783334"/>
+            <a:ext cx="2650159" cy="2119013"/>
           </a:xfrm>
           <a:prstGeom prst="roundRect">
             <a:avLst>
-              <a:gd name="adj" fmla="val 2000"/>
+              <a:gd name="adj" fmla="val 4000"/>
             </a:avLst>
           </a:prstGeom>
-          <a:noFill/>
-          <a:ln w="6350">
+          <a:solidFill>
+            <a:srgbClr val="222A3B"/>
+          </a:solidFill>
+          <a:ln w="12700">
             <a:solidFill>
-              <a:srgbClr val="3F4555"/>
+              <a:srgbClr val="38BDF8"/>
             </a:solidFill>
           </a:ln>
         </p:spPr>
@@ -6028,82 +8555,23 @@
       </p:sp>
       <p:sp>
         <p:nvSpPr>
-          <p:cNvPr id="3" name="TextBox 2"/>
-          <p:cNvSpPr txBox="1"/>
-          <p:nvPr/>
-        </p:nvSpPr>
-        <p:spPr>
-          <a:xfrm>
-            <a:off x="1051560" y="2057400"/>
-            <a:ext cx="4632807" cy="4114800"/>
+          <p:cNvPr id="12" name="Rectangle 11"/>
+          <p:cNvSpPr/>
+          <p:nvPr/>
+        </p:nvSpPr>
+        <p:spPr>
+          <a:xfrm>
+            <a:off x="8992893" y="1783334"/>
+            <a:ext cx="2650159" cy="50800"/>
           </a:xfrm>
           <a:prstGeom prst="rect">
             <a:avLst/>
           </a:prstGeom>
-          <a:noFill/>
-        </p:spPr>
-        <p:txBody>
-          <a:bodyPr wrap="square" lIns="0" tIns="0" rIns="0" bIns="0">
-            <a:spAutoFit/>
-          </a:bodyPr>
-          <a:lstStyle/>
-          <a:p>
-            <a:pPr algn="l">
-              <a:spcAft>
-                <a:spcPts val="600"/>
-              </a:spcAft>
-              <a:buNone/>
-            </a:pPr>
-            <a:r>
-              <a:rPr sz="2000" b="1" i="0" u="none">
-                <a:solidFill>
-                  <a:srgbClr val="F9FAFB"/>
-                </a:solidFill>
-                <a:latin typeface="Calibri"/>
-              </a:rPr>
-              <a:t>Phase 1: 4-Week Rapid Proof of Concept (PoC)</a:t>
-            </a:r>
-          </a:p>
-          <a:p>
-            <a:pPr algn="l">
-              <a:spcAft>
-                <a:spcPts val="400"/>
-              </a:spcAft>
-              <a:buNone/>
-            </a:pPr>
-            <a:r>
-              <a:rPr sz="1600" b="0" i="0" u="none">
-                <a:solidFill>
-                  <a:srgbClr val="F9FAFB"/>
-                </a:solidFill>
-                <a:latin typeface="Calibri"/>
-              </a:rPr>
-              <a:t>Select one high-friction subsystem (e.g., FOC fault-injection test synthesis or dyno MTPA calibration). We demonstrate 50%+ time savings on your data with zero air-gap risk.</a:t>
-            </a:r>
-          </a:p>
-        </p:txBody>
-      </p:sp>
-      <p:sp>
-        <p:nvSpPr>
-          <p:cNvPr id="4" name="Rounded Rectangle 3"/>
-          <p:cNvSpPr/>
-          <p:nvPr/>
-        </p:nvSpPr>
-        <p:spPr>
-          <a:xfrm>
-            <a:off x="6278727" y="1828800"/>
-            <a:ext cx="5090007" cy="4572000"/>
-          </a:xfrm>
-          <a:prstGeom prst="roundRect">
-            <a:avLst>
-              <a:gd name="adj" fmla="val 2000"/>
-            </a:avLst>
-          </a:prstGeom>
-          <a:noFill/>
-          <a:ln w="6350">
-            <a:solidFill>
-              <a:srgbClr val="3F4555"/>
-            </a:solidFill>
+          <a:solidFill>
+            <a:srgbClr val="38BDF8"/>
+          </a:solidFill>
+          <a:ln>
+            <a:noFill/>
           </a:ln>
         </p:spPr>
         <p:style>
@@ -6130,14 +8598,14 @@
       </p:sp>
       <p:sp>
         <p:nvSpPr>
-          <p:cNvPr id="5" name="TextBox 4"/>
+          <p:cNvPr id="13" name="TextBox 12"/>
           <p:cNvSpPr txBox="1"/>
           <p:nvPr/>
         </p:nvSpPr>
         <p:spPr>
           <a:xfrm>
-            <a:off x="6507327" y="2057400"/>
-            <a:ext cx="4632807" cy="4114800"/>
+            <a:off x="9157485" y="1998726"/>
+            <a:ext cx="2320975" cy="1739029"/>
           </a:xfrm>
           <a:prstGeom prst="rect">
             <a:avLst/>
@@ -6145,102 +8613,103 @@
           <a:noFill/>
         </p:spPr>
         <p:txBody>
-          <a:bodyPr wrap="square" lIns="0" tIns="0" rIns="0" bIns="0">
+          <a:bodyPr wrap="square" anchor="t" lIns="0" tIns="0" rIns="0" bIns="0">
             <a:spAutoFit/>
           </a:bodyPr>
           <a:lstStyle/>
           <a:p>
             <a:pPr algn="l">
               <a:spcAft>
-                <a:spcPts val="600"/>
+                <a:spcPts val="180"/>
               </a:spcAft>
               <a:buNone/>
             </a:pPr>
             <a:r>
-              <a:rPr sz="2000" b="1" i="0" u="none">
-                <a:solidFill>
-                  <a:srgbClr val="F9FAFB"/>
-                </a:solidFill>
-                <a:latin typeface="Calibri"/>
-              </a:rPr>
-              <a:t>Phase 2: 12-Week Production Pilot &amp; Toolchain Rollout</a:t>
+              <a:rPr sz="900" b="1" i="0" u="none">
+                <a:solidFill>
+                  <a:srgbClr val="38BDF8"/>
+                </a:solidFill>
+                <a:latin typeface="Calibri"/>
+              </a:rPr>
+              <a:t>• SERVICE 04</a:t>
             </a:r>
           </a:p>
           <a:p>
             <a:pPr algn="l">
               <a:spcAft>
-                <a:spcPts val="400"/>
+                <a:spcPts val="270"/>
               </a:spcAft>
               <a:buNone/>
             </a:pPr>
             <a:r>
-              <a:rPr sz="1600" b="0" i="0" u="none">
+              <a:rPr sz="1300" b="1" i="0" u="none">
                 <a:solidFill>
                   <a:srgbClr val="F9FAFB"/>
                 </a:solidFill>
                 <a:latin typeface="Calibri"/>
               </a:rPr>
-              <a:t>Full on-prem deployment integrated into your CI/CD, dSPACE/Vector HIL benches, and DOORS database. Comprehensive training for your motor control engineers.</a:t>
-            </a:r>
-          </a:p>
-        </p:txBody>
-      </p:sp>
-      <p:sp>
-        <p:nvSpPr>
-          <p:cNvPr id="6" name="TextBox 5"/>
-          <p:cNvSpPr txBox="1"/>
-          <p:nvPr/>
-        </p:nvSpPr>
-        <p:spPr>
-          <a:xfrm>
-            <a:off x="822960" y="548640"/>
-            <a:ext cx="10545775" cy="1097280"/>
-          </a:xfrm>
-          <a:prstGeom prst="rect">
-            <a:avLst/>
-          </a:prstGeom>
-          <a:noFill/>
-        </p:spPr>
-        <p:txBody>
-          <a:bodyPr wrap="square" lIns="0" tIns="0" rIns="0" bIns="0">
-            <a:spAutoFit/>
-          </a:bodyPr>
-          <a:lstStyle/>
-          <a:p>
-            <a:pPr algn="ctr">
-              <a:buNone/>
-            </a:pPr>
-            <a:r>
-              <a:rPr sz="3000" b="1" i="0" u="none">
+              <a:t>Air-Gapped Sovereign Deployment</a:t>
+            </a:r>
+          </a:p>
+          <a:p>
+            <a:pPr algn="l">
+              <a:spcAft>
+                <a:spcPts val="270"/>
+              </a:spcAft>
+              <a:buNone/>
+            </a:pPr>
+            <a:r>
+              <a:rPr sz="1030" b="0" i="0" u="none">
                 <a:solidFill>
                   <a:srgbClr val="F9FAFB"/>
                 </a:solidFill>
                 <a:latin typeface="Calibri"/>
               </a:rPr>
-              <a:t>Turnkey Services: Accelerate Your Motor ECU Programs (cont.)</a:t>
-            </a:r>
-          </a:p>
-        </p:txBody>
-      </p:sp>
-      <p:sp>
-        <p:nvSpPr>
-          <p:cNvPr id="7" name="Rectangle 6"/>
+              <a:t>On-premise hardware setup, fine-tuning domain models on your internal motor firmware conventions, and hands-on team enablement.</a:t>
+            </a:r>
+          </a:p>
+          <a:p>
+            <a:pPr algn="l">
+              <a:spcBef>
+                <a:spcPts val="270"/>
+              </a:spcBef>
+              <a:buNone/>
+            </a:pPr>
+            <a:r>
+              <a:rPr sz="950" b="1" i="0" u="none">
+                <a:solidFill>
+                  <a:srgbClr val="0D9488"/>
+                </a:solidFill>
+                <a:latin typeface="Calibri"/>
+              </a:rPr>
+              <a:t>▸ Zero Security Compromise</a:t>
+            </a:r>
+          </a:p>
+        </p:txBody>
+      </p:sp>
+      <p:sp>
+        <p:nvSpPr>
+          <p:cNvPr id="14" name="Rounded Rectangle 13"/>
           <p:cNvSpPr/>
           <p:nvPr/>
         </p:nvSpPr>
         <p:spPr>
           <a:xfrm>
-            <a:off x="822960" y="1645920"/>
-            <a:ext cx="10545775" cy="12700"/>
-          </a:xfrm>
-          <a:prstGeom prst="rect">
-            <a:avLst/>
+            <a:off x="548640" y="4012075"/>
+            <a:ext cx="5464911" cy="1313377"/>
+          </a:xfrm>
+          <a:prstGeom prst="roundRect">
+            <a:avLst>
+              <a:gd name="adj" fmla="val 4000"/>
+            </a:avLst>
           </a:prstGeom>
           <a:solidFill>
-            <a:srgbClr val="3F4555"/>
+            <a:srgbClr val="222A3B"/>
           </a:solidFill>
-          <a:ln>
-            <a:noFill/>
+          <a:ln w="12700">
+            <a:solidFill>
+              <a:srgbClr val="38BDF8"/>
+            </a:solidFill>
           </a:ln>
         </p:spPr>
         <p:style>
@@ -6267,37 +8736,591 @@
       </p:sp>
       <p:sp>
         <p:nvSpPr>
-          <p:cNvPr id="8" name="TextBox 7"/>
-          <p:cNvSpPr txBox="1"/>
-          <p:nvPr/>
-        </p:nvSpPr>
-        <p:spPr>
-          <a:xfrm>
-            <a:off x="9997135" y="6629400"/>
-            <a:ext cx="1371600" cy="274320"/>
+          <p:cNvPr id="15" name="Rectangle 14"/>
+          <p:cNvSpPr/>
+          <p:nvPr/>
+        </p:nvSpPr>
+        <p:spPr>
+          <a:xfrm>
+            <a:off x="548640" y="4012075"/>
+            <a:ext cx="5464911" cy="50800"/>
           </a:xfrm>
           <a:prstGeom prst="rect">
             <a:avLst/>
           </a:prstGeom>
+          <a:solidFill>
+            <a:srgbClr val="38BDF8"/>
+          </a:solidFill>
+          <a:ln>
+            <a:noFill/>
+          </a:ln>
+        </p:spPr>
+        <p:style>
+          <a:lnRef idx="1">
+            <a:schemeClr val="accent1"/>
+          </a:lnRef>
+          <a:fillRef idx="3">
+            <a:schemeClr val="accent1"/>
+          </a:fillRef>
+          <a:effectRef idx="2">
+            <a:schemeClr val="accent1"/>
+          </a:effectRef>
+          <a:fontRef idx="minor">
+            <a:schemeClr val="lt1"/>
+          </a:fontRef>
+        </p:style>
+        <p:txBody>
+          <a:bodyPr rtlCol="0" anchor="ctr"/>
+          <a:lstStyle/>
+          <a:p>
+            <a:pPr algn="ctr"/>
+          </a:p>
+        </p:txBody>
+      </p:sp>
+      <p:sp>
+        <p:nvSpPr>
+          <p:cNvPr id="16" name="TextBox 15"/>
+          <p:cNvSpPr txBox="1"/>
+          <p:nvPr/>
+        </p:nvSpPr>
+        <p:spPr>
+          <a:xfrm>
+            <a:off x="679977" y="4194212"/>
+            <a:ext cx="5202237" cy="999903"/>
+          </a:xfrm>
+          <a:prstGeom prst="rect">
+            <a:avLst/>
+          </a:prstGeom>
           <a:noFill/>
         </p:spPr>
         <p:txBody>
-          <a:bodyPr wrap="square" lIns="0" tIns="0" rIns="0" bIns="0">
+          <a:bodyPr wrap="square" anchor="t" lIns="0" tIns="0" rIns="0" bIns="0">
             <a:spAutoFit/>
           </a:bodyPr>
           <a:lstStyle/>
           <a:p>
+            <a:pPr algn="l">
+              <a:spcAft>
+                <a:spcPts val="300"/>
+              </a:spcAft>
+              <a:buNone/>
+            </a:pPr>
+            <a:r>
+              <a:rPr sz="1439" b="1" i="0" u="none">
+                <a:solidFill>
+                  <a:srgbClr val="F9FAFB"/>
+                </a:solidFill>
+                <a:latin typeface="Calibri"/>
+              </a:rPr>
+              <a:t>Phase 1: 4-Week Rapid Proof of Concept (PoC)</a:t>
+            </a:r>
+          </a:p>
+          <a:p>
+            <a:pPr algn="l">
+              <a:spcAft>
+                <a:spcPts val="300"/>
+              </a:spcAft>
+              <a:buNone/>
+            </a:pPr>
+            <a:r>
+              <a:rPr sz="1150" b="0" i="0" u="none">
+                <a:solidFill>
+                  <a:srgbClr val="F9FAFB"/>
+                </a:solidFill>
+                <a:latin typeface="Calibri"/>
+              </a:rPr>
+              <a:t>Select one high-friction subsystem (e.g., FOC fault-injection test synthesis or dyno MTPA calibration). We demonstrate 50%+ time savings on your data with zero air-gap risk.</a:t>
+            </a:r>
+          </a:p>
+        </p:txBody>
+      </p:sp>
+      <p:sp>
+        <p:nvSpPr>
+          <p:cNvPr id="17" name="Rounded Rectangle 16"/>
+          <p:cNvSpPr/>
+          <p:nvPr/>
+        </p:nvSpPr>
+        <p:spPr>
+          <a:xfrm>
+            <a:off x="6178143" y="4012075"/>
+            <a:ext cx="5464911" cy="1313377"/>
+          </a:xfrm>
+          <a:prstGeom prst="roundRect">
+            <a:avLst>
+              <a:gd name="adj" fmla="val 4000"/>
+            </a:avLst>
+          </a:prstGeom>
+          <a:solidFill>
+            <a:srgbClr val="222A3B"/>
+          </a:solidFill>
+          <a:ln w="12700">
+            <a:solidFill>
+              <a:srgbClr val="38BDF8"/>
+            </a:solidFill>
+          </a:ln>
+        </p:spPr>
+        <p:style>
+          <a:lnRef idx="1">
+            <a:schemeClr val="accent1"/>
+          </a:lnRef>
+          <a:fillRef idx="3">
+            <a:schemeClr val="accent1"/>
+          </a:fillRef>
+          <a:effectRef idx="2">
+            <a:schemeClr val="accent1"/>
+          </a:effectRef>
+          <a:fontRef idx="minor">
+            <a:schemeClr val="lt1"/>
+          </a:fontRef>
+        </p:style>
+        <p:txBody>
+          <a:bodyPr rtlCol="0" anchor="ctr"/>
+          <a:lstStyle/>
+          <a:p>
+            <a:pPr algn="ctr"/>
+          </a:p>
+        </p:txBody>
+      </p:sp>
+      <p:sp>
+        <p:nvSpPr>
+          <p:cNvPr id="18" name="Rectangle 17"/>
+          <p:cNvSpPr/>
+          <p:nvPr/>
+        </p:nvSpPr>
+        <p:spPr>
+          <a:xfrm>
+            <a:off x="6178143" y="4012075"/>
+            <a:ext cx="5464911" cy="50800"/>
+          </a:xfrm>
+          <a:prstGeom prst="rect">
+            <a:avLst/>
+          </a:prstGeom>
+          <a:solidFill>
+            <a:srgbClr val="38BDF8"/>
+          </a:solidFill>
+          <a:ln>
+            <a:noFill/>
+          </a:ln>
+        </p:spPr>
+        <p:style>
+          <a:lnRef idx="1">
+            <a:schemeClr val="accent1"/>
+          </a:lnRef>
+          <a:fillRef idx="3">
+            <a:schemeClr val="accent1"/>
+          </a:fillRef>
+          <a:effectRef idx="2">
+            <a:schemeClr val="accent1"/>
+          </a:effectRef>
+          <a:fontRef idx="minor">
+            <a:schemeClr val="lt1"/>
+          </a:fontRef>
+        </p:style>
+        <p:txBody>
+          <a:bodyPr rtlCol="0" anchor="ctr"/>
+          <a:lstStyle/>
+          <a:p>
+            <a:pPr algn="ctr"/>
+          </a:p>
+        </p:txBody>
+      </p:sp>
+      <p:sp>
+        <p:nvSpPr>
+          <p:cNvPr id="19" name="TextBox 18"/>
+          <p:cNvSpPr txBox="1"/>
+          <p:nvPr/>
+        </p:nvSpPr>
+        <p:spPr>
+          <a:xfrm>
+            <a:off x="6309480" y="4194212"/>
+            <a:ext cx="5202237" cy="999903"/>
+          </a:xfrm>
+          <a:prstGeom prst="rect">
+            <a:avLst/>
+          </a:prstGeom>
+          <a:noFill/>
+        </p:spPr>
+        <p:txBody>
+          <a:bodyPr wrap="square" anchor="t" lIns="0" tIns="0" rIns="0" bIns="0">
+            <a:spAutoFit/>
+          </a:bodyPr>
+          <a:lstStyle/>
+          <a:p>
+            <a:pPr algn="l">
+              <a:spcAft>
+                <a:spcPts val="300"/>
+              </a:spcAft>
+              <a:buNone/>
+            </a:pPr>
+            <a:r>
+              <a:rPr sz="1439" b="1" i="0" u="none">
+                <a:solidFill>
+                  <a:srgbClr val="F9FAFB"/>
+                </a:solidFill>
+                <a:latin typeface="Calibri"/>
+              </a:rPr>
+              <a:t>Phase 2: 12-Week Production Pilot &amp; Toolchain Rollout</a:t>
+            </a:r>
+          </a:p>
+          <a:p>
+            <a:pPr algn="l">
+              <a:spcAft>
+                <a:spcPts val="300"/>
+              </a:spcAft>
+              <a:buNone/>
+            </a:pPr>
+            <a:r>
+              <a:rPr sz="1150" b="0" i="0" u="none">
+                <a:solidFill>
+                  <a:srgbClr val="F9FAFB"/>
+                </a:solidFill>
+                <a:latin typeface="Calibri"/>
+              </a:rPr>
+              <a:t>Full on-prem deployment integrated into your CI/CD, dSPACE/Vector HIL benches, and DOORS database. Comprehensive training for your motor control engineers.</a:t>
+            </a:r>
+          </a:p>
+        </p:txBody>
+      </p:sp>
+      <p:sp>
+        <p:nvSpPr>
+          <p:cNvPr id="20" name="Rounded Rectangle 19"/>
+          <p:cNvSpPr/>
+          <p:nvPr/>
+        </p:nvSpPr>
+        <p:spPr>
+          <a:xfrm>
+            <a:off x="548640" y="5435180"/>
+            <a:ext cx="11094415" cy="965619"/>
+          </a:xfrm>
+          <a:prstGeom prst="roundRect">
+            <a:avLst>
+              <a:gd name="adj" fmla="val 4000"/>
+            </a:avLst>
+          </a:prstGeom>
+          <a:solidFill>
+            <a:srgbClr val="222A3B"/>
+          </a:solidFill>
+          <a:ln w="12700">
+            <a:solidFill>
+              <a:srgbClr val="38BDF8"/>
+            </a:solidFill>
+          </a:ln>
+        </p:spPr>
+        <p:style>
+          <a:lnRef idx="1">
+            <a:schemeClr val="accent1"/>
+          </a:lnRef>
+          <a:fillRef idx="3">
+            <a:schemeClr val="accent1"/>
+          </a:fillRef>
+          <a:effectRef idx="2">
+            <a:schemeClr val="accent1"/>
+          </a:effectRef>
+          <a:fontRef idx="minor">
+            <a:schemeClr val="lt1"/>
+          </a:fontRef>
+        </p:style>
+        <p:txBody>
+          <a:bodyPr rtlCol="0" anchor="ctr"/>
+          <a:lstStyle/>
+          <a:p>
+            <a:pPr algn="ctr"/>
+          </a:p>
+        </p:txBody>
+      </p:sp>
+      <p:sp>
+        <p:nvSpPr>
+          <p:cNvPr id="21" name="Rectangle 20"/>
+          <p:cNvSpPr/>
+          <p:nvPr/>
+        </p:nvSpPr>
+        <p:spPr>
+          <a:xfrm>
+            <a:off x="548640" y="5435180"/>
+            <a:ext cx="50800" cy="965619"/>
+          </a:xfrm>
+          <a:prstGeom prst="rect">
+            <a:avLst/>
+          </a:prstGeom>
+          <a:solidFill>
+            <a:srgbClr val="38BDF8"/>
+          </a:solidFill>
+          <a:ln>
+            <a:noFill/>
+          </a:ln>
+        </p:spPr>
+        <p:style>
+          <a:lnRef idx="1">
+            <a:schemeClr val="accent1"/>
+          </a:lnRef>
+          <a:fillRef idx="3">
+            <a:schemeClr val="accent1"/>
+          </a:fillRef>
+          <a:effectRef idx="2">
+            <a:schemeClr val="accent1"/>
+          </a:effectRef>
+          <a:fontRef idx="minor">
+            <a:schemeClr val="lt1"/>
+          </a:fontRef>
+        </p:style>
+        <p:txBody>
+          <a:bodyPr rtlCol="0" anchor="ctr"/>
+          <a:lstStyle/>
+          <a:p>
+            <a:pPr algn="ctr"/>
+          </a:p>
+        </p:txBody>
+      </p:sp>
+      <p:sp>
+        <p:nvSpPr>
+          <p:cNvPr id="22" name="TextBox 21"/>
+          <p:cNvSpPr txBox="1"/>
+          <p:nvPr/>
+        </p:nvSpPr>
+        <p:spPr>
+          <a:xfrm>
+            <a:off x="745744" y="5526620"/>
+            <a:ext cx="10751007" cy="782739"/>
+          </a:xfrm>
+          <a:prstGeom prst="rect">
+            <a:avLst/>
+          </a:prstGeom>
+          <a:noFill/>
+        </p:spPr>
+        <p:txBody>
+          <a:bodyPr wrap="square" anchor="ctr" lIns="0" tIns="0" rIns="0" bIns="0">
+            <a:spAutoFit/>
+          </a:bodyPr>
+          <a:lstStyle/>
+          <a:p>
+            <a:pPr algn="l">
+              <a:spcAft>
+                <a:spcPts val="200"/>
+              </a:spcAft>
+              <a:buNone/>
+            </a:pPr>
+            <a:r>
+              <a:rPr sz="1250" b="1" i="0" u="none">
+                <a:solidFill>
+                  <a:srgbClr val="F9FAFB"/>
+                </a:solidFill>
+                <a:latin typeface="Calibri"/>
+              </a:rPr>
+              <a:t>Ready to Cut 6+ Months from Your Next Motor ECU Program?</a:t>
+            </a:r>
+            <a:r>
+              <a:rPr sz="1000" b="1" i="0" u="none">
+                <a:solidFill>
+                  <a:srgbClr val="38BDF8"/>
+                </a:solidFill>
+                <a:latin typeface="Calibri"/>
+              </a:rPr>
+              <a:t>   [Schedule Technical Briefing]</a:t>
+            </a:r>
+          </a:p>
+          <a:p>
+            <a:pPr algn="l">
+              <a:spcAft>
+                <a:spcPts val="200"/>
+              </a:spcAft>
+              <a:buNone/>
+            </a:pPr>
+            <a:r>
+              <a:rPr sz="1100" b="0" i="0" u="none">
+                <a:solidFill>
+                  <a:srgbClr val="F9FAFB"/>
+                </a:solidFill>
+                <a:latin typeface="Calibri"/>
+              </a:rPr>
+              <a:t>Book a 45-minute confidential technical deep dive and see our on-premise motor control AI demo.</a:t>
+            </a:r>
+          </a:p>
+        </p:txBody>
+      </p:sp>
+      <p:sp>
+        <p:nvSpPr>
+          <p:cNvPr id="23" name="TextBox 22"/>
+          <p:cNvSpPr txBox="1"/>
+          <p:nvPr/>
+        </p:nvSpPr>
+        <p:spPr>
+          <a:xfrm>
+            <a:off x="548640" y="411480"/>
+            <a:ext cx="11094415" cy="1248410"/>
+          </a:xfrm>
+          <a:prstGeom prst="rect">
+            <a:avLst/>
+          </a:prstGeom>
+          <a:noFill/>
+        </p:spPr>
+        <p:txBody>
+          <a:bodyPr wrap="square" anchor="t" lIns="0" tIns="0" rIns="0" bIns="0">
+            <a:spAutoFit/>
+          </a:bodyPr>
+          <a:lstStyle/>
+          <a:p>
+            <a:pPr algn="l">
+              <a:spcAft>
+                <a:spcPts val="200"/>
+              </a:spcAft>
+              <a:buNone/>
+            </a:pPr>
+            <a:r>
+              <a:rPr sz="1100" b="1" i="0" u="none">
+                <a:solidFill>
+                  <a:srgbClr val="38BDF8"/>
+                </a:solidFill>
+                <a:latin typeface="Calibri"/>
+              </a:rPr>
+              <a:t>• STRATEGIC ENGAGEMENT &amp; PARTNERSHIP · NEXT STEPS</a:t>
+            </a:r>
+          </a:p>
+          <a:p>
+            <a:pPr algn="l">
+              <a:buNone/>
+            </a:pPr>
+            <a:r>
+              <a:rPr sz="2400" b="1" i="0" u="none">
+                <a:solidFill>
+                  <a:srgbClr val="F9FAFB"/>
+                </a:solidFill>
+                <a:latin typeface="Calibri"/>
+              </a:rPr>
+              <a:t>Turnkey Services: Accelerate Your Motor ECU Programs</a:t>
+            </a:r>
+          </a:p>
+          <a:p>
+            <a:pPr algn="l">
+              <a:spcBef>
+                <a:spcPts val="300"/>
+              </a:spcBef>
+              <a:buNone/>
+            </a:pPr>
+            <a:r>
+              <a:rPr sz="1250" b="0" i="0" u="none">
+                <a:solidFill>
+                  <a:srgbClr val="9CA3AF"/>
+                </a:solidFill>
+                <a:latin typeface="Calibri"/>
+              </a:rPr>
+              <a:t>We deliver end-to-end enablement: from integrating secure AI engines into your toolchain to fine-tuning on your proprietary legacy codebase and executing rapid 4-week proof-of-concepts.</a:t>
+            </a:r>
+          </a:p>
+        </p:txBody>
+      </p:sp>
+      <p:sp>
+        <p:nvSpPr>
+          <p:cNvPr id="24" name="Rectangle 23"/>
+          <p:cNvSpPr/>
+          <p:nvPr/>
+        </p:nvSpPr>
+        <p:spPr>
+          <a:xfrm>
+            <a:off x="548640" y="1672590"/>
+            <a:ext cx="2286000" cy="38100"/>
+          </a:xfrm>
+          <a:prstGeom prst="rect">
+            <a:avLst/>
+          </a:prstGeom>
+          <a:solidFill>
+            <a:srgbClr val="38BDF8"/>
+          </a:solidFill>
+          <a:ln>
+            <a:noFill/>
+          </a:ln>
+        </p:spPr>
+        <p:style>
+          <a:lnRef idx="1">
+            <a:schemeClr val="accent1"/>
+          </a:lnRef>
+          <a:fillRef idx="3">
+            <a:schemeClr val="accent1"/>
+          </a:fillRef>
+          <a:effectRef idx="2">
+            <a:schemeClr val="accent1"/>
+          </a:effectRef>
+          <a:fontRef idx="minor">
+            <a:schemeClr val="lt1"/>
+          </a:fontRef>
+        </p:style>
+        <p:txBody>
+          <a:bodyPr rtlCol="0" anchor="ctr"/>
+          <a:lstStyle/>
+          <a:p>
+            <a:pPr algn="ctr"/>
+          </a:p>
+        </p:txBody>
+      </p:sp>
+      <p:sp>
+        <p:nvSpPr>
+          <p:cNvPr id="25" name="TextBox 24"/>
+          <p:cNvSpPr txBox="1"/>
+          <p:nvPr/>
+        </p:nvSpPr>
+        <p:spPr>
+          <a:xfrm>
+            <a:off x="548640" y="6437376"/>
+            <a:ext cx="9539935" cy="256032"/>
+          </a:xfrm>
+          <a:prstGeom prst="rect">
+            <a:avLst/>
+          </a:prstGeom>
+          <a:noFill/>
+        </p:spPr>
+        <p:txBody>
+          <a:bodyPr wrap="square" anchor="ctr" lIns="0" tIns="0" rIns="0" bIns="0">
+            <a:spAutoFit/>
+          </a:bodyPr>
+          <a:lstStyle/>
+          <a:p>
+            <a:pPr algn="l">
+              <a:buNone/>
+            </a:pPr>
+            <a:r>
+              <a:rPr sz="950" b="0" i="0" u="none">
+                <a:solidFill>
+                  <a:srgbClr val="9CA3AF"/>
+                </a:solidFill>
+                <a:latin typeface="Calibri"/>
+              </a:rPr>
+              <a:t>Automotive Systems Engineering · Ready for Immediate Deployment</a:t>
+            </a:r>
+          </a:p>
+        </p:txBody>
+      </p:sp>
+      <p:sp>
+        <p:nvSpPr>
+          <p:cNvPr id="26" name="TextBox 25"/>
+          <p:cNvSpPr txBox="1"/>
+          <p:nvPr/>
+        </p:nvSpPr>
+        <p:spPr>
+          <a:xfrm>
+            <a:off x="10271455" y="6437376"/>
+            <a:ext cx="1371600" cy="256032"/>
+          </a:xfrm>
+          <a:prstGeom prst="rect">
+            <a:avLst/>
+          </a:prstGeom>
+          <a:noFill/>
+        </p:spPr>
+        <p:txBody>
+          <a:bodyPr wrap="square" anchor="ctr" lIns="0" tIns="0" rIns="0" bIns="0">
+            <a:spAutoFit/>
+          </a:bodyPr>
+          <a:lstStyle/>
+          <a:p>
             <a:pPr algn="r">
               <a:buNone/>
             </a:pPr>
             <a:r>
-              <a:rPr sz="1100" b="0" i="0" u="none">
+              <a:rPr sz="950" b="0" i="0" u="none">
                 <a:solidFill>
                   <a:srgbClr val="9CA3AF"/>
                 </a:solidFill>
                 <a:latin typeface="Calibri"/>
               </a:rPr>
-              <a:t>7</a:t>
+              <a:t>5</a:t>
             </a:r>
           </a:p>
         </p:txBody>
